--- a/1.4 Direct Links/1.4 Direct Links.pptx
+++ b/1.4 Direct Links/1.4 Direct Links.pptx
@@ -17,6 +17,10 @@
     <p:sldId id="266" r:id="rId11"/>
     <p:sldId id="267" r:id="rId12"/>
     <p:sldId id="264" r:id="rId13"/>
+    <p:sldId id="268" r:id="rId14"/>
+    <p:sldId id="269" r:id="rId15"/>
+    <p:sldId id="270" r:id="rId16"/>
+    <p:sldId id="271" r:id="rId17"/>
   </p:sldIdLst>
   <p:sldSz cx="12192000" cy="6858000"/>
   <p:notesSz cx="6858000" cy="9144000"/>
@@ -115,6 +119,11 @@
       </a:defRPr>
     </a:lvl9pPr>
   </p:defaultTextStyle>
+  <p:extLst>
+    <p:ext uri="{EFAFB233-063F-42B5-8137-9DF3F51BA10A}">
+      <p15:sldGuideLst xmlns:p15="http://schemas.microsoft.com/office/powerpoint/2012/main"/>
+    </p:ext>
+  </p:extLst>
 </p:presentation>
 </file>
 
@@ -175,7 +184,7 @@
           <a:noFill/>
           <a:extLst>
             <a:ext uri="{909E8E84-426E-40dd-AFC4-6F175D3DCCD1}">
-              <a14:hiddenFill xmlns:a14="http://schemas.microsoft.com/office/drawing/2010/main" xmlns="">
+              <a14:hiddenFill xmlns="" xmlns:a14="http://schemas.microsoft.com/office/drawing/2010/main">
                 <a:solidFill>
                   <a:srgbClr val="FFFFFF"/>
                 </a:solidFill>
@@ -234,7 +243,7 @@
             </a:ln>
             <a:extLst>
               <a:ext uri="{91240B29-F687-4f45-9708-019B960494DF}">
-                <a14:hiddenLine xmlns:a14="http://schemas.microsoft.com/office/drawing/2010/main" xmlns="" w="9525">
+                <a14:hiddenLine xmlns="" xmlns:a14="http://schemas.microsoft.com/office/drawing/2010/main" w="9525">
                   <a:solidFill>
                     <a:srgbClr val="000000"/>
                   </a:solidFill>
@@ -324,7 +333,7 @@
             </a:ln>
             <a:extLst>
               <a:ext uri="{91240B29-F687-4f45-9708-019B960494DF}">
-                <a14:hiddenLine xmlns:a14="http://schemas.microsoft.com/office/drawing/2010/main" xmlns="" w="9525">
+                <a14:hiddenLine xmlns="" xmlns:a14="http://schemas.microsoft.com/office/drawing/2010/main" w="9525">
                   <a:solidFill>
                     <a:srgbClr val="000000"/>
                   </a:solidFill>
@@ -414,7 +423,7 @@
             </a:ln>
             <a:extLst>
               <a:ext uri="{91240B29-F687-4f45-9708-019B960494DF}">
-                <a14:hiddenLine xmlns:a14="http://schemas.microsoft.com/office/drawing/2010/main" xmlns="" w="9525">
+                <a14:hiddenLine xmlns="" xmlns:a14="http://schemas.microsoft.com/office/drawing/2010/main" w="9525">
                   <a:solidFill>
                     <a:srgbClr val="000000"/>
                   </a:solidFill>
@@ -448,7 +457,7 @@
             </a:ln>
             <a:extLst>
               <a:ext uri="{91240B29-F687-4f45-9708-019B960494DF}">
-                <a14:hiddenLine xmlns:a14="http://schemas.microsoft.com/office/drawing/2010/main" xmlns="" w="9525">
+                <a14:hiddenLine xmlns="" xmlns:a14="http://schemas.microsoft.com/office/drawing/2010/main" w="9525">
                   <a:solidFill>
                     <a:srgbClr val="000000"/>
                   </a:solidFill>
@@ -538,7 +547,7 @@
             </a:ln>
             <a:extLst>
               <a:ext uri="{91240B29-F687-4f45-9708-019B960494DF}">
-                <a14:hiddenLine xmlns:a14="http://schemas.microsoft.com/office/drawing/2010/main" xmlns="" w="9525">
+                <a14:hiddenLine xmlns="" xmlns:a14="http://schemas.microsoft.com/office/drawing/2010/main" w="9525">
                   <a:solidFill>
                     <a:srgbClr val="000000"/>
                   </a:solidFill>
@@ -600,7 +609,7 @@
             </a:ln>
             <a:extLst>
               <a:ext uri="{91240B29-F687-4f45-9708-019B960494DF}">
-                <a14:hiddenLine xmlns:a14="http://schemas.microsoft.com/office/drawing/2010/main" xmlns="" w="9525">
+                <a14:hiddenLine xmlns="" xmlns:a14="http://schemas.microsoft.com/office/drawing/2010/main" w="9525">
                   <a:solidFill>
                     <a:srgbClr val="000000"/>
                   </a:solidFill>
@@ -662,7 +671,7 @@
             </a:ln>
             <a:extLst>
               <a:ext uri="{91240B29-F687-4f45-9708-019B960494DF}">
-                <a14:hiddenLine xmlns:a14="http://schemas.microsoft.com/office/drawing/2010/main" xmlns="" w="9525">
+                <a14:hiddenLine xmlns="" xmlns:a14="http://schemas.microsoft.com/office/drawing/2010/main" w="9525">
                   <a:solidFill>
                     <a:srgbClr val="000000"/>
                   </a:solidFill>
@@ -752,7 +761,7 @@
             </a:ln>
             <a:extLst>
               <a:ext uri="{91240B29-F687-4f45-9708-019B960494DF}">
-                <a14:hiddenLine xmlns:a14="http://schemas.microsoft.com/office/drawing/2010/main" xmlns="" w="9525">
+                <a14:hiddenLine xmlns="" xmlns:a14="http://schemas.microsoft.com/office/drawing/2010/main" w="9525">
                   <a:solidFill>
                     <a:srgbClr val="000000"/>
                   </a:solidFill>
@@ -814,7 +823,7 @@
             </a:ln>
             <a:extLst>
               <a:ext uri="{91240B29-F687-4f45-9708-019B960494DF}">
-                <a14:hiddenLine xmlns:a14="http://schemas.microsoft.com/office/drawing/2010/main" xmlns="" w="9525">
+                <a14:hiddenLine xmlns="" xmlns:a14="http://schemas.microsoft.com/office/drawing/2010/main" w="9525">
                   <a:solidFill>
                     <a:srgbClr val="000000"/>
                   </a:solidFill>
@@ -876,7 +885,7 @@
             </a:ln>
             <a:extLst>
               <a:ext uri="{91240B29-F687-4f45-9708-019B960494DF}">
-                <a14:hiddenLine xmlns:a14="http://schemas.microsoft.com/office/drawing/2010/main" xmlns="" w="9525">
+                <a14:hiddenLine xmlns="" xmlns:a14="http://schemas.microsoft.com/office/drawing/2010/main" w="9525">
                   <a:solidFill>
                     <a:srgbClr val="000000"/>
                   </a:solidFill>
@@ -966,7 +975,7 @@
             </a:ln>
             <a:extLst>
               <a:ext uri="{91240B29-F687-4f45-9708-019B960494DF}">
-                <a14:hiddenLine xmlns:a14="http://schemas.microsoft.com/office/drawing/2010/main" xmlns="" w="9525">
+                <a14:hiddenLine xmlns="" xmlns:a14="http://schemas.microsoft.com/office/drawing/2010/main" w="9525">
                   <a:solidFill>
                     <a:srgbClr val="000000"/>
                   </a:solidFill>
@@ -1056,7 +1065,7 @@
             </a:ln>
             <a:extLst>
               <a:ext uri="{91240B29-F687-4f45-9708-019B960494DF}">
-                <a14:hiddenLine xmlns:a14="http://schemas.microsoft.com/office/drawing/2010/main" xmlns="" w="9525">
+                <a14:hiddenLine xmlns="" xmlns:a14="http://schemas.microsoft.com/office/drawing/2010/main" w="9525">
                   <a:solidFill>
                     <a:srgbClr val="000000"/>
                   </a:solidFill>
@@ -1118,7 +1127,7 @@
             </a:ln>
             <a:extLst>
               <a:ext uri="{91240B29-F687-4f45-9708-019B960494DF}">
-                <a14:hiddenLine xmlns:a14="http://schemas.microsoft.com/office/drawing/2010/main" xmlns="" w="9525">
+                <a14:hiddenLine xmlns="" xmlns:a14="http://schemas.microsoft.com/office/drawing/2010/main" w="9525">
                   <a:solidFill>
                     <a:srgbClr val="000000"/>
                   </a:solidFill>
@@ -1228,7 +1237,7 @@
             </a:ln>
             <a:extLst>
               <a:ext uri="{91240B29-F687-4f45-9708-019B960494DF}">
-                <a14:hiddenLine xmlns:a14="http://schemas.microsoft.com/office/drawing/2010/main" xmlns="" w="9525">
+                <a14:hiddenLine xmlns="" xmlns:a14="http://schemas.microsoft.com/office/drawing/2010/main" w="9525">
                   <a:solidFill>
                     <a:srgbClr val="000000"/>
                   </a:solidFill>
@@ -1290,7 +1299,7 @@
             </a:ln>
             <a:extLst>
               <a:ext uri="{91240B29-F687-4f45-9708-019B960494DF}">
-                <a14:hiddenLine xmlns:a14="http://schemas.microsoft.com/office/drawing/2010/main" xmlns="" w="9525">
+                <a14:hiddenLine xmlns="" xmlns:a14="http://schemas.microsoft.com/office/drawing/2010/main" w="9525">
                   <a:solidFill>
                     <a:srgbClr val="000000"/>
                   </a:solidFill>
@@ -1380,7 +1389,7 @@
             </a:ln>
             <a:extLst>
               <a:ext uri="{91240B29-F687-4f45-9708-019B960494DF}">
-                <a14:hiddenLine xmlns:a14="http://schemas.microsoft.com/office/drawing/2010/main" xmlns="" w="9525">
+                <a14:hiddenLine xmlns="" xmlns:a14="http://schemas.microsoft.com/office/drawing/2010/main" w="9525">
                   <a:solidFill>
                     <a:srgbClr val="000000"/>
                   </a:solidFill>
@@ -1470,7 +1479,7 @@
             </a:ln>
             <a:extLst>
               <a:ext uri="{91240B29-F687-4f45-9708-019B960494DF}">
-                <a14:hiddenLine xmlns:a14="http://schemas.microsoft.com/office/drawing/2010/main" xmlns="" w="9525">
+                <a14:hiddenLine xmlns="" xmlns:a14="http://schemas.microsoft.com/office/drawing/2010/main" w="9525">
                   <a:solidFill>
                     <a:srgbClr val="000000"/>
                   </a:solidFill>
@@ -1532,7 +1541,7 @@
             </a:ln>
             <a:extLst>
               <a:ext uri="{91240B29-F687-4f45-9708-019B960494DF}">
-                <a14:hiddenLine xmlns:a14="http://schemas.microsoft.com/office/drawing/2010/main" xmlns="" w="9525">
+                <a14:hiddenLine xmlns="" xmlns:a14="http://schemas.microsoft.com/office/drawing/2010/main" w="9525">
                   <a:solidFill>
                     <a:srgbClr val="000000"/>
                   </a:solidFill>
@@ -1622,7 +1631,7 @@
             </a:ln>
             <a:extLst>
               <a:ext uri="{91240B29-F687-4f45-9708-019B960494DF}">
-                <a14:hiddenLine xmlns:a14="http://schemas.microsoft.com/office/drawing/2010/main" xmlns="" w="9525">
+                <a14:hiddenLine xmlns="" xmlns:a14="http://schemas.microsoft.com/office/drawing/2010/main" w="9525">
                   <a:solidFill>
                     <a:srgbClr val="000000"/>
                   </a:solidFill>
@@ -1712,7 +1721,7 @@
             </a:ln>
             <a:extLst>
               <a:ext uri="{91240B29-F687-4f45-9708-019B960494DF}">
-                <a14:hiddenLine xmlns:a14="http://schemas.microsoft.com/office/drawing/2010/main" xmlns="" w="9525">
+                <a14:hiddenLine xmlns="" xmlns:a14="http://schemas.microsoft.com/office/drawing/2010/main" w="9525">
                   <a:solidFill>
                     <a:srgbClr val="000000"/>
                   </a:solidFill>
@@ -1768,7 +1777,7 @@
             </a:ln>
             <a:extLst>
               <a:ext uri="{91240B29-F687-4f45-9708-019B960494DF}">
-                <a14:hiddenLine xmlns:a14="http://schemas.microsoft.com/office/drawing/2010/main" xmlns="" w="9525">
+                <a14:hiddenLine xmlns="" xmlns:a14="http://schemas.microsoft.com/office/drawing/2010/main" w="9525">
                   <a:solidFill>
                     <a:srgbClr val="000000"/>
                   </a:solidFill>
@@ -1858,7 +1867,7 @@
             </a:ln>
             <a:extLst>
               <a:ext uri="{91240B29-F687-4f45-9708-019B960494DF}">
-                <a14:hiddenLine xmlns:a14="http://schemas.microsoft.com/office/drawing/2010/main" xmlns="" w="9525">
+                <a14:hiddenLine xmlns="" xmlns:a14="http://schemas.microsoft.com/office/drawing/2010/main" w="9525">
                   <a:solidFill>
                     <a:srgbClr val="000000"/>
                   </a:solidFill>
@@ -1914,7 +1923,7 @@
             </a:ln>
             <a:extLst>
               <a:ext uri="{91240B29-F687-4f45-9708-019B960494DF}">
-                <a14:hiddenLine xmlns:a14="http://schemas.microsoft.com/office/drawing/2010/main" xmlns="" w="9525">
+                <a14:hiddenLine xmlns="" xmlns:a14="http://schemas.microsoft.com/office/drawing/2010/main" w="9525">
                   <a:solidFill>
                     <a:srgbClr val="000000"/>
                   </a:solidFill>
@@ -2004,7 +2013,7 @@
             </a:ln>
             <a:extLst>
               <a:ext uri="{91240B29-F687-4f45-9708-019B960494DF}">
-                <a14:hiddenLine xmlns:a14="http://schemas.microsoft.com/office/drawing/2010/main" xmlns="" w="9525">
+                <a14:hiddenLine xmlns="" xmlns:a14="http://schemas.microsoft.com/office/drawing/2010/main" w="9525">
                   <a:solidFill>
                     <a:srgbClr val="000000"/>
                   </a:solidFill>
@@ -2072,7 +2081,7 @@
             </a:ln>
             <a:extLst>
               <a:ext uri="{91240B29-F687-4f45-9708-019B960494DF}">
-                <a14:hiddenLine xmlns:a14="http://schemas.microsoft.com/office/drawing/2010/main" xmlns="" w="9525">
+                <a14:hiddenLine xmlns="" xmlns:a14="http://schemas.microsoft.com/office/drawing/2010/main" w="9525">
                   <a:solidFill>
                     <a:srgbClr val="000000"/>
                   </a:solidFill>
@@ -2162,7 +2171,7 @@
             </a:ln>
             <a:extLst>
               <a:ext uri="{91240B29-F687-4f45-9708-019B960494DF}">
-                <a14:hiddenLine xmlns:a14="http://schemas.microsoft.com/office/drawing/2010/main" xmlns="" w="9525">
+                <a14:hiddenLine xmlns="" xmlns:a14="http://schemas.microsoft.com/office/drawing/2010/main" w="9525">
                   <a:solidFill>
                     <a:srgbClr val="000000"/>
                   </a:solidFill>
@@ -2230,7 +2239,7 @@
             </a:ln>
             <a:extLst>
               <a:ext uri="{91240B29-F687-4f45-9708-019B960494DF}">
-                <a14:hiddenLine xmlns:a14="http://schemas.microsoft.com/office/drawing/2010/main" xmlns="" w="9525">
+                <a14:hiddenLine xmlns="" xmlns:a14="http://schemas.microsoft.com/office/drawing/2010/main" w="9525">
                   <a:solidFill>
                     <a:srgbClr val="000000"/>
                   </a:solidFill>
@@ -2320,7 +2329,7 @@
             </a:ln>
             <a:extLst>
               <a:ext uri="{91240B29-F687-4f45-9708-019B960494DF}">
-                <a14:hiddenLine xmlns:a14="http://schemas.microsoft.com/office/drawing/2010/main" xmlns="" w="9525">
+                <a14:hiddenLine xmlns="" xmlns:a14="http://schemas.microsoft.com/office/drawing/2010/main" w="9525">
                   <a:solidFill>
                     <a:srgbClr val="000000"/>
                   </a:solidFill>
@@ -2354,7 +2363,7 @@
             </a:ln>
             <a:extLst>
               <a:ext uri="{91240B29-F687-4f45-9708-019B960494DF}">
-                <a14:hiddenLine xmlns:a14="http://schemas.microsoft.com/office/drawing/2010/main" xmlns="" w="9525">
+                <a14:hiddenLine xmlns="" xmlns:a14="http://schemas.microsoft.com/office/drawing/2010/main" w="9525">
                   <a:solidFill>
                     <a:srgbClr val="000000"/>
                   </a:solidFill>
@@ -2444,7 +2453,7 @@
             </a:ln>
             <a:extLst>
               <a:ext uri="{91240B29-F687-4f45-9708-019B960494DF}">
-                <a14:hiddenLine xmlns:a14="http://schemas.microsoft.com/office/drawing/2010/main" xmlns="" w="9525">
+                <a14:hiddenLine xmlns="" xmlns:a14="http://schemas.microsoft.com/office/drawing/2010/main" w="9525">
                   <a:solidFill>
                     <a:srgbClr val="000000"/>
                   </a:solidFill>
@@ -2506,7 +2515,7 @@
             </a:ln>
             <a:extLst>
               <a:ext uri="{91240B29-F687-4f45-9708-019B960494DF}">
-                <a14:hiddenLine xmlns:a14="http://schemas.microsoft.com/office/drawing/2010/main" xmlns="" w="9525">
+                <a14:hiddenLine xmlns="" xmlns:a14="http://schemas.microsoft.com/office/drawing/2010/main" w="9525">
                   <a:solidFill>
                     <a:srgbClr val="000000"/>
                   </a:solidFill>
@@ -2568,7 +2577,7 @@
             </a:ln>
             <a:extLst>
               <a:ext uri="{91240B29-F687-4f45-9708-019B960494DF}">
-                <a14:hiddenLine xmlns:a14="http://schemas.microsoft.com/office/drawing/2010/main" xmlns="" w="9525">
+                <a14:hiddenLine xmlns="" xmlns:a14="http://schemas.microsoft.com/office/drawing/2010/main" w="9525">
                   <a:solidFill>
                     <a:srgbClr val="000000"/>
                   </a:solidFill>
@@ -2658,7 +2667,7 @@
             </a:ln>
             <a:extLst>
               <a:ext uri="{91240B29-F687-4f45-9708-019B960494DF}">
-                <a14:hiddenLine xmlns:a14="http://schemas.microsoft.com/office/drawing/2010/main" xmlns="" w="9525">
+                <a14:hiddenLine xmlns="" xmlns:a14="http://schemas.microsoft.com/office/drawing/2010/main" w="9525">
                   <a:solidFill>
                     <a:srgbClr val="000000"/>
                   </a:solidFill>
@@ -2726,7 +2735,7 @@
             </a:ln>
             <a:extLst>
               <a:ext uri="{91240B29-F687-4f45-9708-019B960494DF}">
-                <a14:hiddenLine xmlns:a14="http://schemas.microsoft.com/office/drawing/2010/main" xmlns="" w="9525">
+                <a14:hiddenLine xmlns="" xmlns:a14="http://schemas.microsoft.com/office/drawing/2010/main" w="9525">
                   <a:solidFill>
                     <a:srgbClr val="000000"/>
                   </a:solidFill>
@@ -2788,7 +2797,7 @@
             </a:ln>
             <a:extLst>
               <a:ext uri="{91240B29-F687-4f45-9708-019B960494DF}">
-                <a14:hiddenLine xmlns:a14="http://schemas.microsoft.com/office/drawing/2010/main" xmlns="" w="9525">
+                <a14:hiddenLine xmlns="" xmlns:a14="http://schemas.microsoft.com/office/drawing/2010/main" w="9525">
                   <a:solidFill>
                     <a:srgbClr val="000000"/>
                   </a:solidFill>
@@ -2878,7 +2887,7 @@
             </a:ln>
             <a:extLst>
               <a:ext uri="{91240B29-F687-4f45-9708-019B960494DF}">
-                <a14:hiddenLine xmlns:a14="http://schemas.microsoft.com/office/drawing/2010/main" xmlns="" w="9525">
+                <a14:hiddenLine xmlns="" xmlns:a14="http://schemas.microsoft.com/office/drawing/2010/main" w="9525">
                   <a:solidFill>
                     <a:srgbClr val="000000"/>
                   </a:solidFill>
@@ -2940,7 +2949,7 @@
             </a:ln>
             <a:extLst>
               <a:ext uri="{91240B29-F687-4f45-9708-019B960494DF}">
-                <a14:hiddenLine xmlns:a14="http://schemas.microsoft.com/office/drawing/2010/main" xmlns="" w="9525">
+                <a14:hiddenLine xmlns="" xmlns:a14="http://schemas.microsoft.com/office/drawing/2010/main" w="9525">
                   <a:solidFill>
                     <a:srgbClr val="000000"/>
                   </a:solidFill>
@@ -3030,7 +3039,7 @@
             </a:ln>
             <a:extLst>
               <a:ext uri="{91240B29-F687-4f45-9708-019B960494DF}">
-                <a14:hiddenLine xmlns:a14="http://schemas.microsoft.com/office/drawing/2010/main" xmlns="" w="9525">
+                <a14:hiddenLine xmlns="" xmlns:a14="http://schemas.microsoft.com/office/drawing/2010/main" w="9525">
                   <a:solidFill>
                     <a:srgbClr val="000000"/>
                   </a:solidFill>
@@ -3092,7 +3101,7 @@
             </a:ln>
             <a:extLst>
               <a:ext uri="{91240B29-F687-4f45-9708-019B960494DF}">
-                <a14:hiddenLine xmlns:a14="http://schemas.microsoft.com/office/drawing/2010/main" xmlns="" w="9525">
+                <a14:hiddenLine xmlns="" xmlns:a14="http://schemas.microsoft.com/office/drawing/2010/main" w="9525">
                   <a:solidFill>
                     <a:srgbClr val="000000"/>
                   </a:solidFill>
@@ -3182,7 +3191,7 @@
             </a:ln>
             <a:extLst>
               <a:ext uri="{91240B29-F687-4f45-9708-019B960494DF}">
-                <a14:hiddenLine xmlns:a14="http://schemas.microsoft.com/office/drawing/2010/main" xmlns="" w="9525">
+                <a14:hiddenLine xmlns="" xmlns:a14="http://schemas.microsoft.com/office/drawing/2010/main" w="9525">
                   <a:solidFill>
                     <a:srgbClr val="000000"/>
                   </a:solidFill>
@@ -3216,7 +3225,7 @@
             </a:ln>
             <a:extLst>
               <a:ext uri="{91240B29-F687-4f45-9708-019B960494DF}">
-                <a14:hiddenLine xmlns:a14="http://schemas.microsoft.com/office/drawing/2010/main" xmlns="" w="9525">
+                <a14:hiddenLine xmlns="" xmlns:a14="http://schemas.microsoft.com/office/drawing/2010/main" w="9525">
                   <a:solidFill>
                     <a:srgbClr val="000000"/>
                   </a:solidFill>
@@ -3281,7 +3290,7 @@
             </a:ln>
             <a:extLst>
               <a:ext uri="{91240B29-F687-4f45-9708-019B960494DF}">
-                <a14:hiddenLine xmlns:a14="http://schemas.microsoft.com/office/drawing/2010/main" xmlns="" w="9525">
+                <a14:hiddenLine xmlns="" xmlns:a14="http://schemas.microsoft.com/office/drawing/2010/main" w="9525">
                   <a:solidFill>
                     <a:srgbClr val="000000"/>
                   </a:solidFill>
@@ -3371,7 +3380,7 @@
             </a:ln>
             <a:extLst>
               <a:ext uri="{91240B29-F687-4f45-9708-019B960494DF}">
-                <a14:hiddenLine xmlns:a14="http://schemas.microsoft.com/office/drawing/2010/main" xmlns="" w="9525">
+                <a14:hiddenLine xmlns="" xmlns:a14="http://schemas.microsoft.com/office/drawing/2010/main" w="9525">
                   <a:solidFill>
                     <a:srgbClr val="000000"/>
                   </a:solidFill>
@@ -3433,7 +3442,7 @@
             </a:ln>
             <a:extLst>
               <a:ext uri="{91240B29-F687-4f45-9708-019B960494DF}">
-                <a14:hiddenLine xmlns:a14="http://schemas.microsoft.com/office/drawing/2010/main" xmlns="" w="9525">
+                <a14:hiddenLine xmlns="" xmlns:a14="http://schemas.microsoft.com/office/drawing/2010/main" w="9525">
                   <a:solidFill>
                     <a:srgbClr val="000000"/>
                   </a:solidFill>
@@ -3523,7 +3532,7 @@
             </a:ln>
             <a:extLst>
               <a:ext uri="{91240B29-F687-4f45-9708-019B960494DF}">
-                <a14:hiddenLine xmlns:a14="http://schemas.microsoft.com/office/drawing/2010/main" xmlns="" w="9525">
+                <a14:hiddenLine xmlns="" xmlns:a14="http://schemas.microsoft.com/office/drawing/2010/main" w="9525">
                   <a:solidFill>
                     <a:srgbClr val="000000"/>
                   </a:solidFill>
@@ -3613,7 +3622,7 @@
             </a:ln>
             <a:extLst>
               <a:ext uri="{91240B29-F687-4f45-9708-019B960494DF}">
-                <a14:hiddenLine xmlns:a14="http://schemas.microsoft.com/office/drawing/2010/main" xmlns="" w="9525">
+                <a14:hiddenLine xmlns="" xmlns:a14="http://schemas.microsoft.com/office/drawing/2010/main" w="9525">
                   <a:solidFill>
                     <a:srgbClr val="000000"/>
                   </a:solidFill>
@@ -3678,7 +3687,7 @@
             </a:ln>
             <a:extLst>
               <a:ext uri="{91240B29-F687-4f45-9708-019B960494DF}">
-                <a14:hiddenLine xmlns:a14="http://schemas.microsoft.com/office/drawing/2010/main" xmlns="" w="9525">
+                <a14:hiddenLine xmlns="" xmlns:a14="http://schemas.microsoft.com/office/drawing/2010/main" w="9525">
                   <a:solidFill>
                     <a:srgbClr val="000000"/>
                   </a:solidFill>
@@ -3740,7 +3749,7 @@
             </a:ln>
             <a:extLst>
               <a:ext uri="{91240B29-F687-4f45-9708-019B960494DF}">
-                <a14:hiddenLine xmlns:a14="http://schemas.microsoft.com/office/drawing/2010/main" xmlns="" w="9525">
+                <a14:hiddenLine xmlns="" xmlns:a14="http://schemas.microsoft.com/office/drawing/2010/main" w="9525">
                   <a:solidFill>
                     <a:srgbClr val="000000"/>
                   </a:solidFill>
@@ -3830,7 +3839,7 @@
             </a:ln>
             <a:extLst>
               <a:ext uri="{91240B29-F687-4f45-9708-019B960494DF}">
-                <a14:hiddenLine xmlns:a14="http://schemas.microsoft.com/office/drawing/2010/main" xmlns="" w="9525">
+                <a14:hiddenLine xmlns="" xmlns:a14="http://schemas.microsoft.com/office/drawing/2010/main" w="9525">
                   <a:solidFill>
                     <a:srgbClr val="000000"/>
                   </a:solidFill>
@@ -3920,7 +3929,7 @@
             </a:ln>
             <a:extLst>
               <a:ext uri="{91240B29-F687-4f45-9708-019B960494DF}">
-                <a14:hiddenLine xmlns:a14="http://schemas.microsoft.com/office/drawing/2010/main" xmlns="" w="9525">
+                <a14:hiddenLine xmlns="" xmlns:a14="http://schemas.microsoft.com/office/drawing/2010/main" w="9525">
                   <a:solidFill>
                     <a:srgbClr val="000000"/>
                   </a:solidFill>
@@ -3982,7 +3991,7 @@
             </a:ln>
             <a:extLst>
               <a:ext uri="{91240B29-F687-4f45-9708-019B960494DF}">
-                <a14:hiddenLine xmlns:a14="http://schemas.microsoft.com/office/drawing/2010/main" xmlns="" w="9525">
+                <a14:hiddenLine xmlns="" xmlns:a14="http://schemas.microsoft.com/office/drawing/2010/main" w="9525">
                   <a:solidFill>
                     <a:srgbClr val="000000"/>
                   </a:solidFill>
@@ -4102,7 +4111,7 @@
             </a:ln>
             <a:extLst>
               <a:ext uri="{91240B29-F687-4f45-9708-019B960494DF}">
-                <a14:hiddenLine xmlns:a14="http://schemas.microsoft.com/office/drawing/2010/main" xmlns="" w="9525">
+                <a14:hiddenLine xmlns="" xmlns:a14="http://schemas.microsoft.com/office/drawing/2010/main" w="9525">
                   <a:solidFill>
                     <a:srgbClr val="000000"/>
                   </a:solidFill>
@@ -4170,7 +4179,7 @@
             </a:ln>
             <a:extLst>
               <a:ext uri="{91240B29-F687-4f45-9708-019B960494DF}">
-                <a14:hiddenLine xmlns:a14="http://schemas.microsoft.com/office/drawing/2010/main" xmlns="" w="9525">
+                <a14:hiddenLine xmlns="" xmlns:a14="http://schemas.microsoft.com/office/drawing/2010/main" w="9525">
                   <a:solidFill>
                     <a:srgbClr val="000000"/>
                   </a:solidFill>
@@ -4260,7 +4269,7 @@
             </a:ln>
             <a:extLst>
               <a:ext uri="{91240B29-F687-4f45-9708-019B960494DF}">
-                <a14:hiddenLine xmlns:a14="http://schemas.microsoft.com/office/drawing/2010/main" xmlns="" w="9525">
+                <a14:hiddenLine xmlns="" xmlns:a14="http://schemas.microsoft.com/office/drawing/2010/main" w="9525">
                   <a:solidFill>
                     <a:srgbClr val="000000"/>
                   </a:solidFill>
@@ -4400,7 +4409,7 @@
           <a:p>
             <a:fld id="{7D5207A7-6A00-4516-866C-43D057526ED9}" type="datetimeFigureOut">
               <a:rPr lang="ru-RU" smtClean="0"/>
-              <a:t>27.08.2026</a:t>
+              <a:t>30.08.2026</a:t>
             </a:fld>
             <a:endParaRPr lang="ru-RU"/>
           </a:p>
@@ -4667,7 +4676,7 @@
           <a:p>
             <a:fld id="{7D5207A7-6A00-4516-866C-43D057526ED9}" type="datetimeFigureOut">
               <a:rPr lang="ru-RU" smtClean="0"/>
-              <a:t>27.08.2026</a:t>
+              <a:t>30.08.2026</a:t>
             </a:fld>
             <a:endParaRPr lang="ru-RU"/>
           </a:p>
@@ -4863,7 +4872,7 @@
           <a:p>
             <a:fld id="{7D5207A7-6A00-4516-866C-43D057526ED9}" type="datetimeFigureOut">
               <a:rPr lang="ru-RU" smtClean="0"/>
-              <a:t>27.08.2026</a:t>
+              <a:t>30.08.2026</a:t>
             </a:fld>
             <a:endParaRPr lang="ru-RU"/>
           </a:p>
@@ -5126,7 +5135,7 @@
           <a:p>
             <a:fld id="{7D5207A7-6A00-4516-866C-43D057526ED9}" type="datetimeFigureOut">
               <a:rPr lang="ru-RU" smtClean="0"/>
-              <a:t>27.08.2026</a:t>
+              <a:t>30.08.2026</a:t>
             </a:fld>
             <a:endParaRPr lang="ru-RU"/>
           </a:p>
@@ -5560,7 +5569,7 @@
           <a:p>
             <a:fld id="{7D5207A7-6A00-4516-866C-43D057526ED9}" type="datetimeFigureOut">
               <a:rPr lang="ru-RU" smtClean="0"/>
-              <a:t>27.08.2026</a:t>
+              <a:t>30.08.2026</a:t>
             </a:fld>
             <a:endParaRPr lang="ru-RU"/>
           </a:p>
@@ -6106,7 +6115,7 @@
           <a:p>
             <a:fld id="{7D5207A7-6A00-4516-866C-43D057526ED9}" type="datetimeFigureOut">
               <a:rPr lang="ru-RU" smtClean="0"/>
-              <a:t>27.08.2026</a:t>
+              <a:t>30.08.2026</a:t>
             </a:fld>
             <a:endParaRPr lang="ru-RU"/>
           </a:p>
@@ -6826,7 +6835,7 @@
           <a:p>
             <a:fld id="{7D5207A7-6A00-4516-866C-43D057526ED9}" type="datetimeFigureOut">
               <a:rPr lang="ru-RU" smtClean="0"/>
-              <a:t>27.08.2026</a:t>
+              <a:t>30.08.2026</a:t>
             </a:fld>
             <a:endParaRPr lang="ru-RU"/>
           </a:p>
@@ -6996,7 +7005,7 @@
           <a:p>
             <a:fld id="{7D5207A7-6A00-4516-866C-43D057526ED9}" type="datetimeFigureOut">
               <a:rPr lang="ru-RU" smtClean="0"/>
-              <a:t>27.08.2026</a:t>
+              <a:t>30.08.2026</a:t>
             </a:fld>
             <a:endParaRPr lang="ru-RU"/>
           </a:p>
@@ -7176,7 +7185,7 @@
           <a:p>
             <a:fld id="{7D5207A7-6A00-4516-866C-43D057526ED9}" type="datetimeFigureOut">
               <a:rPr lang="ru-RU" smtClean="0"/>
-              <a:t>27.08.2026</a:t>
+              <a:t>30.08.2026</a:t>
             </a:fld>
             <a:endParaRPr lang="ru-RU"/>
           </a:p>
@@ -7346,7 +7355,7 @@
           <a:p>
             <a:fld id="{7D5207A7-6A00-4516-866C-43D057526ED9}" type="datetimeFigureOut">
               <a:rPr lang="ru-RU" smtClean="0"/>
-              <a:t>27.08.2026</a:t>
+              <a:t>30.08.2026</a:t>
             </a:fld>
             <a:endParaRPr lang="ru-RU"/>
           </a:p>
@@ -7596,7 +7605,7 @@
           <a:p>
             <a:fld id="{7D5207A7-6A00-4516-866C-43D057526ED9}" type="datetimeFigureOut">
               <a:rPr lang="ru-RU" smtClean="0"/>
-              <a:t>27.08.2026</a:t>
+              <a:t>30.08.2026</a:t>
             </a:fld>
             <a:endParaRPr lang="ru-RU"/>
           </a:p>
@@ -7828,7 +7837,7 @@
           <a:p>
             <a:fld id="{7D5207A7-6A00-4516-866C-43D057526ED9}" type="datetimeFigureOut">
               <a:rPr lang="ru-RU" smtClean="0"/>
-              <a:t>27.08.2026</a:t>
+              <a:t>30.08.2026</a:t>
             </a:fld>
             <a:endParaRPr lang="ru-RU"/>
           </a:p>
@@ -8209,7 +8218,7 @@
           <a:p>
             <a:fld id="{7D5207A7-6A00-4516-866C-43D057526ED9}" type="datetimeFigureOut">
               <a:rPr lang="ru-RU" smtClean="0"/>
-              <a:t>27.08.2026</a:t>
+              <a:t>30.08.2026</a:t>
             </a:fld>
             <a:endParaRPr lang="ru-RU"/>
           </a:p>
@@ -8327,7 +8336,7 @@
           <a:p>
             <a:fld id="{7D5207A7-6A00-4516-866C-43D057526ED9}" type="datetimeFigureOut">
               <a:rPr lang="ru-RU" smtClean="0"/>
-              <a:t>27.08.2026</a:t>
+              <a:t>30.08.2026</a:t>
             </a:fld>
             <a:endParaRPr lang="ru-RU"/>
           </a:p>
@@ -8422,7 +8431,7 @@
           <a:p>
             <a:fld id="{7D5207A7-6A00-4516-866C-43D057526ED9}" type="datetimeFigureOut">
               <a:rPr lang="ru-RU" smtClean="0"/>
-              <a:t>27.08.2026</a:t>
+              <a:t>30.08.2026</a:t>
             </a:fld>
             <a:endParaRPr lang="ru-RU"/>
           </a:p>
@@ -8671,7 +8680,7 @@
           <a:p>
             <a:fld id="{7D5207A7-6A00-4516-866C-43D057526ED9}" type="datetimeFigureOut">
               <a:rPr lang="ru-RU" smtClean="0"/>
-              <a:t>27.08.2026</a:t>
+              <a:t>30.08.2026</a:t>
             </a:fld>
             <a:endParaRPr lang="ru-RU"/>
           </a:p>
@@ -8951,7 +8960,7 @@
           <a:p>
             <a:fld id="{7D5207A7-6A00-4516-866C-43D057526ED9}" type="datetimeFigureOut">
               <a:rPr lang="ru-RU" smtClean="0"/>
-              <a:t>27.08.2026</a:t>
+              <a:t>30.08.2026</a:t>
             </a:fld>
             <a:endParaRPr lang="ru-RU"/>
           </a:p>
@@ -9074,7 +9083,7 @@
           <a:noFill/>
           <a:extLst>
             <a:ext uri="{909E8E84-426E-40dd-AFC4-6F175D3DCCD1}">
-              <a14:hiddenFill xmlns:a14="http://schemas.microsoft.com/office/drawing/2010/main" xmlns="">
+              <a14:hiddenFill xmlns="" xmlns:a14="http://schemas.microsoft.com/office/drawing/2010/main">
                 <a:solidFill>
                   <a:srgbClr val="FFFFFF"/>
                 </a:solidFill>
@@ -9148,7 +9157,7 @@
               </a:ln>
               <a:extLst>
                 <a:ext uri="{91240B29-F687-4f45-9708-019B960494DF}">
-                  <a14:hiddenLine xmlns:a14="http://schemas.microsoft.com/office/drawing/2010/main" xmlns="" w="9525">
+                  <a14:hiddenLine xmlns="" xmlns:a14="http://schemas.microsoft.com/office/drawing/2010/main" w="9525">
                     <a:solidFill>
                       <a:srgbClr val="000000"/>
                     </a:solidFill>
@@ -9238,7 +9247,7 @@
               </a:ln>
               <a:extLst>
                 <a:ext uri="{91240B29-F687-4f45-9708-019B960494DF}">
-                  <a14:hiddenLine xmlns:a14="http://schemas.microsoft.com/office/drawing/2010/main" xmlns="" w="9525">
+                  <a14:hiddenLine xmlns="" xmlns:a14="http://schemas.microsoft.com/office/drawing/2010/main" w="9525">
                     <a:solidFill>
                       <a:srgbClr val="000000"/>
                     </a:solidFill>
@@ -9328,7 +9337,7 @@
               </a:ln>
               <a:extLst>
                 <a:ext uri="{91240B29-F687-4f45-9708-019B960494DF}">
-                  <a14:hiddenLine xmlns:a14="http://schemas.microsoft.com/office/drawing/2010/main" xmlns="" w="9525">
+                  <a14:hiddenLine xmlns="" xmlns:a14="http://schemas.microsoft.com/office/drawing/2010/main" w="9525">
                     <a:solidFill>
                       <a:srgbClr val="000000"/>
                     </a:solidFill>
@@ -9390,7 +9399,7 @@
               </a:ln>
               <a:extLst>
                 <a:ext uri="{91240B29-F687-4f45-9708-019B960494DF}">
-                  <a14:hiddenLine xmlns:a14="http://schemas.microsoft.com/office/drawing/2010/main" xmlns="" w="9525">
+                  <a14:hiddenLine xmlns="" xmlns:a14="http://schemas.microsoft.com/office/drawing/2010/main" w="9525">
                     <a:solidFill>
                       <a:srgbClr val="000000"/>
                     </a:solidFill>
@@ -9480,7 +9489,7 @@
               </a:ln>
               <a:extLst>
                 <a:ext uri="{91240B29-F687-4f45-9708-019B960494DF}">
-                  <a14:hiddenLine xmlns:a14="http://schemas.microsoft.com/office/drawing/2010/main" xmlns="" w="9525">
+                  <a14:hiddenLine xmlns="" xmlns:a14="http://schemas.microsoft.com/office/drawing/2010/main" w="9525">
                     <a:solidFill>
                       <a:srgbClr val="000000"/>
                     </a:solidFill>
@@ -9542,7 +9551,7 @@
               </a:ln>
               <a:extLst>
                 <a:ext uri="{91240B29-F687-4f45-9708-019B960494DF}">
-                  <a14:hiddenLine xmlns:a14="http://schemas.microsoft.com/office/drawing/2010/main" xmlns="" w="9525">
+                  <a14:hiddenLine xmlns="" xmlns:a14="http://schemas.microsoft.com/office/drawing/2010/main" w="9525">
                     <a:solidFill>
                       <a:srgbClr val="000000"/>
                     </a:solidFill>
@@ -9604,7 +9613,7 @@
               </a:ln>
               <a:extLst>
                 <a:ext uri="{91240B29-F687-4f45-9708-019B960494DF}">
-                  <a14:hiddenLine xmlns:a14="http://schemas.microsoft.com/office/drawing/2010/main" xmlns="" w="9525">
+                  <a14:hiddenLine xmlns="" xmlns:a14="http://schemas.microsoft.com/office/drawing/2010/main" w="9525">
                     <a:solidFill>
                       <a:srgbClr val="000000"/>
                     </a:solidFill>
@@ -9694,7 +9703,7 @@
               </a:ln>
               <a:extLst>
                 <a:ext uri="{91240B29-F687-4f45-9708-019B960494DF}">
-                  <a14:hiddenLine xmlns:a14="http://schemas.microsoft.com/office/drawing/2010/main" xmlns="" w="9525">
+                  <a14:hiddenLine xmlns="" xmlns:a14="http://schemas.microsoft.com/office/drawing/2010/main" w="9525">
                     <a:solidFill>
                       <a:srgbClr val="000000"/>
                     </a:solidFill>
@@ -9784,7 +9793,7 @@
               </a:ln>
               <a:extLst>
                 <a:ext uri="{91240B29-F687-4f45-9708-019B960494DF}">
-                  <a14:hiddenLine xmlns:a14="http://schemas.microsoft.com/office/drawing/2010/main" xmlns="" w="9525">
+                  <a14:hiddenLine xmlns="" xmlns:a14="http://schemas.microsoft.com/office/drawing/2010/main" w="9525">
                     <a:solidFill>
                       <a:srgbClr val="000000"/>
                     </a:solidFill>
@@ -9846,7 +9855,7 @@
               </a:ln>
               <a:extLst>
                 <a:ext uri="{91240B29-F687-4f45-9708-019B960494DF}">
-                  <a14:hiddenLine xmlns:a14="http://schemas.microsoft.com/office/drawing/2010/main" xmlns="" w="9525">
+                  <a14:hiddenLine xmlns="" xmlns:a14="http://schemas.microsoft.com/office/drawing/2010/main" w="9525">
                     <a:solidFill>
                       <a:srgbClr val="000000"/>
                     </a:solidFill>
@@ -9956,7 +9965,7 @@
               </a:ln>
               <a:extLst>
                 <a:ext uri="{91240B29-F687-4f45-9708-019B960494DF}">
-                  <a14:hiddenLine xmlns:a14="http://schemas.microsoft.com/office/drawing/2010/main" xmlns="" w="9525">
+                  <a14:hiddenLine xmlns="" xmlns:a14="http://schemas.microsoft.com/office/drawing/2010/main" w="9525">
                     <a:solidFill>
                       <a:srgbClr val="000000"/>
                     </a:solidFill>
@@ -10040,7 +10049,7 @@
               </a:ln>
               <a:extLst>
                 <a:ext uri="{91240B29-F687-4f45-9708-019B960494DF}">
-                  <a14:hiddenLine xmlns:a14="http://schemas.microsoft.com/office/drawing/2010/main" xmlns="" w="9525">
+                  <a14:hiddenLine xmlns="" xmlns:a14="http://schemas.microsoft.com/office/drawing/2010/main" w="9525">
                     <a:solidFill>
                       <a:srgbClr val="000000"/>
                     </a:solidFill>
@@ -10102,7 +10111,7 @@
               </a:ln>
               <a:extLst>
                 <a:ext uri="{91240B29-F687-4f45-9708-019B960494DF}">
-                  <a14:hiddenLine xmlns:a14="http://schemas.microsoft.com/office/drawing/2010/main" xmlns="" w="9525">
+                  <a14:hiddenLine xmlns="" xmlns:a14="http://schemas.microsoft.com/office/drawing/2010/main" w="9525">
                     <a:solidFill>
                       <a:srgbClr val="000000"/>
                     </a:solidFill>
@@ -10164,7 +10173,7 @@
               </a:ln>
               <a:extLst>
                 <a:ext uri="{91240B29-F687-4f45-9708-019B960494DF}">
-                  <a14:hiddenLine xmlns:a14="http://schemas.microsoft.com/office/drawing/2010/main" xmlns="" w="9525">
+                  <a14:hiddenLine xmlns="" xmlns:a14="http://schemas.microsoft.com/office/drawing/2010/main" w="9525">
                     <a:solidFill>
                       <a:srgbClr val="000000"/>
                     </a:solidFill>
@@ -10254,7 +10263,7 @@
               </a:ln>
               <a:extLst>
                 <a:ext uri="{91240B29-F687-4f45-9708-019B960494DF}">
-                  <a14:hiddenLine xmlns:a14="http://schemas.microsoft.com/office/drawing/2010/main" xmlns="" w="9525">
+                  <a14:hiddenLine xmlns="" xmlns:a14="http://schemas.microsoft.com/office/drawing/2010/main" w="9525">
                     <a:solidFill>
                       <a:srgbClr val="000000"/>
                     </a:solidFill>
@@ -10288,7 +10297,7 @@
               </a:ln>
               <a:extLst>
                 <a:ext uri="{91240B29-F687-4f45-9708-019B960494DF}">
-                  <a14:hiddenLine xmlns:a14="http://schemas.microsoft.com/office/drawing/2010/main" xmlns="" w="9525">
+                  <a14:hiddenLine xmlns="" xmlns:a14="http://schemas.microsoft.com/office/drawing/2010/main" w="9525">
                     <a:solidFill>
                       <a:srgbClr val="000000"/>
                     </a:solidFill>
@@ -10353,7 +10362,7 @@
               </a:ln>
               <a:extLst>
                 <a:ext uri="{91240B29-F687-4f45-9708-019B960494DF}">
-                  <a14:hiddenLine xmlns:a14="http://schemas.microsoft.com/office/drawing/2010/main" xmlns="" w="9525">
+                  <a14:hiddenLine xmlns="" xmlns:a14="http://schemas.microsoft.com/office/drawing/2010/main" w="9525">
                     <a:solidFill>
                       <a:srgbClr val="000000"/>
                     </a:solidFill>
@@ -10443,7 +10452,7 @@
               </a:ln>
               <a:extLst>
                 <a:ext uri="{91240B29-F687-4f45-9708-019B960494DF}">
-                  <a14:hiddenLine xmlns:a14="http://schemas.microsoft.com/office/drawing/2010/main" xmlns="" w="9525">
+                  <a14:hiddenLine xmlns="" xmlns:a14="http://schemas.microsoft.com/office/drawing/2010/main" w="9525">
                     <a:solidFill>
                       <a:srgbClr val="000000"/>
                     </a:solidFill>
@@ -10505,7 +10514,7 @@
               </a:ln>
               <a:extLst>
                 <a:ext uri="{91240B29-F687-4f45-9708-019B960494DF}">
-                  <a14:hiddenLine xmlns:a14="http://schemas.microsoft.com/office/drawing/2010/main" xmlns="" w="9525">
+                  <a14:hiddenLine xmlns="" xmlns:a14="http://schemas.microsoft.com/office/drawing/2010/main" w="9525">
                     <a:solidFill>
                       <a:srgbClr val="000000"/>
                     </a:solidFill>
@@ -10595,7 +10604,7 @@
               </a:ln>
               <a:extLst>
                 <a:ext uri="{91240B29-F687-4f45-9708-019B960494DF}">
-                  <a14:hiddenLine xmlns:a14="http://schemas.microsoft.com/office/drawing/2010/main" xmlns="" w="9525">
+                  <a14:hiddenLine xmlns="" xmlns:a14="http://schemas.microsoft.com/office/drawing/2010/main" w="9525">
                     <a:solidFill>
                       <a:srgbClr val="000000"/>
                     </a:solidFill>
@@ -10660,7 +10669,7 @@
               </a:ln>
               <a:extLst>
                 <a:ext uri="{91240B29-F687-4f45-9708-019B960494DF}">
-                  <a14:hiddenLine xmlns:a14="http://schemas.microsoft.com/office/drawing/2010/main" xmlns="" w="9525">
+                  <a14:hiddenLine xmlns="" xmlns:a14="http://schemas.microsoft.com/office/drawing/2010/main" w="9525">
                     <a:solidFill>
                       <a:srgbClr val="000000"/>
                     </a:solidFill>
@@ -10722,7 +10731,7 @@
               </a:ln>
               <a:extLst>
                 <a:ext uri="{91240B29-F687-4f45-9708-019B960494DF}">
-                  <a14:hiddenLine xmlns:a14="http://schemas.microsoft.com/office/drawing/2010/main" xmlns="" w="9525">
+                  <a14:hiddenLine xmlns="" xmlns:a14="http://schemas.microsoft.com/office/drawing/2010/main" w="9525">
                     <a:solidFill>
                       <a:srgbClr val="000000"/>
                     </a:solidFill>
@@ -10812,7 +10821,7 @@
               </a:ln>
               <a:extLst>
                 <a:ext uri="{91240B29-F687-4f45-9708-019B960494DF}">
-                  <a14:hiddenLine xmlns:a14="http://schemas.microsoft.com/office/drawing/2010/main" xmlns="" w="9525">
+                  <a14:hiddenLine xmlns="" xmlns:a14="http://schemas.microsoft.com/office/drawing/2010/main" w="9525">
                     <a:solidFill>
                       <a:srgbClr val="000000"/>
                     </a:solidFill>
@@ -10902,7 +10911,7 @@
               </a:ln>
               <a:extLst>
                 <a:ext uri="{91240B29-F687-4f45-9708-019B960494DF}">
-                  <a14:hiddenLine xmlns:a14="http://schemas.microsoft.com/office/drawing/2010/main" xmlns="" w="9525">
+                  <a14:hiddenLine xmlns="" xmlns:a14="http://schemas.microsoft.com/office/drawing/2010/main" w="9525">
                     <a:solidFill>
                       <a:srgbClr val="000000"/>
                     </a:solidFill>
@@ -10967,7 +10976,7 @@
               </a:ln>
               <a:extLst>
                 <a:ext uri="{91240B29-F687-4f45-9708-019B960494DF}">
-                  <a14:hiddenLine xmlns:a14="http://schemas.microsoft.com/office/drawing/2010/main" xmlns="" w="9525">
+                  <a14:hiddenLine xmlns="" xmlns:a14="http://schemas.microsoft.com/office/drawing/2010/main" w="9525">
                     <a:solidFill>
                       <a:srgbClr val="000000"/>
                     </a:solidFill>
@@ -11087,7 +11096,7 @@
               </a:ln>
               <a:extLst>
                 <a:ext uri="{91240B29-F687-4f45-9708-019B960494DF}">
-                  <a14:hiddenLine xmlns:a14="http://schemas.microsoft.com/office/drawing/2010/main" xmlns="" w="9525">
+                  <a14:hiddenLine xmlns="" xmlns:a14="http://schemas.microsoft.com/office/drawing/2010/main" w="9525">
                     <a:solidFill>
                       <a:srgbClr val="000000"/>
                     </a:solidFill>
@@ -11168,7 +11177,7 @@
               </a:ln>
               <a:extLst>
                 <a:ext uri="{91240B29-F687-4f45-9708-019B960494DF}">
-                  <a14:hiddenLine xmlns:a14="http://schemas.microsoft.com/office/drawing/2010/main" xmlns="" w="9525">
+                  <a14:hiddenLine xmlns="" xmlns:a14="http://schemas.microsoft.com/office/drawing/2010/main" w="9525">
                     <a:solidFill>
                       <a:srgbClr val="000000"/>
                     </a:solidFill>
@@ -11283,7 +11292,7 @@
               </a:ln>
               <a:extLst>
                 <a:ext uri="{91240B29-F687-4f45-9708-019B960494DF}">
-                  <a14:hiddenLine xmlns:a14="http://schemas.microsoft.com/office/drawing/2010/main" xmlns="" w="9525">
+                  <a14:hiddenLine xmlns="" xmlns:a14="http://schemas.microsoft.com/office/drawing/2010/main" w="9525">
                     <a:solidFill>
                       <a:srgbClr val="000000"/>
                     </a:solidFill>
@@ -11373,7 +11382,7 @@
               </a:ln>
               <a:extLst>
                 <a:ext uri="{91240B29-F687-4f45-9708-019B960494DF}">
-                  <a14:hiddenLine xmlns:a14="http://schemas.microsoft.com/office/drawing/2010/main" xmlns="" w="9525">
+                  <a14:hiddenLine xmlns="" xmlns:a14="http://schemas.microsoft.com/office/drawing/2010/main" w="9525">
                     <a:solidFill>
                       <a:srgbClr val="000000"/>
                     </a:solidFill>
@@ -11438,7 +11447,7 @@
               </a:ln>
               <a:extLst>
                 <a:ext uri="{91240B29-F687-4f45-9708-019B960494DF}">
-                  <a14:hiddenLine xmlns:a14="http://schemas.microsoft.com/office/drawing/2010/main" xmlns="" w="9525">
+                  <a14:hiddenLine xmlns="" xmlns:a14="http://schemas.microsoft.com/office/drawing/2010/main" w="9525">
                     <a:solidFill>
                       <a:srgbClr val="000000"/>
                     </a:solidFill>
@@ -11528,7 +11537,7 @@
               </a:ln>
               <a:extLst>
                 <a:ext uri="{91240B29-F687-4f45-9708-019B960494DF}">
-                  <a14:hiddenLine xmlns:a14="http://schemas.microsoft.com/office/drawing/2010/main" xmlns="" w="9525">
+                  <a14:hiddenLine xmlns="" xmlns:a14="http://schemas.microsoft.com/office/drawing/2010/main" w="9525">
                     <a:solidFill>
                       <a:srgbClr val="000000"/>
                     </a:solidFill>
@@ -11596,7 +11605,7 @@
               </a:ln>
               <a:extLst>
                 <a:ext uri="{91240B29-F687-4f45-9708-019B960494DF}">
-                  <a14:hiddenLine xmlns:a14="http://schemas.microsoft.com/office/drawing/2010/main" xmlns="" w="9525">
+                  <a14:hiddenLine xmlns="" xmlns:a14="http://schemas.microsoft.com/office/drawing/2010/main" w="9525">
                     <a:solidFill>
                       <a:srgbClr val="000000"/>
                     </a:solidFill>
@@ -11686,7 +11695,7 @@
               </a:ln>
               <a:extLst>
                 <a:ext uri="{91240B29-F687-4f45-9708-019B960494DF}">
-                  <a14:hiddenLine xmlns:a14="http://schemas.microsoft.com/office/drawing/2010/main" xmlns="" w="9525">
+                  <a14:hiddenLine xmlns="" xmlns:a14="http://schemas.microsoft.com/office/drawing/2010/main" w="9525">
                     <a:solidFill>
                       <a:srgbClr val="000000"/>
                     </a:solidFill>
@@ -11754,7 +11763,7 @@
               </a:ln>
               <a:extLst>
                 <a:ext uri="{91240B29-F687-4f45-9708-019B960494DF}">
-                  <a14:hiddenLine xmlns:a14="http://schemas.microsoft.com/office/drawing/2010/main" xmlns="" w="9525">
+                  <a14:hiddenLine xmlns="" xmlns:a14="http://schemas.microsoft.com/office/drawing/2010/main" w="9525">
                     <a:solidFill>
                       <a:srgbClr val="000000"/>
                     </a:solidFill>
@@ -11844,7 +11853,7 @@
               </a:ln>
               <a:extLst>
                 <a:ext uri="{91240B29-F687-4f45-9708-019B960494DF}">
-                  <a14:hiddenLine xmlns:a14="http://schemas.microsoft.com/office/drawing/2010/main" xmlns="" w="9525">
+                  <a14:hiddenLine xmlns="" xmlns:a14="http://schemas.microsoft.com/office/drawing/2010/main" w="9525">
                     <a:solidFill>
                       <a:srgbClr val="000000"/>
                     </a:solidFill>
@@ -11878,7 +11887,7 @@
               </a:ln>
               <a:extLst>
                 <a:ext uri="{91240B29-F687-4f45-9708-019B960494DF}">
-                  <a14:hiddenLine xmlns:a14="http://schemas.microsoft.com/office/drawing/2010/main" xmlns="" w="9525">
+                  <a14:hiddenLine xmlns="" xmlns:a14="http://schemas.microsoft.com/office/drawing/2010/main" w="9525">
                     <a:solidFill>
                       <a:srgbClr val="000000"/>
                     </a:solidFill>
@@ -12018,7 +12027,7 @@
           <a:p>
             <a:fld id="{7D5207A7-6A00-4516-866C-43D057526ED9}" type="datetimeFigureOut">
               <a:rPr lang="ru-RU" smtClean="0"/>
-              <a:t>27.08.2026</a:t>
+              <a:t>30.08.2026</a:t>
             </a:fld>
             <a:endParaRPr lang="ru-RU"/>
           </a:p>
@@ -12542,7 +12551,6 @@
               <a:rPr lang="ru-RU" dirty="0"/>
               <a:t>Адресация на канальном уровне (MAC-адрес)</a:t>
             </a:r>
-            <a:endParaRPr lang="ru-RU" dirty="0"/>
           </a:p>
         </p:txBody>
       </p:sp>
@@ -12684,11 +12692,7 @@
             </a:pPr>
             <a:r>
               <a:rPr lang="ru-RU" sz="2400" dirty="0"/>
-              <a:t>Младшие биты первого байта</a:t>
-            </a:r>
-            <a:r>
-              <a:rPr lang="ru-RU" sz="2400" dirty="0"/>
-              <a:t>:</a:t>
+              <a:t>Младшие биты первого байта:</a:t>
             </a:r>
           </a:p>
           <a:p>
@@ -12973,6 +12977,1101 @@
       </p:par>
     </p:tnLst>
   </p:timing>
+</p:sld>
+</file>
+
+<file path=ppt/slides/slide13.xml><?xml version="1.0" encoding="utf-8"?>
+<p:sld xmlns:a="http://schemas.openxmlformats.org/drawingml/2006/main" xmlns:r="http://schemas.openxmlformats.org/officeDocument/2006/relationships" xmlns:p="http://schemas.openxmlformats.org/presentationml/2006/main">
+  <p:cSld>
+    <p:spTree>
+      <p:nvGrpSpPr>
+        <p:cNvPr id="1" name=""/>
+        <p:cNvGrpSpPr/>
+        <p:nvPr/>
+      </p:nvGrpSpPr>
+      <p:grpSpPr>
+        <a:xfrm>
+          <a:off x="0" y="0"/>
+          <a:ext cx="0" cy="0"/>
+          <a:chOff x="0" y="0"/>
+          <a:chExt cx="0" cy="0"/>
+        </a:xfrm>
+      </p:grpSpPr>
+      <p:sp>
+        <p:nvSpPr>
+          <p:cNvPr id="2" name="Заголовок 1"/>
+          <p:cNvSpPr>
+            <a:spLocks noGrp="1"/>
+          </p:cNvSpPr>
+          <p:nvPr>
+            <p:ph type="title"/>
+          </p:nvPr>
+        </p:nvSpPr>
+        <p:spPr/>
+        <p:txBody>
+          <a:bodyPr/>
+          <a:lstStyle/>
+          <a:p>
+            <a:r>
+              <a:rPr lang="ru-RU" b="1" dirty="0"/>
+              <a:t>Найди пару: «Методы кодирования</a:t>
+            </a:r>
+            <a:r>
+              <a:rPr lang="ru-RU" b="1" dirty="0" smtClean="0"/>
+              <a:t>»</a:t>
+            </a:r>
+            <a:endParaRPr lang="ru-RU" dirty="0"/>
+          </a:p>
+        </p:txBody>
+      </p:sp>
+      <p:graphicFrame>
+        <p:nvGraphicFramePr>
+          <p:cNvPr id="4" name="Объект 3"/>
+          <p:cNvGraphicFramePr>
+            <a:graphicFrameLocks noGrp="1"/>
+          </p:cNvGraphicFramePr>
+          <p:nvPr>
+            <p:ph idx="1"/>
+            <p:extLst>
+              <p:ext uri="{D42A27DB-BD31-4B8C-83A1-F6EECF244321}">
+                <p14:modId xmlns:p14="http://schemas.microsoft.com/office/powerpoint/2010/main" val="565913020"/>
+              </p:ext>
+            </p:extLst>
+          </p:nvPr>
+        </p:nvGraphicFramePr>
+        <p:xfrm>
+          <a:off x="1141413" y="2410619"/>
+          <a:ext cx="9906000" cy="3219450"/>
+        </p:xfrm>
+        <a:graphic>
+          <a:graphicData uri="http://schemas.openxmlformats.org/drawingml/2006/table">
+            <a:tbl>
+              <a:tblPr/>
+              <a:tblGrid>
+                <a:gridCol w="4953000">
+                  <a:extLst>
+                    <a:ext uri="{9D8B030D-6E8A-4147-A177-3AD203B41FA5}">
+                      <a16:colId xmlns:a16="http://schemas.microsoft.com/office/drawing/2014/main" val="2097114412"/>
+                    </a:ext>
+                  </a:extLst>
+                </a:gridCol>
+                <a:gridCol w="4953000">
+                  <a:extLst>
+                    <a:ext uri="{9D8B030D-6E8A-4147-A177-3AD203B41FA5}">
+                      <a16:colId xmlns:a16="http://schemas.microsoft.com/office/drawing/2014/main" val="4258157797"/>
+                    </a:ext>
+                  </a:extLst>
+                </a:gridCol>
+              </a:tblGrid>
+              <a:tr h="0">
+                <a:tc>
+                  <a:txBody>
+                    <a:bodyPr/>
+                    <a:lstStyle/>
+                    <a:p>
+                      <a:pPr algn="l"/>
+                      <a:r>
+                        <a:rPr lang="ru-RU">
+                          <a:effectLst/>
+                        </a:rPr>
+                        <a:t>Метод кодирования</a:t>
+                      </a:r>
+                    </a:p>
+                  </a:txBody>
+                  <a:tcPr marL="95250" marR="95250" marT="47625" marB="47625" anchor="ctr">
+                    <a:lnL w="12700" cap="flat" cmpd="sng" algn="ctr">
+                      <a:solidFill>
+                        <a:schemeClr val="tx1"/>
+                      </a:solidFill>
+                      <a:prstDash val="solid"/>
+                      <a:round/>
+                      <a:headEnd type="none" w="med" len="med"/>
+                      <a:tailEnd type="none" w="med" len="med"/>
+                    </a:lnL>
+                    <a:lnR w="12700" cap="flat" cmpd="sng" algn="ctr">
+                      <a:solidFill>
+                        <a:schemeClr val="tx1"/>
+                      </a:solidFill>
+                      <a:prstDash val="solid"/>
+                      <a:round/>
+                      <a:headEnd type="none" w="med" len="med"/>
+                      <a:tailEnd type="none" w="med" len="med"/>
+                    </a:lnR>
+                    <a:lnT w="12700" cap="flat" cmpd="sng" algn="ctr">
+                      <a:solidFill>
+                        <a:schemeClr val="tx1"/>
+                      </a:solidFill>
+                      <a:prstDash val="solid"/>
+                      <a:round/>
+                      <a:headEnd type="none" w="med" len="med"/>
+                      <a:tailEnd type="none" w="med" len="med"/>
+                    </a:lnT>
+                    <a:lnB w="12700" cap="flat" cmpd="sng" algn="ctr">
+                      <a:solidFill>
+                        <a:schemeClr val="tx1"/>
+                      </a:solidFill>
+                      <a:prstDash val="solid"/>
+                      <a:round/>
+                      <a:headEnd type="none" w="med" len="med"/>
+                      <a:tailEnd type="none" w="med" len="med"/>
+                    </a:lnB>
+                  </a:tcPr>
+                </a:tc>
+                <a:tc>
+                  <a:txBody>
+                    <a:bodyPr/>
+                    <a:lstStyle/>
+                    <a:p>
+                      <a:pPr algn="l"/>
+                      <a:r>
+                        <a:rPr lang="ru-RU">
+                          <a:effectLst/>
+                        </a:rPr>
+                        <a:t>Особенность</a:t>
+                      </a:r>
+                    </a:p>
+                  </a:txBody>
+                  <a:tcPr marL="95250" marR="95250" marT="47625" marB="47625" anchor="ctr">
+                    <a:lnL w="12700" cap="flat" cmpd="sng" algn="ctr">
+                      <a:solidFill>
+                        <a:schemeClr val="tx1"/>
+                      </a:solidFill>
+                      <a:prstDash val="solid"/>
+                      <a:round/>
+                      <a:headEnd type="none" w="med" len="med"/>
+                      <a:tailEnd type="none" w="med" len="med"/>
+                    </a:lnL>
+                    <a:lnR w="12700" cap="flat" cmpd="sng" algn="ctr">
+                      <a:solidFill>
+                        <a:schemeClr val="tx1"/>
+                      </a:solidFill>
+                      <a:prstDash val="solid"/>
+                      <a:round/>
+                      <a:headEnd type="none" w="med" len="med"/>
+                      <a:tailEnd type="none" w="med" len="med"/>
+                    </a:lnR>
+                    <a:lnT w="12700" cap="flat" cmpd="sng" algn="ctr">
+                      <a:solidFill>
+                        <a:schemeClr val="tx1"/>
+                      </a:solidFill>
+                      <a:prstDash val="solid"/>
+                      <a:round/>
+                      <a:headEnd type="none" w="med" len="med"/>
+                      <a:tailEnd type="none" w="med" len="med"/>
+                    </a:lnT>
+                    <a:lnB w="12700" cap="flat" cmpd="sng" algn="ctr">
+                      <a:solidFill>
+                        <a:schemeClr val="tx1"/>
+                      </a:solidFill>
+                      <a:prstDash val="solid"/>
+                      <a:round/>
+                      <a:headEnd type="none" w="med" len="med"/>
+                      <a:tailEnd type="none" w="med" len="med"/>
+                    </a:lnB>
+                  </a:tcPr>
+                </a:tc>
+                <a:extLst>
+                  <a:ext uri="{0D108BD9-81ED-4DB2-BD59-A6C34878D82A}">
+                    <a16:rowId xmlns:a16="http://schemas.microsoft.com/office/drawing/2014/main" val="1317981291"/>
+                  </a:ext>
+                </a:extLst>
+              </a:tr>
+              <a:tr h="0">
+                <a:tc>
+                  <a:txBody>
+                    <a:bodyPr/>
+                    <a:lstStyle/>
+                    <a:p>
+                      <a:pPr algn="l"/>
+                      <a:r>
+                        <a:rPr lang="af-ZA" b="1">
+                          <a:effectLst/>
+                        </a:rPr>
+                        <a:t>1.</a:t>
+                      </a:r>
+                      <a:r>
+                        <a:rPr lang="af-ZA">
+                          <a:effectLst/>
+                        </a:rPr>
+                        <a:t> NRZ</a:t>
+                      </a:r>
+                    </a:p>
+                  </a:txBody>
+                  <a:tcPr marL="95250" marR="95250" marT="47625" marB="47625" anchor="ctr">
+                    <a:lnL w="12700" cap="flat" cmpd="sng" algn="ctr">
+                      <a:solidFill>
+                        <a:schemeClr val="tx1"/>
+                      </a:solidFill>
+                      <a:prstDash val="solid"/>
+                      <a:round/>
+                      <a:headEnd type="none" w="med" len="med"/>
+                      <a:tailEnd type="none" w="med" len="med"/>
+                    </a:lnL>
+                    <a:lnR w="12700" cap="flat" cmpd="sng" algn="ctr">
+                      <a:solidFill>
+                        <a:schemeClr val="tx1"/>
+                      </a:solidFill>
+                      <a:prstDash val="solid"/>
+                      <a:round/>
+                      <a:headEnd type="none" w="med" len="med"/>
+                      <a:tailEnd type="none" w="med" len="med"/>
+                    </a:lnR>
+                    <a:lnT w="12700" cap="flat" cmpd="sng" algn="ctr">
+                      <a:solidFill>
+                        <a:schemeClr val="tx1"/>
+                      </a:solidFill>
+                      <a:prstDash val="solid"/>
+                      <a:round/>
+                      <a:headEnd type="none" w="med" len="med"/>
+                      <a:tailEnd type="none" w="med" len="med"/>
+                    </a:lnT>
+                    <a:lnB w="12700" cap="flat" cmpd="sng" algn="ctr">
+                      <a:solidFill>
+                        <a:schemeClr val="tx1"/>
+                      </a:solidFill>
+                      <a:prstDash val="solid"/>
+                      <a:round/>
+                      <a:headEnd type="none" w="med" len="med"/>
+                      <a:tailEnd type="none" w="med" len="med"/>
+                    </a:lnB>
+                  </a:tcPr>
+                </a:tc>
+                <a:tc>
+                  <a:txBody>
+                    <a:bodyPr/>
+                    <a:lstStyle/>
+                    <a:p>
+                      <a:pPr algn="l"/>
+                      <a:r>
+                        <a:rPr lang="ru-RU" b="1">
+                          <a:effectLst/>
+                        </a:rPr>
+                        <a:t>А.</a:t>
+                      </a:r>
+                      <a:r>
+                        <a:rPr lang="ru-RU">
+                          <a:effectLst/>
+                        </a:rPr>
+                        <a:t> Эффективность 50%, меняет сигнал в середине каждого такта</a:t>
+                      </a:r>
+                    </a:p>
+                  </a:txBody>
+                  <a:tcPr marL="95250" marR="95250" marT="47625" marB="47625" anchor="ctr">
+                    <a:lnL w="12700" cap="flat" cmpd="sng" algn="ctr">
+                      <a:solidFill>
+                        <a:schemeClr val="tx1"/>
+                      </a:solidFill>
+                      <a:prstDash val="solid"/>
+                      <a:round/>
+                      <a:headEnd type="none" w="med" len="med"/>
+                      <a:tailEnd type="none" w="med" len="med"/>
+                    </a:lnL>
+                    <a:lnR w="12700" cap="flat" cmpd="sng" algn="ctr">
+                      <a:solidFill>
+                        <a:schemeClr val="tx1"/>
+                      </a:solidFill>
+                      <a:prstDash val="solid"/>
+                      <a:round/>
+                      <a:headEnd type="none" w="med" len="med"/>
+                      <a:tailEnd type="none" w="med" len="med"/>
+                    </a:lnR>
+                    <a:lnT w="12700" cap="flat" cmpd="sng" algn="ctr">
+                      <a:solidFill>
+                        <a:schemeClr val="tx1"/>
+                      </a:solidFill>
+                      <a:prstDash val="solid"/>
+                      <a:round/>
+                      <a:headEnd type="none" w="med" len="med"/>
+                      <a:tailEnd type="none" w="med" len="med"/>
+                    </a:lnT>
+                    <a:lnB w="12700" cap="flat" cmpd="sng" algn="ctr">
+                      <a:solidFill>
+                        <a:schemeClr val="tx1"/>
+                      </a:solidFill>
+                      <a:prstDash val="solid"/>
+                      <a:round/>
+                      <a:headEnd type="none" w="med" len="med"/>
+                      <a:tailEnd type="none" w="med" len="med"/>
+                    </a:lnB>
+                  </a:tcPr>
+                </a:tc>
+                <a:extLst>
+                  <a:ext uri="{0D108BD9-81ED-4DB2-BD59-A6C34878D82A}">
+                    <a16:rowId xmlns:a16="http://schemas.microsoft.com/office/drawing/2014/main" val="3295701176"/>
+                  </a:ext>
+                </a:extLst>
+              </a:tr>
+              <a:tr h="0">
+                <a:tc>
+                  <a:txBody>
+                    <a:bodyPr/>
+                    <a:lstStyle/>
+                    <a:p>
+                      <a:pPr algn="l"/>
+                      <a:r>
+                        <a:rPr lang="af-ZA" b="1">
+                          <a:effectLst/>
+                        </a:rPr>
+                        <a:t>2.</a:t>
+                      </a:r>
+                      <a:r>
+                        <a:rPr lang="af-ZA">
+                          <a:effectLst/>
+                        </a:rPr>
+                        <a:t> NRZI</a:t>
+                      </a:r>
+                    </a:p>
+                  </a:txBody>
+                  <a:tcPr marL="95250" marR="95250" marT="47625" marB="47625" anchor="ctr">
+                    <a:lnL w="12700" cap="flat" cmpd="sng" algn="ctr">
+                      <a:solidFill>
+                        <a:schemeClr val="tx1"/>
+                      </a:solidFill>
+                      <a:prstDash val="solid"/>
+                      <a:round/>
+                      <a:headEnd type="none" w="med" len="med"/>
+                      <a:tailEnd type="none" w="med" len="med"/>
+                    </a:lnL>
+                    <a:lnR w="12700" cap="flat" cmpd="sng" algn="ctr">
+                      <a:solidFill>
+                        <a:schemeClr val="tx1"/>
+                      </a:solidFill>
+                      <a:prstDash val="solid"/>
+                      <a:round/>
+                      <a:headEnd type="none" w="med" len="med"/>
+                      <a:tailEnd type="none" w="med" len="med"/>
+                    </a:lnR>
+                    <a:lnT w="12700" cap="flat" cmpd="sng" algn="ctr">
+                      <a:solidFill>
+                        <a:schemeClr val="tx1"/>
+                      </a:solidFill>
+                      <a:prstDash val="solid"/>
+                      <a:round/>
+                      <a:headEnd type="none" w="med" len="med"/>
+                      <a:tailEnd type="none" w="med" len="med"/>
+                    </a:lnT>
+                    <a:lnB w="12700" cap="flat" cmpd="sng" algn="ctr">
+                      <a:solidFill>
+                        <a:schemeClr val="tx1"/>
+                      </a:solidFill>
+                      <a:prstDash val="solid"/>
+                      <a:round/>
+                      <a:headEnd type="none" w="med" len="med"/>
+                      <a:tailEnd type="none" w="med" len="med"/>
+                    </a:lnB>
+                  </a:tcPr>
+                </a:tc>
+                <a:tc>
+                  <a:txBody>
+                    <a:bodyPr/>
+                    <a:lstStyle/>
+                    <a:p>
+                      <a:pPr algn="l"/>
+                      <a:r>
+                        <a:rPr lang="ru-RU" b="1">
+                          <a:effectLst/>
+                        </a:rPr>
+                        <a:t>Б.</a:t>
+                      </a:r>
+                      <a:r>
+                        <a:rPr lang="ru-RU">
+                          <a:effectLst/>
+                        </a:rPr>
+                        <a:t> Добавляет 1 избыточный бит на каждые 4 бита данных, устраняя длинные нули (эффективность 80%)</a:t>
+                      </a:r>
+                    </a:p>
+                  </a:txBody>
+                  <a:tcPr marL="95250" marR="95250" marT="47625" marB="47625" anchor="ctr">
+                    <a:lnL w="12700" cap="flat" cmpd="sng" algn="ctr">
+                      <a:solidFill>
+                        <a:schemeClr val="tx1"/>
+                      </a:solidFill>
+                      <a:prstDash val="solid"/>
+                      <a:round/>
+                      <a:headEnd type="none" w="med" len="med"/>
+                      <a:tailEnd type="none" w="med" len="med"/>
+                    </a:lnL>
+                    <a:lnR w="12700" cap="flat" cmpd="sng" algn="ctr">
+                      <a:solidFill>
+                        <a:schemeClr val="tx1"/>
+                      </a:solidFill>
+                      <a:prstDash val="solid"/>
+                      <a:round/>
+                      <a:headEnd type="none" w="med" len="med"/>
+                      <a:tailEnd type="none" w="med" len="med"/>
+                    </a:lnR>
+                    <a:lnT w="12700" cap="flat" cmpd="sng" algn="ctr">
+                      <a:solidFill>
+                        <a:schemeClr val="tx1"/>
+                      </a:solidFill>
+                      <a:prstDash val="solid"/>
+                      <a:round/>
+                      <a:headEnd type="none" w="med" len="med"/>
+                      <a:tailEnd type="none" w="med" len="med"/>
+                    </a:lnT>
+                    <a:lnB w="12700" cap="flat" cmpd="sng" algn="ctr">
+                      <a:solidFill>
+                        <a:schemeClr val="tx1"/>
+                      </a:solidFill>
+                      <a:prstDash val="solid"/>
+                      <a:round/>
+                      <a:headEnd type="none" w="med" len="med"/>
+                      <a:tailEnd type="none" w="med" len="med"/>
+                    </a:lnB>
+                  </a:tcPr>
+                </a:tc>
+                <a:extLst>
+                  <a:ext uri="{0D108BD9-81ED-4DB2-BD59-A6C34878D82A}">
+                    <a16:rowId xmlns:a16="http://schemas.microsoft.com/office/drawing/2014/main" val="3959664603"/>
+                  </a:ext>
+                </a:extLst>
+              </a:tr>
+              <a:tr h="0">
+                <a:tc>
+                  <a:txBody>
+                    <a:bodyPr/>
+                    <a:lstStyle/>
+                    <a:p>
+                      <a:pPr algn="l"/>
+                      <a:r>
+                        <a:rPr lang="ru-RU" b="1">
+                          <a:effectLst/>
+                        </a:rPr>
+                        <a:t>3.</a:t>
+                      </a:r>
+                      <a:r>
+                        <a:rPr lang="ru-RU">
+                          <a:effectLst/>
+                        </a:rPr>
+                        <a:t> Манчестерский код</a:t>
+                      </a:r>
+                    </a:p>
+                  </a:txBody>
+                  <a:tcPr marL="95250" marR="95250" marT="47625" marB="47625" anchor="ctr">
+                    <a:lnL w="12700" cap="flat" cmpd="sng" algn="ctr">
+                      <a:solidFill>
+                        <a:schemeClr val="tx1"/>
+                      </a:solidFill>
+                      <a:prstDash val="solid"/>
+                      <a:round/>
+                      <a:headEnd type="none" w="med" len="med"/>
+                      <a:tailEnd type="none" w="med" len="med"/>
+                    </a:lnL>
+                    <a:lnR w="12700" cap="flat" cmpd="sng" algn="ctr">
+                      <a:solidFill>
+                        <a:schemeClr val="tx1"/>
+                      </a:solidFill>
+                      <a:prstDash val="solid"/>
+                      <a:round/>
+                      <a:headEnd type="none" w="med" len="med"/>
+                      <a:tailEnd type="none" w="med" len="med"/>
+                    </a:lnR>
+                    <a:lnT w="12700" cap="flat" cmpd="sng" algn="ctr">
+                      <a:solidFill>
+                        <a:schemeClr val="tx1"/>
+                      </a:solidFill>
+                      <a:prstDash val="solid"/>
+                      <a:round/>
+                      <a:headEnd type="none" w="med" len="med"/>
+                      <a:tailEnd type="none" w="med" len="med"/>
+                    </a:lnT>
+                    <a:lnB w="12700" cap="flat" cmpd="sng" algn="ctr">
+                      <a:solidFill>
+                        <a:schemeClr val="tx1"/>
+                      </a:solidFill>
+                      <a:prstDash val="solid"/>
+                      <a:round/>
+                      <a:headEnd type="none" w="med" len="med"/>
+                      <a:tailEnd type="none" w="med" len="med"/>
+                    </a:lnB>
+                  </a:tcPr>
+                </a:tc>
+                <a:tc>
+                  <a:txBody>
+                    <a:bodyPr/>
+                    <a:lstStyle/>
+                    <a:p>
+                      <a:pPr algn="l"/>
+                      <a:r>
+                        <a:rPr lang="ru-RU" b="1">
+                          <a:effectLst/>
+                        </a:rPr>
+                        <a:t>В.</a:t>
+                      </a:r>
+                      <a:r>
+                        <a:rPr lang="ru-RU">
+                          <a:effectLst/>
+                        </a:rPr>
+                        <a:t> Переход уровня происходит только при передаче единицы</a:t>
+                      </a:r>
+                    </a:p>
+                  </a:txBody>
+                  <a:tcPr marL="95250" marR="95250" marT="47625" marB="47625" anchor="ctr">
+                    <a:lnL w="12700" cap="flat" cmpd="sng" algn="ctr">
+                      <a:solidFill>
+                        <a:schemeClr val="tx1"/>
+                      </a:solidFill>
+                      <a:prstDash val="solid"/>
+                      <a:round/>
+                      <a:headEnd type="none" w="med" len="med"/>
+                      <a:tailEnd type="none" w="med" len="med"/>
+                    </a:lnL>
+                    <a:lnR w="12700" cap="flat" cmpd="sng" algn="ctr">
+                      <a:solidFill>
+                        <a:schemeClr val="tx1"/>
+                      </a:solidFill>
+                      <a:prstDash val="solid"/>
+                      <a:round/>
+                      <a:headEnd type="none" w="med" len="med"/>
+                      <a:tailEnd type="none" w="med" len="med"/>
+                    </a:lnR>
+                    <a:lnT w="12700" cap="flat" cmpd="sng" algn="ctr">
+                      <a:solidFill>
+                        <a:schemeClr val="tx1"/>
+                      </a:solidFill>
+                      <a:prstDash val="solid"/>
+                      <a:round/>
+                      <a:headEnd type="none" w="med" len="med"/>
+                      <a:tailEnd type="none" w="med" len="med"/>
+                    </a:lnT>
+                    <a:lnB w="12700" cap="flat" cmpd="sng" algn="ctr">
+                      <a:solidFill>
+                        <a:schemeClr val="tx1"/>
+                      </a:solidFill>
+                      <a:prstDash val="solid"/>
+                      <a:round/>
+                      <a:headEnd type="none" w="med" len="med"/>
+                      <a:tailEnd type="none" w="med" len="med"/>
+                    </a:lnB>
+                  </a:tcPr>
+                </a:tc>
+                <a:extLst>
+                  <a:ext uri="{0D108BD9-81ED-4DB2-BD59-A6C34878D82A}">
+                    <a16:rowId xmlns:a16="http://schemas.microsoft.com/office/drawing/2014/main" val="1038046240"/>
+                  </a:ext>
+                </a:extLst>
+              </a:tr>
+              <a:tr h="0">
+                <a:tc>
+                  <a:txBody>
+                    <a:bodyPr/>
+                    <a:lstStyle/>
+                    <a:p>
+                      <a:pPr algn="l"/>
+                      <a:r>
+                        <a:rPr lang="af-ZA" b="1">
+                          <a:effectLst/>
+                        </a:rPr>
+                        <a:t>4.</a:t>
+                      </a:r>
+                      <a:r>
+                        <a:rPr lang="af-ZA">
+                          <a:effectLst/>
+                        </a:rPr>
+                        <a:t> 4B/5B</a:t>
+                      </a:r>
+                    </a:p>
+                  </a:txBody>
+                  <a:tcPr marL="95250" marR="95250" marT="47625" marB="47625" anchor="ctr">
+                    <a:lnL w="12700" cap="flat" cmpd="sng" algn="ctr">
+                      <a:solidFill>
+                        <a:schemeClr val="tx1"/>
+                      </a:solidFill>
+                      <a:prstDash val="solid"/>
+                      <a:round/>
+                      <a:headEnd type="none" w="med" len="med"/>
+                      <a:tailEnd type="none" w="med" len="med"/>
+                    </a:lnL>
+                    <a:lnR w="12700" cap="flat" cmpd="sng" algn="ctr">
+                      <a:solidFill>
+                        <a:schemeClr val="tx1"/>
+                      </a:solidFill>
+                      <a:prstDash val="solid"/>
+                      <a:round/>
+                      <a:headEnd type="none" w="med" len="med"/>
+                      <a:tailEnd type="none" w="med" len="med"/>
+                    </a:lnR>
+                    <a:lnT w="12700" cap="flat" cmpd="sng" algn="ctr">
+                      <a:solidFill>
+                        <a:schemeClr val="tx1"/>
+                      </a:solidFill>
+                      <a:prstDash val="solid"/>
+                      <a:round/>
+                      <a:headEnd type="none" w="med" len="med"/>
+                      <a:tailEnd type="none" w="med" len="med"/>
+                    </a:lnT>
+                    <a:lnB w="12700" cap="flat" cmpd="sng" algn="ctr">
+                      <a:solidFill>
+                        <a:schemeClr val="tx1"/>
+                      </a:solidFill>
+                      <a:prstDash val="solid"/>
+                      <a:round/>
+                      <a:headEnd type="none" w="med" len="med"/>
+                      <a:tailEnd type="none" w="med" len="med"/>
+                    </a:lnB>
+                  </a:tcPr>
+                </a:tc>
+                <a:tc>
+                  <a:txBody>
+                    <a:bodyPr/>
+                    <a:lstStyle/>
+                    <a:p>
+                      <a:pPr algn="l"/>
+                      <a:r>
+                        <a:rPr lang="ru-RU" b="1" dirty="0">
+                          <a:effectLst/>
+                        </a:rPr>
+                        <a:t>Г.</a:t>
+                      </a:r>
+                      <a:r>
+                        <a:rPr lang="ru-RU" dirty="0">
+                          <a:effectLst/>
+                        </a:rPr>
+                        <a:t> Страдает от блуждания базовой линии при передаче длинных цепочек 0 или 1</a:t>
+                      </a:r>
+                    </a:p>
+                  </a:txBody>
+                  <a:tcPr marL="95250" marR="95250" marT="47625" marB="47625" anchor="ctr">
+                    <a:lnL w="12700" cap="flat" cmpd="sng" algn="ctr">
+                      <a:solidFill>
+                        <a:schemeClr val="tx1"/>
+                      </a:solidFill>
+                      <a:prstDash val="solid"/>
+                      <a:round/>
+                      <a:headEnd type="none" w="med" len="med"/>
+                      <a:tailEnd type="none" w="med" len="med"/>
+                    </a:lnL>
+                    <a:lnR w="12700" cap="flat" cmpd="sng" algn="ctr">
+                      <a:solidFill>
+                        <a:schemeClr val="tx1"/>
+                      </a:solidFill>
+                      <a:prstDash val="solid"/>
+                      <a:round/>
+                      <a:headEnd type="none" w="med" len="med"/>
+                      <a:tailEnd type="none" w="med" len="med"/>
+                    </a:lnR>
+                    <a:lnT w="12700" cap="flat" cmpd="sng" algn="ctr">
+                      <a:solidFill>
+                        <a:schemeClr val="tx1"/>
+                      </a:solidFill>
+                      <a:prstDash val="solid"/>
+                      <a:round/>
+                      <a:headEnd type="none" w="med" len="med"/>
+                      <a:tailEnd type="none" w="med" len="med"/>
+                    </a:lnT>
+                    <a:lnB w="12700" cap="flat" cmpd="sng" algn="ctr">
+                      <a:solidFill>
+                        <a:schemeClr val="tx1"/>
+                      </a:solidFill>
+                      <a:prstDash val="solid"/>
+                      <a:round/>
+                      <a:headEnd type="none" w="med" len="med"/>
+                      <a:tailEnd type="none" w="med" len="med"/>
+                    </a:lnB>
+                  </a:tcPr>
+                </a:tc>
+                <a:extLst>
+                  <a:ext uri="{0D108BD9-81ED-4DB2-BD59-A6C34878D82A}">
+                    <a16:rowId xmlns:a16="http://schemas.microsoft.com/office/drawing/2014/main" val="3941489534"/>
+                  </a:ext>
+                </a:extLst>
+              </a:tr>
+            </a:tbl>
+          </a:graphicData>
+        </a:graphic>
+      </p:graphicFrame>
+    </p:spTree>
+    <p:extLst>
+      <p:ext uri="{BB962C8B-B14F-4D97-AF65-F5344CB8AC3E}">
+        <p14:creationId xmlns:p14="http://schemas.microsoft.com/office/powerpoint/2010/main" val="987154295"/>
+      </p:ext>
+    </p:extLst>
+  </p:cSld>
+  <p:clrMapOvr>
+    <a:masterClrMapping/>
+  </p:clrMapOvr>
+</p:sld>
+</file>
+
+<file path=ppt/slides/slide14.xml><?xml version="1.0" encoding="utf-8"?>
+<p:sld xmlns:a="http://schemas.openxmlformats.org/drawingml/2006/main" xmlns:r="http://schemas.openxmlformats.org/officeDocument/2006/relationships" xmlns:p="http://schemas.openxmlformats.org/presentationml/2006/main">
+  <p:cSld>
+    <p:spTree>
+      <p:nvGrpSpPr>
+        <p:cNvPr id="1" name=""/>
+        <p:cNvGrpSpPr/>
+        <p:nvPr/>
+      </p:nvGrpSpPr>
+      <p:grpSpPr>
+        <a:xfrm>
+          <a:off x="0" y="0"/>
+          <a:ext cx="0" cy="0"/>
+          <a:chOff x="0" y="0"/>
+          <a:chExt cx="0" cy="0"/>
+        </a:xfrm>
+      </p:grpSpPr>
+      <p:sp>
+        <p:nvSpPr>
+          <p:cNvPr id="3" name="Объект 2"/>
+          <p:cNvSpPr>
+            <a:spLocks noGrp="1"/>
+          </p:cNvSpPr>
+          <p:nvPr>
+            <p:ph idx="1"/>
+          </p:nvPr>
+        </p:nvSpPr>
+        <p:spPr>
+          <a:xfrm>
+            <a:off x="1141412" y="1292469"/>
+            <a:ext cx="9905999" cy="4498732"/>
+          </a:xfrm>
+        </p:spPr>
+        <p:txBody>
+          <a:bodyPr>
+            <a:normAutofit/>
+          </a:bodyPr>
+          <a:lstStyle/>
+          <a:p>
+            <a:r>
+              <a:rPr lang="ru-RU" dirty="0"/>
+              <a:t>В классической архитектуре TCP/IP канальный уровень </a:t>
+            </a:r>
+            <a:r>
+              <a:rPr lang="ru-RU" dirty="0" err="1"/>
+              <a:t>Ethernet</a:t>
+            </a:r>
+            <a:r>
+              <a:rPr lang="ru-RU" dirty="0"/>
+              <a:t> сам гарантирует надежность доставки и запрашивает повторную отправку битых кадров. </a:t>
+            </a:r>
+            <a:r>
+              <a:rPr lang="ru-RU" i="1" dirty="0"/>
+              <a:t>(Да / Нет)</a:t>
+            </a:r>
+            <a:endParaRPr lang="ru-RU" dirty="0"/>
+          </a:p>
+          <a:p>
+            <a:r>
+              <a:rPr lang="ru-RU" dirty="0"/>
+              <a:t>Поле полезной нагрузки (</a:t>
+            </a:r>
+            <a:r>
+              <a:rPr lang="ru-RU" dirty="0" err="1"/>
+              <a:t>Payload</a:t>
+            </a:r>
+            <a:r>
+              <a:rPr lang="ru-RU" dirty="0"/>
+              <a:t>) в стандартном кадре </a:t>
+            </a:r>
+            <a:r>
+              <a:rPr lang="ru-RU" dirty="0" err="1"/>
+              <a:t>Ethernet</a:t>
+            </a:r>
+            <a:r>
+              <a:rPr lang="ru-RU" dirty="0"/>
+              <a:t> не может быть меньше 46 байт. </a:t>
+            </a:r>
+            <a:r>
+              <a:rPr lang="ru-RU" i="1" dirty="0"/>
+              <a:t>(Да / Нет)</a:t>
+            </a:r>
+            <a:endParaRPr lang="ru-RU" dirty="0"/>
+          </a:p>
+          <a:p>
+            <a:r>
+              <a:rPr lang="ru-RU" dirty="0"/>
+              <a:t>При обнаружении коллизии адаптер сразу же начинает передачу кадра заново без пауз. </a:t>
+            </a:r>
+            <a:r>
+              <a:rPr lang="ru-RU" i="1" dirty="0"/>
+              <a:t>(Да / Нет)</a:t>
+            </a:r>
+            <a:endParaRPr lang="ru-RU" dirty="0"/>
+          </a:p>
+          <a:p>
+            <a:r>
+              <a:rPr lang="ru-RU" dirty="0"/>
+              <a:t>Первые 3 байта MAC-адреса (OUI) уникальны для конкретного производителя сетевого оборудования. </a:t>
+            </a:r>
+            <a:r>
+              <a:rPr lang="ru-RU" i="1" dirty="0"/>
+              <a:t>(Да / Нет)</a:t>
+            </a:r>
+            <a:endParaRPr lang="ru-RU" dirty="0"/>
+          </a:p>
+          <a:p>
+            <a:endParaRPr lang="ru-RU" dirty="0"/>
+          </a:p>
+        </p:txBody>
+      </p:sp>
+    </p:spTree>
+    <p:extLst>
+      <p:ext uri="{BB962C8B-B14F-4D97-AF65-F5344CB8AC3E}">
+        <p14:creationId xmlns:p14="http://schemas.microsoft.com/office/powerpoint/2010/main" val="3624493369"/>
+      </p:ext>
+    </p:extLst>
+  </p:cSld>
+  <p:clrMapOvr>
+    <a:masterClrMapping/>
+  </p:clrMapOvr>
+</p:sld>
+</file>
+
+<file path=ppt/slides/slide15.xml><?xml version="1.0" encoding="utf-8"?>
+<p:sld xmlns:a="http://schemas.openxmlformats.org/drawingml/2006/main" xmlns:r="http://schemas.openxmlformats.org/officeDocument/2006/relationships" xmlns:p="http://schemas.openxmlformats.org/presentationml/2006/main">
+  <p:cSld>
+    <p:spTree>
+      <p:nvGrpSpPr>
+        <p:cNvPr id="1" name=""/>
+        <p:cNvGrpSpPr/>
+        <p:nvPr/>
+      </p:nvGrpSpPr>
+      <p:grpSpPr>
+        <a:xfrm>
+          <a:off x="0" y="0"/>
+          <a:ext cx="0" cy="0"/>
+          <a:chOff x="0" y="0"/>
+          <a:chExt cx="0" cy="0"/>
+        </a:xfrm>
+      </p:grpSpPr>
+      <p:sp>
+        <p:nvSpPr>
+          <p:cNvPr id="2" name="Заголовок 1"/>
+          <p:cNvSpPr>
+            <a:spLocks noGrp="1"/>
+          </p:cNvSpPr>
+          <p:nvPr>
+            <p:ph type="title"/>
+          </p:nvPr>
+        </p:nvSpPr>
+        <p:spPr/>
+        <p:txBody>
+          <a:bodyPr/>
+          <a:lstStyle/>
+          <a:p>
+            <a:r>
+              <a:rPr lang="ru-RU" b="1" dirty="0"/>
+              <a:t>Заполни пропуски: «Анатомия </a:t>
+            </a:r>
+            <a:r>
+              <a:rPr lang="af-ZA" b="1" dirty="0"/>
+              <a:t>CSMA/CD</a:t>
+            </a:r>
+            <a:r>
+              <a:rPr lang="af-ZA" b="1" dirty="0" smtClean="0"/>
+              <a:t>»</a:t>
+            </a:r>
+            <a:endParaRPr lang="ru-RU" dirty="0"/>
+          </a:p>
+        </p:txBody>
+      </p:sp>
+      <p:sp>
+        <p:nvSpPr>
+          <p:cNvPr id="3" name="Объект 2"/>
+          <p:cNvSpPr>
+            <a:spLocks noGrp="1"/>
+          </p:cNvSpPr>
+          <p:nvPr>
+            <p:ph idx="1"/>
+          </p:nvPr>
+        </p:nvSpPr>
+        <p:spPr>
+          <a:xfrm>
+            <a:off x="1141412" y="2249487"/>
+            <a:ext cx="10086365" cy="2867636"/>
+          </a:xfrm>
+        </p:spPr>
+        <p:txBody>
+          <a:bodyPr/>
+          <a:lstStyle/>
+          <a:p>
+            <a:pPr marL="0" indent="0">
+              <a:buNone/>
+            </a:pPr>
+            <a:r>
+              <a:rPr lang="ru-RU" dirty="0"/>
+              <a:t>«Когда адаптер фиксирует коллизию в среде, он немедленно останавливает передачу и отправляет в сеть специальный </a:t>
+            </a:r>
+            <a:r>
+              <a:rPr lang="ru-RU" b="1" dirty="0"/>
+              <a:t>[ 1 ]</a:t>
+            </a:r>
+            <a:r>
+              <a:rPr lang="ru-RU" dirty="0"/>
+              <a:t>-сигнал. Затем он выдерживает случайную паузу. Если коллизии повторяются, максимальный интервал паузы увеличивается. Предельное число попыток отправить кадр перед его окончательным сбросом составляет </a:t>
+            </a:r>
+            <a:r>
+              <a:rPr lang="ru-RU" b="1" dirty="0"/>
+              <a:t>[ 2 ]</a:t>
+            </a:r>
+            <a:r>
+              <a:rPr lang="ru-RU" dirty="0"/>
+              <a:t> раз.»</a:t>
+            </a:r>
+            <a:endParaRPr lang="ru-RU" dirty="0"/>
+          </a:p>
+        </p:txBody>
+      </p:sp>
+    </p:spTree>
+    <p:extLst>
+      <p:ext uri="{BB962C8B-B14F-4D97-AF65-F5344CB8AC3E}">
+        <p14:creationId xmlns:p14="http://schemas.microsoft.com/office/powerpoint/2010/main" val="862017051"/>
+      </p:ext>
+    </p:extLst>
+  </p:cSld>
+  <p:clrMapOvr>
+    <a:masterClrMapping/>
+  </p:clrMapOvr>
+</p:sld>
+</file>
+
+<file path=ppt/slides/slide16.xml><?xml version="1.0" encoding="utf-8"?>
+<p:sld xmlns:a="http://schemas.openxmlformats.org/drawingml/2006/main" xmlns:r="http://schemas.openxmlformats.org/officeDocument/2006/relationships" xmlns:p="http://schemas.openxmlformats.org/presentationml/2006/main">
+  <p:cSld>
+    <p:spTree>
+      <p:nvGrpSpPr>
+        <p:cNvPr id="1" name=""/>
+        <p:cNvGrpSpPr/>
+        <p:nvPr/>
+      </p:nvGrpSpPr>
+      <p:grpSpPr>
+        <a:xfrm>
+          <a:off x="0" y="0"/>
+          <a:ext cx="0" cy="0"/>
+          <a:chOff x="0" y="0"/>
+          <a:chExt cx="0" cy="0"/>
+        </a:xfrm>
+      </p:grpSpPr>
+      <p:sp>
+        <p:nvSpPr>
+          <p:cNvPr id="2" name="Заголовок 1"/>
+          <p:cNvSpPr>
+            <a:spLocks noGrp="1"/>
+          </p:cNvSpPr>
+          <p:nvPr>
+            <p:ph type="title"/>
+          </p:nvPr>
+        </p:nvSpPr>
+        <p:spPr>
+          <a:xfrm>
+            <a:off x="1141413" y="618517"/>
+            <a:ext cx="9905998" cy="2441205"/>
+          </a:xfrm>
+        </p:spPr>
+        <p:txBody>
+          <a:bodyPr>
+            <a:normAutofit fontScale="90000"/>
+          </a:bodyPr>
+          <a:lstStyle/>
+          <a:p>
+            <a:r>
+              <a:rPr lang="ru-RU" dirty="0"/>
+              <a:t>Какой из следующих MAC-адресов является </a:t>
+            </a:r>
+            <a:r>
+              <a:rPr lang="ru-RU" b="1" dirty="0"/>
+              <a:t>широковещательным (</a:t>
+            </a:r>
+            <a:r>
+              <a:rPr lang="ru-RU" b="1" dirty="0" err="1"/>
+              <a:t>Broadcast</a:t>
+            </a:r>
+            <a:r>
+              <a:rPr lang="ru-RU" b="1" dirty="0"/>
+              <a:t>)</a:t>
+            </a:r>
+            <a:r>
+              <a:rPr lang="ru-RU" dirty="0"/>
+              <a:t>, то есть будет принят абсолютно всеми устройствами в сегменте?</a:t>
+            </a:r>
+            <a:endParaRPr lang="ru-RU" dirty="0"/>
+          </a:p>
+        </p:txBody>
+      </p:sp>
+      <p:sp>
+        <p:nvSpPr>
+          <p:cNvPr id="3" name="Объект 2"/>
+          <p:cNvSpPr>
+            <a:spLocks noGrp="1"/>
+          </p:cNvSpPr>
+          <p:nvPr>
+            <p:ph idx="1"/>
+          </p:nvPr>
+        </p:nvSpPr>
+        <p:spPr>
+          <a:xfrm>
+            <a:off x="1141412" y="3330941"/>
+            <a:ext cx="9905999" cy="2401644"/>
+          </a:xfrm>
+        </p:spPr>
+        <p:txBody>
+          <a:bodyPr/>
+          <a:lstStyle/>
+          <a:p>
+            <a:pPr marL="0" indent="0">
+              <a:buNone/>
+            </a:pPr>
+            <a:r>
+              <a:rPr lang="ru-RU" dirty="0"/>
+              <a:t>А) 00:1</a:t>
+            </a:r>
+            <a:r>
+              <a:rPr lang="af-ZA" dirty="0"/>
+              <a:t>A:2B:3C:4D:5E</a:t>
+            </a:r>
+          </a:p>
+          <a:p>
+            <a:pPr marL="0" indent="0">
+              <a:buNone/>
+            </a:pPr>
+            <a:r>
+              <a:rPr lang="ru-RU" dirty="0"/>
+              <a:t>Б) </a:t>
+            </a:r>
+            <a:r>
+              <a:rPr lang="af-ZA" dirty="0"/>
+              <a:t>FF:FF:FF:FF:FF:FF</a:t>
+            </a:r>
+          </a:p>
+          <a:p>
+            <a:pPr marL="0" indent="0">
+              <a:buNone/>
+            </a:pPr>
+            <a:r>
+              <a:rPr lang="ru-RU" dirty="0"/>
+              <a:t>В) 01:00:5</a:t>
+            </a:r>
+            <a:r>
+              <a:rPr lang="af-ZA" dirty="0"/>
+              <a:t>E:00:00:01</a:t>
+            </a:r>
+          </a:p>
+          <a:p>
+            <a:pPr marL="0" indent="0">
+              <a:buNone/>
+            </a:pPr>
+            <a:r>
+              <a:rPr lang="ru-RU" dirty="0"/>
+              <a:t>Г) </a:t>
+            </a:r>
+            <a:r>
+              <a:rPr lang="af-ZA" dirty="0"/>
+              <a:t>AA:BB:CC:DD:EE:FF</a:t>
+            </a:r>
+            <a:endParaRPr lang="ru-RU" dirty="0"/>
+          </a:p>
+        </p:txBody>
+      </p:sp>
+    </p:spTree>
+    <p:extLst>
+      <p:ext uri="{BB962C8B-B14F-4D97-AF65-F5344CB8AC3E}">
+        <p14:creationId xmlns:p14="http://schemas.microsoft.com/office/powerpoint/2010/main" val="811213990"/>
+      </p:ext>
+    </p:extLst>
+  </p:cSld>
+  <p:clrMapOvr>
+    <a:masterClrMapping/>
+  </p:clrMapOvr>
 </p:sld>
 </file>
 

--- a/1.4 Direct Links/1.4 Direct Links.pptx
+++ b/1.4 Direct Links/1.4 Direct Links.pptx
@@ -9,18 +9,23 @@
     <p:sldId id="257" r:id="rId3"/>
     <p:sldId id="258" r:id="rId4"/>
     <p:sldId id="259" r:id="rId5"/>
-    <p:sldId id="260" r:id="rId6"/>
-    <p:sldId id="261" r:id="rId7"/>
-    <p:sldId id="262" r:id="rId8"/>
-    <p:sldId id="263" r:id="rId9"/>
-    <p:sldId id="265" r:id="rId10"/>
-    <p:sldId id="266" r:id="rId11"/>
-    <p:sldId id="267" r:id="rId12"/>
-    <p:sldId id="264" r:id="rId13"/>
-    <p:sldId id="268" r:id="rId14"/>
-    <p:sldId id="269" r:id="rId15"/>
-    <p:sldId id="270" r:id="rId16"/>
-    <p:sldId id="271" r:id="rId17"/>
+    <p:sldId id="272" r:id="rId6"/>
+    <p:sldId id="260" r:id="rId7"/>
+    <p:sldId id="261" r:id="rId8"/>
+    <p:sldId id="262" r:id="rId9"/>
+    <p:sldId id="263" r:id="rId10"/>
+    <p:sldId id="274" r:id="rId11"/>
+    <p:sldId id="273" r:id="rId12"/>
+    <p:sldId id="275" r:id="rId13"/>
+    <p:sldId id="276" r:id="rId14"/>
+    <p:sldId id="265" r:id="rId15"/>
+    <p:sldId id="266" r:id="rId16"/>
+    <p:sldId id="267" r:id="rId17"/>
+    <p:sldId id="264" r:id="rId18"/>
+    <p:sldId id="268" r:id="rId19"/>
+    <p:sldId id="269" r:id="rId20"/>
+    <p:sldId id="270" r:id="rId21"/>
+    <p:sldId id="271" r:id="rId22"/>
   </p:sldIdLst>
   <p:sldSz cx="12192000" cy="6858000"/>
   <p:notesSz cx="6858000" cy="9144000"/>
@@ -184,7 +189,7 @@
           <a:noFill/>
           <a:extLst>
             <a:ext uri="{909E8E84-426E-40dd-AFC4-6F175D3DCCD1}">
-              <a14:hiddenFill xmlns="" xmlns:a14="http://schemas.microsoft.com/office/drawing/2010/main">
+              <a14:hiddenFill xmlns:a14="http://schemas.microsoft.com/office/drawing/2010/main" xmlns="">
                 <a:solidFill>
                   <a:srgbClr val="FFFFFF"/>
                 </a:solidFill>
@@ -243,7 +248,7 @@
             </a:ln>
             <a:extLst>
               <a:ext uri="{91240B29-F687-4f45-9708-019B960494DF}">
-                <a14:hiddenLine xmlns="" xmlns:a14="http://schemas.microsoft.com/office/drawing/2010/main" w="9525">
+                <a14:hiddenLine xmlns:a14="http://schemas.microsoft.com/office/drawing/2010/main" xmlns="" w="9525">
                   <a:solidFill>
                     <a:srgbClr val="000000"/>
                   </a:solidFill>
@@ -333,7 +338,7 @@
             </a:ln>
             <a:extLst>
               <a:ext uri="{91240B29-F687-4f45-9708-019B960494DF}">
-                <a14:hiddenLine xmlns="" xmlns:a14="http://schemas.microsoft.com/office/drawing/2010/main" w="9525">
+                <a14:hiddenLine xmlns:a14="http://schemas.microsoft.com/office/drawing/2010/main" xmlns="" w="9525">
                   <a:solidFill>
                     <a:srgbClr val="000000"/>
                   </a:solidFill>
@@ -423,7 +428,7 @@
             </a:ln>
             <a:extLst>
               <a:ext uri="{91240B29-F687-4f45-9708-019B960494DF}">
-                <a14:hiddenLine xmlns="" xmlns:a14="http://schemas.microsoft.com/office/drawing/2010/main" w="9525">
+                <a14:hiddenLine xmlns:a14="http://schemas.microsoft.com/office/drawing/2010/main" xmlns="" w="9525">
                   <a:solidFill>
                     <a:srgbClr val="000000"/>
                   </a:solidFill>
@@ -457,7 +462,7 @@
             </a:ln>
             <a:extLst>
               <a:ext uri="{91240B29-F687-4f45-9708-019B960494DF}">
-                <a14:hiddenLine xmlns="" xmlns:a14="http://schemas.microsoft.com/office/drawing/2010/main" w="9525">
+                <a14:hiddenLine xmlns:a14="http://schemas.microsoft.com/office/drawing/2010/main" xmlns="" w="9525">
                   <a:solidFill>
                     <a:srgbClr val="000000"/>
                   </a:solidFill>
@@ -547,7 +552,7 @@
             </a:ln>
             <a:extLst>
               <a:ext uri="{91240B29-F687-4f45-9708-019B960494DF}">
-                <a14:hiddenLine xmlns="" xmlns:a14="http://schemas.microsoft.com/office/drawing/2010/main" w="9525">
+                <a14:hiddenLine xmlns:a14="http://schemas.microsoft.com/office/drawing/2010/main" xmlns="" w="9525">
                   <a:solidFill>
                     <a:srgbClr val="000000"/>
                   </a:solidFill>
@@ -609,7 +614,7 @@
             </a:ln>
             <a:extLst>
               <a:ext uri="{91240B29-F687-4f45-9708-019B960494DF}">
-                <a14:hiddenLine xmlns="" xmlns:a14="http://schemas.microsoft.com/office/drawing/2010/main" w="9525">
+                <a14:hiddenLine xmlns:a14="http://schemas.microsoft.com/office/drawing/2010/main" xmlns="" w="9525">
                   <a:solidFill>
                     <a:srgbClr val="000000"/>
                   </a:solidFill>
@@ -671,7 +676,7 @@
             </a:ln>
             <a:extLst>
               <a:ext uri="{91240B29-F687-4f45-9708-019B960494DF}">
-                <a14:hiddenLine xmlns="" xmlns:a14="http://schemas.microsoft.com/office/drawing/2010/main" w="9525">
+                <a14:hiddenLine xmlns:a14="http://schemas.microsoft.com/office/drawing/2010/main" xmlns="" w="9525">
                   <a:solidFill>
                     <a:srgbClr val="000000"/>
                   </a:solidFill>
@@ -761,7 +766,7 @@
             </a:ln>
             <a:extLst>
               <a:ext uri="{91240B29-F687-4f45-9708-019B960494DF}">
-                <a14:hiddenLine xmlns="" xmlns:a14="http://schemas.microsoft.com/office/drawing/2010/main" w="9525">
+                <a14:hiddenLine xmlns:a14="http://schemas.microsoft.com/office/drawing/2010/main" xmlns="" w="9525">
                   <a:solidFill>
                     <a:srgbClr val="000000"/>
                   </a:solidFill>
@@ -823,7 +828,7 @@
             </a:ln>
             <a:extLst>
               <a:ext uri="{91240B29-F687-4f45-9708-019B960494DF}">
-                <a14:hiddenLine xmlns="" xmlns:a14="http://schemas.microsoft.com/office/drawing/2010/main" w="9525">
+                <a14:hiddenLine xmlns:a14="http://schemas.microsoft.com/office/drawing/2010/main" xmlns="" w="9525">
                   <a:solidFill>
                     <a:srgbClr val="000000"/>
                   </a:solidFill>
@@ -885,7 +890,7 @@
             </a:ln>
             <a:extLst>
               <a:ext uri="{91240B29-F687-4f45-9708-019B960494DF}">
-                <a14:hiddenLine xmlns="" xmlns:a14="http://schemas.microsoft.com/office/drawing/2010/main" w="9525">
+                <a14:hiddenLine xmlns:a14="http://schemas.microsoft.com/office/drawing/2010/main" xmlns="" w="9525">
                   <a:solidFill>
                     <a:srgbClr val="000000"/>
                   </a:solidFill>
@@ -975,7 +980,7 @@
             </a:ln>
             <a:extLst>
               <a:ext uri="{91240B29-F687-4f45-9708-019B960494DF}">
-                <a14:hiddenLine xmlns="" xmlns:a14="http://schemas.microsoft.com/office/drawing/2010/main" w="9525">
+                <a14:hiddenLine xmlns:a14="http://schemas.microsoft.com/office/drawing/2010/main" xmlns="" w="9525">
                   <a:solidFill>
                     <a:srgbClr val="000000"/>
                   </a:solidFill>
@@ -1065,7 +1070,7 @@
             </a:ln>
             <a:extLst>
               <a:ext uri="{91240B29-F687-4f45-9708-019B960494DF}">
-                <a14:hiddenLine xmlns="" xmlns:a14="http://schemas.microsoft.com/office/drawing/2010/main" w="9525">
+                <a14:hiddenLine xmlns:a14="http://schemas.microsoft.com/office/drawing/2010/main" xmlns="" w="9525">
                   <a:solidFill>
                     <a:srgbClr val="000000"/>
                   </a:solidFill>
@@ -1127,7 +1132,7 @@
             </a:ln>
             <a:extLst>
               <a:ext uri="{91240B29-F687-4f45-9708-019B960494DF}">
-                <a14:hiddenLine xmlns="" xmlns:a14="http://schemas.microsoft.com/office/drawing/2010/main" w="9525">
+                <a14:hiddenLine xmlns:a14="http://schemas.microsoft.com/office/drawing/2010/main" xmlns="" w="9525">
                   <a:solidFill>
                     <a:srgbClr val="000000"/>
                   </a:solidFill>
@@ -1237,7 +1242,7 @@
             </a:ln>
             <a:extLst>
               <a:ext uri="{91240B29-F687-4f45-9708-019B960494DF}">
-                <a14:hiddenLine xmlns="" xmlns:a14="http://schemas.microsoft.com/office/drawing/2010/main" w="9525">
+                <a14:hiddenLine xmlns:a14="http://schemas.microsoft.com/office/drawing/2010/main" xmlns="" w="9525">
                   <a:solidFill>
                     <a:srgbClr val="000000"/>
                   </a:solidFill>
@@ -1299,7 +1304,7 @@
             </a:ln>
             <a:extLst>
               <a:ext uri="{91240B29-F687-4f45-9708-019B960494DF}">
-                <a14:hiddenLine xmlns="" xmlns:a14="http://schemas.microsoft.com/office/drawing/2010/main" w="9525">
+                <a14:hiddenLine xmlns:a14="http://schemas.microsoft.com/office/drawing/2010/main" xmlns="" w="9525">
                   <a:solidFill>
                     <a:srgbClr val="000000"/>
                   </a:solidFill>
@@ -1389,7 +1394,7 @@
             </a:ln>
             <a:extLst>
               <a:ext uri="{91240B29-F687-4f45-9708-019B960494DF}">
-                <a14:hiddenLine xmlns="" xmlns:a14="http://schemas.microsoft.com/office/drawing/2010/main" w="9525">
+                <a14:hiddenLine xmlns:a14="http://schemas.microsoft.com/office/drawing/2010/main" xmlns="" w="9525">
                   <a:solidFill>
                     <a:srgbClr val="000000"/>
                   </a:solidFill>
@@ -1479,7 +1484,7 @@
             </a:ln>
             <a:extLst>
               <a:ext uri="{91240B29-F687-4f45-9708-019B960494DF}">
-                <a14:hiddenLine xmlns="" xmlns:a14="http://schemas.microsoft.com/office/drawing/2010/main" w="9525">
+                <a14:hiddenLine xmlns:a14="http://schemas.microsoft.com/office/drawing/2010/main" xmlns="" w="9525">
                   <a:solidFill>
                     <a:srgbClr val="000000"/>
                   </a:solidFill>
@@ -1541,7 +1546,7 @@
             </a:ln>
             <a:extLst>
               <a:ext uri="{91240B29-F687-4f45-9708-019B960494DF}">
-                <a14:hiddenLine xmlns="" xmlns:a14="http://schemas.microsoft.com/office/drawing/2010/main" w="9525">
+                <a14:hiddenLine xmlns:a14="http://schemas.microsoft.com/office/drawing/2010/main" xmlns="" w="9525">
                   <a:solidFill>
                     <a:srgbClr val="000000"/>
                   </a:solidFill>
@@ -1631,7 +1636,7 @@
             </a:ln>
             <a:extLst>
               <a:ext uri="{91240B29-F687-4f45-9708-019B960494DF}">
-                <a14:hiddenLine xmlns="" xmlns:a14="http://schemas.microsoft.com/office/drawing/2010/main" w="9525">
+                <a14:hiddenLine xmlns:a14="http://schemas.microsoft.com/office/drawing/2010/main" xmlns="" w="9525">
                   <a:solidFill>
                     <a:srgbClr val="000000"/>
                   </a:solidFill>
@@ -1721,7 +1726,7 @@
             </a:ln>
             <a:extLst>
               <a:ext uri="{91240B29-F687-4f45-9708-019B960494DF}">
-                <a14:hiddenLine xmlns="" xmlns:a14="http://schemas.microsoft.com/office/drawing/2010/main" w="9525">
+                <a14:hiddenLine xmlns:a14="http://schemas.microsoft.com/office/drawing/2010/main" xmlns="" w="9525">
                   <a:solidFill>
                     <a:srgbClr val="000000"/>
                   </a:solidFill>
@@ -1777,7 +1782,7 @@
             </a:ln>
             <a:extLst>
               <a:ext uri="{91240B29-F687-4f45-9708-019B960494DF}">
-                <a14:hiddenLine xmlns="" xmlns:a14="http://schemas.microsoft.com/office/drawing/2010/main" w="9525">
+                <a14:hiddenLine xmlns:a14="http://schemas.microsoft.com/office/drawing/2010/main" xmlns="" w="9525">
                   <a:solidFill>
                     <a:srgbClr val="000000"/>
                   </a:solidFill>
@@ -1867,7 +1872,7 @@
             </a:ln>
             <a:extLst>
               <a:ext uri="{91240B29-F687-4f45-9708-019B960494DF}">
-                <a14:hiddenLine xmlns="" xmlns:a14="http://schemas.microsoft.com/office/drawing/2010/main" w="9525">
+                <a14:hiddenLine xmlns:a14="http://schemas.microsoft.com/office/drawing/2010/main" xmlns="" w="9525">
                   <a:solidFill>
                     <a:srgbClr val="000000"/>
                   </a:solidFill>
@@ -1923,7 +1928,7 @@
             </a:ln>
             <a:extLst>
               <a:ext uri="{91240B29-F687-4f45-9708-019B960494DF}">
-                <a14:hiddenLine xmlns="" xmlns:a14="http://schemas.microsoft.com/office/drawing/2010/main" w="9525">
+                <a14:hiddenLine xmlns:a14="http://schemas.microsoft.com/office/drawing/2010/main" xmlns="" w="9525">
                   <a:solidFill>
                     <a:srgbClr val="000000"/>
                   </a:solidFill>
@@ -2013,7 +2018,7 @@
             </a:ln>
             <a:extLst>
               <a:ext uri="{91240B29-F687-4f45-9708-019B960494DF}">
-                <a14:hiddenLine xmlns="" xmlns:a14="http://schemas.microsoft.com/office/drawing/2010/main" w="9525">
+                <a14:hiddenLine xmlns:a14="http://schemas.microsoft.com/office/drawing/2010/main" xmlns="" w="9525">
                   <a:solidFill>
                     <a:srgbClr val="000000"/>
                   </a:solidFill>
@@ -2081,7 +2086,7 @@
             </a:ln>
             <a:extLst>
               <a:ext uri="{91240B29-F687-4f45-9708-019B960494DF}">
-                <a14:hiddenLine xmlns="" xmlns:a14="http://schemas.microsoft.com/office/drawing/2010/main" w="9525">
+                <a14:hiddenLine xmlns:a14="http://schemas.microsoft.com/office/drawing/2010/main" xmlns="" w="9525">
                   <a:solidFill>
                     <a:srgbClr val="000000"/>
                   </a:solidFill>
@@ -2171,7 +2176,7 @@
             </a:ln>
             <a:extLst>
               <a:ext uri="{91240B29-F687-4f45-9708-019B960494DF}">
-                <a14:hiddenLine xmlns="" xmlns:a14="http://schemas.microsoft.com/office/drawing/2010/main" w="9525">
+                <a14:hiddenLine xmlns:a14="http://schemas.microsoft.com/office/drawing/2010/main" xmlns="" w="9525">
                   <a:solidFill>
                     <a:srgbClr val="000000"/>
                   </a:solidFill>
@@ -2239,7 +2244,7 @@
             </a:ln>
             <a:extLst>
               <a:ext uri="{91240B29-F687-4f45-9708-019B960494DF}">
-                <a14:hiddenLine xmlns="" xmlns:a14="http://schemas.microsoft.com/office/drawing/2010/main" w="9525">
+                <a14:hiddenLine xmlns:a14="http://schemas.microsoft.com/office/drawing/2010/main" xmlns="" w="9525">
                   <a:solidFill>
                     <a:srgbClr val="000000"/>
                   </a:solidFill>
@@ -2329,7 +2334,7 @@
             </a:ln>
             <a:extLst>
               <a:ext uri="{91240B29-F687-4f45-9708-019B960494DF}">
-                <a14:hiddenLine xmlns="" xmlns:a14="http://schemas.microsoft.com/office/drawing/2010/main" w="9525">
+                <a14:hiddenLine xmlns:a14="http://schemas.microsoft.com/office/drawing/2010/main" xmlns="" w="9525">
                   <a:solidFill>
                     <a:srgbClr val="000000"/>
                   </a:solidFill>
@@ -2363,7 +2368,7 @@
             </a:ln>
             <a:extLst>
               <a:ext uri="{91240B29-F687-4f45-9708-019B960494DF}">
-                <a14:hiddenLine xmlns="" xmlns:a14="http://schemas.microsoft.com/office/drawing/2010/main" w="9525">
+                <a14:hiddenLine xmlns:a14="http://schemas.microsoft.com/office/drawing/2010/main" xmlns="" w="9525">
                   <a:solidFill>
                     <a:srgbClr val="000000"/>
                   </a:solidFill>
@@ -2453,7 +2458,7 @@
             </a:ln>
             <a:extLst>
               <a:ext uri="{91240B29-F687-4f45-9708-019B960494DF}">
-                <a14:hiddenLine xmlns="" xmlns:a14="http://schemas.microsoft.com/office/drawing/2010/main" w="9525">
+                <a14:hiddenLine xmlns:a14="http://schemas.microsoft.com/office/drawing/2010/main" xmlns="" w="9525">
                   <a:solidFill>
                     <a:srgbClr val="000000"/>
                   </a:solidFill>
@@ -2515,7 +2520,7 @@
             </a:ln>
             <a:extLst>
               <a:ext uri="{91240B29-F687-4f45-9708-019B960494DF}">
-                <a14:hiddenLine xmlns="" xmlns:a14="http://schemas.microsoft.com/office/drawing/2010/main" w="9525">
+                <a14:hiddenLine xmlns:a14="http://schemas.microsoft.com/office/drawing/2010/main" xmlns="" w="9525">
                   <a:solidFill>
                     <a:srgbClr val="000000"/>
                   </a:solidFill>
@@ -2577,7 +2582,7 @@
             </a:ln>
             <a:extLst>
               <a:ext uri="{91240B29-F687-4f45-9708-019B960494DF}">
-                <a14:hiddenLine xmlns="" xmlns:a14="http://schemas.microsoft.com/office/drawing/2010/main" w="9525">
+                <a14:hiddenLine xmlns:a14="http://schemas.microsoft.com/office/drawing/2010/main" xmlns="" w="9525">
                   <a:solidFill>
                     <a:srgbClr val="000000"/>
                   </a:solidFill>
@@ -2667,7 +2672,7 @@
             </a:ln>
             <a:extLst>
               <a:ext uri="{91240B29-F687-4f45-9708-019B960494DF}">
-                <a14:hiddenLine xmlns="" xmlns:a14="http://schemas.microsoft.com/office/drawing/2010/main" w="9525">
+                <a14:hiddenLine xmlns:a14="http://schemas.microsoft.com/office/drawing/2010/main" xmlns="" w="9525">
                   <a:solidFill>
                     <a:srgbClr val="000000"/>
                   </a:solidFill>
@@ -2735,7 +2740,7 @@
             </a:ln>
             <a:extLst>
               <a:ext uri="{91240B29-F687-4f45-9708-019B960494DF}">
-                <a14:hiddenLine xmlns="" xmlns:a14="http://schemas.microsoft.com/office/drawing/2010/main" w="9525">
+                <a14:hiddenLine xmlns:a14="http://schemas.microsoft.com/office/drawing/2010/main" xmlns="" w="9525">
                   <a:solidFill>
                     <a:srgbClr val="000000"/>
                   </a:solidFill>
@@ -2797,7 +2802,7 @@
             </a:ln>
             <a:extLst>
               <a:ext uri="{91240B29-F687-4f45-9708-019B960494DF}">
-                <a14:hiddenLine xmlns="" xmlns:a14="http://schemas.microsoft.com/office/drawing/2010/main" w="9525">
+                <a14:hiddenLine xmlns:a14="http://schemas.microsoft.com/office/drawing/2010/main" xmlns="" w="9525">
                   <a:solidFill>
                     <a:srgbClr val="000000"/>
                   </a:solidFill>
@@ -2887,7 +2892,7 @@
             </a:ln>
             <a:extLst>
               <a:ext uri="{91240B29-F687-4f45-9708-019B960494DF}">
-                <a14:hiddenLine xmlns="" xmlns:a14="http://schemas.microsoft.com/office/drawing/2010/main" w="9525">
+                <a14:hiddenLine xmlns:a14="http://schemas.microsoft.com/office/drawing/2010/main" xmlns="" w="9525">
                   <a:solidFill>
                     <a:srgbClr val="000000"/>
                   </a:solidFill>
@@ -2949,7 +2954,7 @@
             </a:ln>
             <a:extLst>
               <a:ext uri="{91240B29-F687-4f45-9708-019B960494DF}">
-                <a14:hiddenLine xmlns="" xmlns:a14="http://schemas.microsoft.com/office/drawing/2010/main" w="9525">
+                <a14:hiddenLine xmlns:a14="http://schemas.microsoft.com/office/drawing/2010/main" xmlns="" w="9525">
                   <a:solidFill>
                     <a:srgbClr val="000000"/>
                   </a:solidFill>
@@ -3039,7 +3044,7 @@
             </a:ln>
             <a:extLst>
               <a:ext uri="{91240B29-F687-4f45-9708-019B960494DF}">
-                <a14:hiddenLine xmlns="" xmlns:a14="http://schemas.microsoft.com/office/drawing/2010/main" w="9525">
+                <a14:hiddenLine xmlns:a14="http://schemas.microsoft.com/office/drawing/2010/main" xmlns="" w="9525">
                   <a:solidFill>
                     <a:srgbClr val="000000"/>
                   </a:solidFill>
@@ -3101,7 +3106,7 @@
             </a:ln>
             <a:extLst>
               <a:ext uri="{91240B29-F687-4f45-9708-019B960494DF}">
-                <a14:hiddenLine xmlns="" xmlns:a14="http://schemas.microsoft.com/office/drawing/2010/main" w="9525">
+                <a14:hiddenLine xmlns:a14="http://schemas.microsoft.com/office/drawing/2010/main" xmlns="" w="9525">
                   <a:solidFill>
                     <a:srgbClr val="000000"/>
                   </a:solidFill>
@@ -3191,7 +3196,7 @@
             </a:ln>
             <a:extLst>
               <a:ext uri="{91240B29-F687-4f45-9708-019B960494DF}">
-                <a14:hiddenLine xmlns="" xmlns:a14="http://schemas.microsoft.com/office/drawing/2010/main" w="9525">
+                <a14:hiddenLine xmlns:a14="http://schemas.microsoft.com/office/drawing/2010/main" xmlns="" w="9525">
                   <a:solidFill>
                     <a:srgbClr val="000000"/>
                   </a:solidFill>
@@ -3225,7 +3230,7 @@
             </a:ln>
             <a:extLst>
               <a:ext uri="{91240B29-F687-4f45-9708-019B960494DF}">
-                <a14:hiddenLine xmlns="" xmlns:a14="http://schemas.microsoft.com/office/drawing/2010/main" w="9525">
+                <a14:hiddenLine xmlns:a14="http://schemas.microsoft.com/office/drawing/2010/main" xmlns="" w="9525">
                   <a:solidFill>
                     <a:srgbClr val="000000"/>
                   </a:solidFill>
@@ -3290,7 +3295,7 @@
             </a:ln>
             <a:extLst>
               <a:ext uri="{91240B29-F687-4f45-9708-019B960494DF}">
-                <a14:hiddenLine xmlns="" xmlns:a14="http://schemas.microsoft.com/office/drawing/2010/main" w="9525">
+                <a14:hiddenLine xmlns:a14="http://schemas.microsoft.com/office/drawing/2010/main" xmlns="" w="9525">
                   <a:solidFill>
                     <a:srgbClr val="000000"/>
                   </a:solidFill>
@@ -3380,7 +3385,7 @@
             </a:ln>
             <a:extLst>
               <a:ext uri="{91240B29-F687-4f45-9708-019B960494DF}">
-                <a14:hiddenLine xmlns="" xmlns:a14="http://schemas.microsoft.com/office/drawing/2010/main" w="9525">
+                <a14:hiddenLine xmlns:a14="http://schemas.microsoft.com/office/drawing/2010/main" xmlns="" w="9525">
                   <a:solidFill>
                     <a:srgbClr val="000000"/>
                   </a:solidFill>
@@ -3442,7 +3447,7 @@
             </a:ln>
             <a:extLst>
               <a:ext uri="{91240B29-F687-4f45-9708-019B960494DF}">
-                <a14:hiddenLine xmlns="" xmlns:a14="http://schemas.microsoft.com/office/drawing/2010/main" w="9525">
+                <a14:hiddenLine xmlns:a14="http://schemas.microsoft.com/office/drawing/2010/main" xmlns="" w="9525">
                   <a:solidFill>
                     <a:srgbClr val="000000"/>
                   </a:solidFill>
@@ -3532,7 +3537,7 @@
             </a:ln>
             <a:extLst>
               <a:ext uri="{91240B29-F687-4f45-9708-019B960494DF}">
-                <a14:hiddenLine xmlns="" xmlns:a14="http://schemas.microsoft.com/office/drawing/2010/main" w="9525">
+                <a14:hiddenLine xmlns:a14="http://schemas.microsoft.com/office/drawing/2010/main" xmlns="" w="9525">
                   <a:solidFill>
                     <a:srgbClr val="000000"/>
                   </a:solidFill>
@@ -3622,7 +3627,7 @@
             </a:ln>
             <a:extLst>
               <a:ext uri="{91240B29-F687-4f45-9708-019B960494DF}">
-                <a14:hiddenLine xmlns="" xmlns:a14="http://schemas.microsoft.com/office/drawing/2010/main" w="9525">
+                <a14:hiddenLine xmlns:a14="http://schemas.microsoft.com/office/drawing/2010/main" xmlns="" w="9525">
                   <a:solidFill>
                     <a:srgbClr val="000000"/>
                   </a:solidFill>
@@ -3687,7 +3692,7 @@
             </a:ln>
             <a:extLst>
               <a:ext uri="{91240B29-F687-4f45-9708-019B960494DF}">
-                <a14:hiddenLine xmlns="" xmlns:a14="http://schemas.microsoft.com/office/drawing/2010/main" w="9525">
+                <a14:hiddenLine xmlns:a14="http://schemas.microsoft.com/office/drawing/2010/main" xmlns="" w="9525">
                   <a:solidFill>
                     <a:srgbClr val="000000"/>
                   </a:solidFill>
@@ -3749,7 +3754,7 @@
             </a:ln>
             <a:extLst>
               <a:ext uri="{91240B29-F687-4f45-9708-019B960494DF}">
-                <a14:hiddenLine xmlns="" xmlns:a14="http://schemas.microsoft.com/office/drawing/2010/main" w="9525">
+                <a14:hiddenLine xmlns:a14="http://schemas.microsoft.com/office/drawing/2010/main" xmlns="" w="9525">
                   <a:solidFill>
                     <a:srgbClr val="000000"/>
                   </a:solidFill>
@@ -3839,7 +3844,7 @@
             </a:ln>
             <a:extLst>
               <a:ext uri="{91240B29-F687-4f45-9708-019B960494DF}">
-                <a14:hiddenLine xmlns="" xmlns:a14="http://schemas.microsoft.com/office/drawing/2010/main" w="9525">
+                <a14:hiddenLine xmlns:a14="http://schemas.microsoft.com/office/drawing/2010/main" xmlns="" w="9525">
                   <a:solidFill>
                     <a:srgbClr val="000000"/>
                   </a:solidFill>
@@ -3929,7 +3934,7 @@
             </a:ln>
             <a:extLst>
               <a:ext uri="{91240B29-F687-4f45-9708-019B960494DF}">
-                <a14:hiddenLine xmlns="" xmlns:a14="http://schemas.microsoft.com/office/drawing/2010/main" w="9525">
+                <a14:hiddenLine xmlns:a14="http://schemas.microsoft.com/office/drawing/2010/main" xmlns="" w="9525">
                   <a:solidFill>
                     <a:srgbClr val="000000"/>
                   </a:solidFill>
@@ -3991,7 +3996,7 @@
             </a:ln>
             <a:extLst>
               <a:ext uri="{91240B29-F687-4f45-9708-019B960494DF}">
-                <a14:hiddenLine xmlns="" xmlns:a14="http://schemas.microsoft.com/office/drawing/2010/main" w="9525">
+                <a14:hiddenLine xmlns:a14="http://schemas.microsoft.com/office/drawing/2010/main" xmlns="" w="9525">
                   <a:solidFill>
                     <a:srgbClr val="000000"/>
                   </a:solidFill>
@@ -4111,7 +4116,7 @@
             </a:ln>
             <a:extLst>
               <a:ext uri="{91240B29-F687-4f45-9708-019B960494DF}">
-                <a14:hiddenLine xmlns="" xmlns:a14="http://schemas.microsoft.com/office/drawing/2010/main" w="9525">
+                <a14:hiddenLine xmlns:a14="http://schemas.microsoft.com/office/drawing/2010/main" xmlns="" w="9525">
                   <a:solidFill>
                     <a:srgbClr val="000000"/>
                   </a:solidFill>
@@ -4179,7 +4184,7 @@
             </a:ln>
             <a:extLst>
               <a:ext uri="{91240B29-F687-4f45-9708-019B960494DF}">
-                <a14:hiddenLine xmlns="" xmlns:a14="http://schemas.microsoft.com/office/drawing/2010/main" w="9525">
+                <a14:hiddenLine xmlns:a14="http://schemas.microsoft.com/office/drawing/2010/main" xmlns="" w="9525">
                   <a:solidFill>
                     <a:srgbClr val="000000"/>
                   </a:solidFill>
@@ -4269,7 +4274,7 @@
             </a:ln>
             <a:extLst>
               <a:ext uri="{91240B29-F687-4f45-9708-019B960494DF}">
-                <a14:hiddenLine xmlns="" xmlns:a14="http://schemas.microsoft.com/office/drawing/2010/main" w="9525">
+                <a14:hiddenLine xmlns:a14="http://schemas.microsoft.com/office/drawing/2010/main" xmlns="" w="9525">
                   <a:solidFill>
                     <a:srgbClr val="000000"/>
                   </a:solidFill>
@@ -4409,7 +4414,7 @@
           <a:p>
             <a:fld id="{7D5207A7-6A00-4516-866C-43D057526ED9}" type="datetimeFigureOut">
               <a:rPr lang="ru-RU" smtClean="0"/>
-              <a:t>30.08.2026</a:t>
+              <a:t>02.09.2026</a:t>
             </a:fld>
             <a:endParaRPr lang="ru-RU"/>
           </a:p>
@@ -4676,7 +4681,7 @@
           <a:p>
             <a:fld id="{7D5207A7-6A00-4516-866C-43D057526ED9}" type="datetimeFigureOut">
               <a:rPr lang="ru-RU" smtClean="0"/>
-              <a:t>30.08.2026</a:t>
+              <a:t>02.09.2026</a:t>
             </a:fld>
             <a:endParaRPr lang="ru-RU"/>
           </a:p>
@@ -4872,7 +4877,7 @@
           <a:p>
             <a:fld id="{7D5207A7-6A00-4516-866C-43D057526ED9}" type="datetimeFigureOut">
               <a:rPr lang="ru-RU" smtClean="0"/>
-              <a:t>30.08.2026</a:t>
+              <a:t>02.09.2026</a:t>
             </a:fld>
             <a:endParaRPr lang="ru-RU"/>
           </a:p>
@@ -5135,7 +5140,7 @@
           <a:p>
             <a:fld id="{7D5207A7-6A00-4516-866C-43D057526ED9}" type="datetimeFigureOut">
               <a:rPr lang="ru-RU" smtClean="0"/>
-              <a:t>30.08.2026</a:t>
+              <a:t>02.09.2026</a:t>
             </a:fld>
             <a:endParaRPr lang="ru-RU"/>
           </a:p>
@@ -5569,7 +5574,7 @@
           <a:p>
             <a:fld id="{7D5207A7-6A00-4516-866C-43D057526ED9}" type="datetimeFigureOut">
               <a:rPr lang="ru-RU" smtClean="0"/>
-              <a:t>30.08.2026</a:t>
+              <a:t>02.09.2026</a:t>
             </a:fld>
             <a:endParaRPr lang="ru-RU"/>
           </a:p>
@@ -6115,7 +6120,7 @@
           <a:p>
             <a:fld id="{7D5207A7-6A00-4516-866C-43D057526ED9}" type="datetimeFigureOut">
               <a:rPr lang="ru-RU" smtClean="0"/>
-              <a:t>30.08.2026</a:t>
+              <a:t>02.09.2026</a:t>
             </a:fld>
             <a:endParaRPr lang="ru-RU"/>
           </a:p>
@@ -6835,7 +6840,7 @@
           <a:p>
             <a:fld id="{7D5207A7-6A00-4516-866C-43D057526ED9}" type="datetimeFigureOut">
               <a:rPr lang="ru-RU" smtClean="0"/>
-              <a:t>30.08.2026</a:t>
+              <a:t>02.09.2026</a:t>
             </a:fld>
             <a:endParaRPr lang="ru-RU"/>
           </a:p>
@@ -7005,7 +7010,7 @@
           <a:p>
             <a:fld id="{7D5207A7-6A00-4516-866C-43D057526ED9}" type="datetimeFigureOut">
               <a:rPr lang="ru-RU" smtClean="0"/>
-              <a:t>30.08.2026</a:t>
+              <a:t>02.09.2026</a:t>
             </a:fld>
             <a:endParaRPr lang="ru-RU"/>
           </a:p>
@@ -7185,7 +7190,7 @@
           <a:p>
             <a:fld id="{7D5207A7-6A00-4516-866C-43D057526ED9}" type="datetimeFigureOut">
               <a:rPr lang="ru-RU" smtClean="0"/>
-              <a:t>30.08.2026</a:t>
+              <a:t>02.09.2026</a:t>
             </a:fld>
             <a:endParaRPr lang="ru-RU"/>
           </a:p>
@@ -7355,7 +7360,7 @@
           <a:p>
             <a:fld id="{7D5207A7-6A00-4516-866C-43D057526ED9}" type="datetimeFigureOut">
               <a:rPr lang="ru-RU" smtClean="0"/>
-              <a:t>30.08.2026</a:t>
+              <a:t>02.09.2026</a:t>
             </a:fld>
             <a:endParaRPr lang="ru-RU"/>
           </a:p>
@@ -7605,7 +7610,7 @@
           <a:p>
             <a:fld id="{7D5207A7-6A00-4516-866C-43D057526ED9}" type="datetimeFigureOut">
               <a:rPr lang="ru-RU" smtClean="0"/>
-              <a:t>30.08.2026</a:t>
+              <a:t>02.09.2026</a:t>
             </a:fld>
             <a:endParaRPr lang="ru-RU"/>
           </a:p>
@@ -7837,7 +7842,7 @@
           <a:p>
             <a:fld id="{7D5207A7-6A00-4516-866C-43D057526ED9}" type="datetimeFigureOut">
               <a:rPr lang="ru-RU" smtClean="0"/>
-              <a:t>30.08.2026</a:t>
+              <a:t>02.09.2026</a:t>
             </a:fld>
             <a:endParaRPr lang="ru-RU"/>
           </a:p>
@@ -8218,7 +8223,7 @@
           <a:p>
             <a:fld id="{7D5207A7-6A00-4516-866C-43D057526ED9}" type="datetimeFigureOut">
               <a:rPr lang="ru-RU" smtClean="0"/>
-              <a:t>30.08.2026</a:t>
+              <a:t>02.09.2026</a:t>
             </a:fld>
             <a:endParaRPr lang="ru-RU"/>
           </a:p>
@@ -8336,7 +8341,7 @@
           <a:p>
             <a:fld id="{7D5207A7-6A00-4516-866C-43D057526ED9}" type="datetimeFigureOut">
               <a:rPr lang="ru-RU" smtClean="0"/>
-              <a:t>30.08.2026</a:t>
+              <a:t>02.09.2026</a:t>
             </a:fld>
             <a:endParaRPr lang="ru-RU"/>
           </a:p>
@@ -8431,7 +8436,7 @@
           <a:p>
             <a:fld id="{7D5207A7-6A00-4516-866C-43D057526ED9}" type="datetimeFigureOut">
               <a:rPr lang="ru-RU" smtClean="0"/>
-              <a:t>30.08.2026</a:t>
+              <a:t>02.09.2026</a:t>
             </a:fld>
             <a:endParaRPr lang="ru-RU"/>
           </a:p>
@@ -8680,7 +8685,7 @@
           <a:p>
             <a:fld id="{7D5207A7-6A00-4516-866C-43D057526ED9}" type="datetimeFigureOut">
               <a:rPr lang="ru-RU" smtClean="0"/>
-              <a:t>30.08.2026</a:t>
+              <a:t>02.09.2026</a:t>
             </a:fld>
             <a:endParaRPr lang="ru-RU"/>
           </a:p>
@@ -8960,7 +8965,7 @@
           <a:p>
             <a:fld id="{7D5207A7-6A00-4516-866C-43D057526ED9}" type="datetimeFigureOut">
               <a:rPr lang="ru-RU" smtClean="0"/>
-              <a:t>30.08.2026</a:t>
+              <a:t>02.09.2026</a:t>
             </a:fld>
             <a:endParaRPr lang="ru-RU"/>
           </a:p>
@@ -9083,7 +9088,7 @@
           <a:noFill/>
           <a:extLst>
             <a:ext uri="{909E8E84-426E-40dd-AFC4-6F175D3DCCD1}">
-              <a14:hiddenFill xmlns="" xmlns:a14="http://schemas.microsoft.com/office/drawing/2010/main">
+              <a14:hiddenFill xmlns:a14="http://schemas.microsoft.com/office/drawing/2010/main" xmlns="">
                 <a:solidFill>
                   <a:srgbClr val="FFFFFF"/>
                 </a:solidFill>
@@ -9157,7 +9162,7 @@
               </a:ln>
               <a:extLst>
                 <a:ext uri="{91240B29-F687-4f45-9708-019B960494DF}">
-                  <a14:hiddenLine xmlns="" xmlns:a14="http://schemas.microsoft.com/office/drawing/2010/main" w="9525">
+                  <a14:hiddenLine xmlns:a14="http://schemas.microsoft.com/office/drawing/2010/main" xmlns="" w="9525">
                     <a:solidFill>
                       <a:srgbClr val="000000"/>
                     </a:solidFill>
@@ -9247,7 +9252,7 @@
               </a:ln>
               <a:extLst>
                 <a:ext uri="{91240B29-F687-4f45-9708-019B960494DF}">
-                  <a14:hiddenLine xmlns="" xmlns:a14="http://schemas.microsoft.com/office/drawing/2010/main" w="9525">
+                  <a14:hiddenLine xmlns:a14="http://schemas.microsoft.com/office/drawing/2010/main" xmlns="" w="9525">
                     <a:solidFill>
                       <a:srgbClr val="000000"/>
                     </a:solidFill>
@@ -9337,7 +9342,7 @@
               </a:ln>
               <a:extLst>
                 <a:ext uri="{91240B29-F687-4f45-9708-019B960494DF}">
-                  <a14:hiddenLine xmlns="" xmlns:a14="http://schemas.microsoft.com/office/drawing/2010/main" w="9525">
+                  <a14:hiddenLine xmlns:a14="http://schemas.microsoft.com/office/drawing/2010/main" xmlns="" w="9525">
                     <a:solidFill>
                       <a:srgbClr val="000000"/>
                     </a:solidFill>
@@ -9399,7 +9404,7 @@
               </a:ln>
               <a:extLst>
                 <a:ext uri="{91240B29-F687-4f45-9708-019B960494DF}">
-                  <a14:hiddenLine xmlns="" xmlns:a14="http://schemas.microsoft.com/office/drawing/2010/main" w="9525">
+                  <a14:hiddenLine xmlns:a14="http://schemas.microsoft.com/office/drawing/2010/main" xmlns="" w="9525">
                     <a:solidFill>
                       <a:srgbClr val="000000"/>
                     </a:solidFill>
@@ -9489,7 +9494,7 @@
               </a:ln>
               <a:extLst>
                 <a:ext uri="{91240B29-F687-4f45-9708-019B960494DF}">
-                  <a14:hiddenLine xmlns="" xmlns:a14="http://schemas.microsoft.com/office/drawing/2010/main" w="9525">
+                  <a14:hiddenLine xmlns:a14="http://schemas.microsoft.com/office/drawing/2010/main" xmlns="" w="9525">
                     <a:solidFill>
                       <a:srgbClr val="000000"/>
                     </a:solidFill>
@@ -9551,7 +9556,7 @@
               </a:ln>
               <a:extLst>
                 <a:ext uri="{91240B29-F687-4f45-9708-019B960494DF}">
-                  <a14:hiddenLine xmlns="" xmlns:a14="http://schemas.microsoft.com/office/drawing/2010/main" w="9525">
+                  <a14:hiddenLine xmlns:a14="http://schemas.microsoft.com/office/drawing/2010/main" xmlns="" w="9525">
                     <a:solidFill>
                       <a:srgbClr val="000000"/>
                     </a:solidFill>
@@ -9613,7 +9618,7 @@
               </a:ln>
               <a:extLst>
                 <a:ext uri="{91240B29-F687-4f45-9708-019B960494DF}">
-                  <a14:hiddenLine xmlns="" xmlns:a14="http://schemas.microsoft.com/office/drawing/2010/main" w="9525">
+                  <a14:hiddenLine xmlns:a14="http://schemas.microsoft.com/office/drawing/2010/main" xmlns="" w="9525">
                     <a:solidFill>
                       <a:srgbClr val="000000"/>
                     </a:solidFill>
@@ -9703,7 +9708,7 @@
               </a:ln>
               <a:extLst>
                 <a:ext uri="{91240B29-F687-4f45-9708-019B960494DF}">
-                  <a14:hiddenLine xmlns="" xmlns:a14="http://schemas.microsoft.com/office/drawing/2010/main" w="9525">
+                  <a14:hiddenLine xmlns:a14="http://schemas.microsoft.com/office/drawing/2010/main" xmlns="" w="9525">
                     <a:solidFill>
                       <a:srgbClr val="000000"/>
                     </a:solidFill>
@@ -9793,7 +9798,7 @@
               </a:ln>
               <a:extLst>
                 <a:ext uri="{91240B29-F687-4f45-9708-019B960494DF}">
-                  <a14:hiddenLine xmlns="" xmlns:a14="http://schemas.microsoft.com/office/drawing/2010/main" w="9525">
+                  <a14:hiddenLine xmlns:a14="http://schemas.microsoft.com/office/drawing/2010/main" xmlns="" w="9525">
                     <a:solidFill>
                       <a:srgbClr val="000000"/>
                     </a:solidFill>
@@ -9855,7 +9860,7 @@
               </a:ln>
               <a:extLst>
                 <a:ext uri="{91240B29-F687-4f45-9708-019B960494DF}">
-                  <a14:hiddenLine xmlns="" xmlns:a14="http://schemas.microsoft.com/office/drawing/2010/main" w="9525">
+                  <a14:hiddenLine xmlns:a14="http://schemas.microsoft.com/office/drawing/2010/main" xmlns="" w="9525">
                     <a:solidFill>
                       <a:srgbClr val="000000"/>
                     </a:solidFill>
@@ -9965,7 +9970,7 @@
               </a:ln>
               <a:extLst>
                 <a:ext uri="{91240B29-F687-4f45-9708-019B960494DF}">
-                  <a14:hiddenLine xmlns="" xmlns:a14="http://schemas.microsoft.com/office/drawing/2010/main" w="9525">
+                  <a14:hiddenLine xmlns:a14="http://schemas.microsoft.com/office/drawing/2010/main" xmlns="" w="9525">
                     <a:solidFill>
                       <a:srgbClr val="000000"/>
                     </a:solidFill>
@@ -10049,7 +10054,7 @@
               </a:ln>
               <a:extLst>
                 <a:ext uri="{91240B29-F687-4f45-9708-019B960494DF}">
-                  <a14:hiddenLine xmlns="" xmlns:a14="http://schemas.microsoft.com/office/drawing/2010/main" w="9525">
+                  <a14:hiddenLine xmlns:a14="http://schemas.microsoft.com/office/drawing/2010/main" xmlns="" w="9525">
                     <a:solidFill>
                       <a:srgbClr val="000000"/>
                     </a:solidFill>
@@ -10111,7 +10116,7 @@
               </a:ln>
               <a:extLst>
                 <a:ext uri="{91240B29-F687-4f45-9708-019B960494DF}">
-                  <a14:hiddenLine xmlns="" xmlns:a14="http://schemas.microsoft.com/office/drawing/2010/main" w="9525">
+                  <a14:hiddenLine xmlns:a14="http://schemas.microsoft.com/office/drawing/2010/main" xmlns="" w="9525">
                     <a:solidFill>
                       <a:srgbClr val="000000"/>
                     </a:solidFill>
@@ -10173,7 +10178,7 @@
               </a:ln>
               <a:extLst>
                 <a:ext uri="{91240B29-F687-4f45-9708-019B960494DF}">
-                  <a14:hiddenLine xmlns="" xmlns:a14="http://schemas.microsoft.com/office/drawing/2010/main" w="9525">
+                  <a14:hiddenLine xmlns:a14="http://schemas.microsoft.com/office/drawing/2010/main" xmlns="" w="9525">
                     <a:solidFill>
                       <a:srgbClr val="000000"/>
                     </a:solidFill>
@@ -10263,7 +10268,7 @@
               </a:ln>
               <a:extLst>
                 <a:ext uri="{91240B29-F687-4f45-9708-019B960494DF}">
-                  <a14:hiddenLine xmlns="" xmlns:a14="http://schemas.microsoft.com/office/drawing/2010/main" w="9525">
+                  <a14:hiddenLine xmlns:a14="http://schemas.microsoft.com/office/drawing/2010/main" xmlns="" w="9525">
                     <a:solidFill>
                       <a:srgbClr val="000000"/>
                     </a:solidFill>
@@ -10297,7 +10302,7 @@
               </a:ln>
               <a:extLst>
                 <a:ext uri="{91240B29-F687-4f45-9708-019B960494DF}">
-                  <a14:hiddenLine xmlns="" xmlns:a14="http://schemas.microsoft.com/office/drawing/2010/main" w="9525">
+                  <a14:hiddenLine xmlns:a14="http://schemas.microsoft.com/office/drawing/2010/main" xmlns="" w="9525">
                     <a:solidFill>
                       <a:srgbClr val="000000"/>
                     </a:solidFill>
@@ -10362,7 +10367,7 @@
               </a:ln>
               <a:extLst>
                 <a:ext uri="{91240B29-F687-4f45-9708-019B960494DF}">
-                  <a14:hiddenLine xmlns="" xmlns:a14="http://schemas.microsoft.com/office/drawing/2010/main" w="9525">
+                  <a14:hiddenLine xmlns:a14="http://schemas.microsoft.com/office/drawing/2010/main" xmlns="" w="9525">
                     <a:solidFill>
                       <a:srgbClr val="000000"/>
                     </a:solidFill>
@@ -10452,7 +10457,7 @@
               </a:ln>
               <a:extLst>
                 <a:ext uri="{91240B29-F687-4f45-9708-019B960494DF}">
-                  <a14:hiddenLine xmlns="" xmlns:a14="http://schemas.microsoft.com/office/drawing/2010/main" w="9525">
+                  <a14:hiddenLine xmlns:a14="http://schemas.microsoft.com/office/drawing/2010/main" xmlns="" w="9525">
                     <a:solidFill>
                       <a:srgbClr val="000000"/>
                     </a:solidFill>
@@ -10514,7 +10519,7 @@
               </a:ln>
               <a:extLst>
                 <a:ext uri="{91240B29-F687-4f45-9708-019B960494DF}">
-                  <a14:hiddenLine xmlns="" xmlns:a14="http://schemas.microsoft.com/office/drawing/2010/main" w="9525">
+                  <a14:hiddenLine xmlns:a14="http://schemas.microsoft.com/office/drawing/2010/main" xmlns="" w="9525">
                     <a:solidFill>
                       <a:srgbClr val="000000"/>
                     </a:solidFill>
@@ -10604,7 +10609,7 @@
               </a:ln>
               <a:extLst>
                 <a:ext uri="{91240B29-F687-4f45-9708-019B960494DF}">
-                  <a14:hiddenLine xmlns="" xmlns:a14="http://schemas.microsoft.com/office/drawing/2010/main" w="9525">
+                  <a14:hiddenLine xmlns:a14="http://schemas.microsoft.com/office/drawing/2010/main" xmlns="" w="9525">
                     <a:solidFill>
                       <a:srgbClr val="000000"/>
                     </a:solidFill>
@@ -10669,7 +10674,7 @@
               </a:ln>
               <a:extLst>
                 <a:ext uri="{91240B29-F687-4f45-9708-019B960494DF}">
-                  <a14:hiddenLine xmlns="" xmlns:a14="http://schemas.microsoft.com/office/drawing/2010/main" w="9525">
+                  <a14:hiddenLine xmlns:a14="http://schemas.microsoft.com/office/drawing/2010/main" xmlns="" w="9525">
                     <a:solidFill>
                       <a:srgbClr val="000000"/>
                     </a:solidFill>
@@ -10731,7 +10736,7 @@
               </a:ln>
               <a:extLst>
                 <a:ext uri="{91240B29-F687-4f45-9708-019B960494DF}">
-                  <a14:hiddenLine xmlns="" xmlns:a14="http://schemas.microsoft.com/office/drawing/2010/main" w="9525">
+                  <a14:hiddenLine xmlns:a14="http://schemas.microsoft.com/office/drawing/2010/main" xmlns="" w="9525">
                     <a:solidFill>
                       <a:srgbClr val="000000"/>
                     </a:solidFill>
@@ -10821,7 +10826,7 @@
               </a:ln>
               <a:extLst>
                 <a:ext uri="{91240B29-F687-4f45-9708-019B960494DF}">
-                  <a14:hiddenLine xmlns="" xmlns:a14="http://schemas.microsoft.com/office/drawing/2010/main" w="9525">
+                  <a14:hiddenLine xmlns:a14="http://schemas.microsoft.com/office/drawing/2010/main" xmlns="" w="9525">
                     <a:solidFill>
                       <a:srgbClr val="000000"/>
                     </a:solidFill>
@@ -10911,7 +10916,7 @@
               </a:ln>
               <a:extLst>
                 <a:ext uri="{91240B29-F687-4f45-9708-019B960494DF}">
-                  <a14:hiddenLine xmlns="" xmlns:a14="http://schemas.microsoft.com/office/drawing/2010/main" w="9525">
+                  <a14:hiddenLine xmlns:a14="http://schemas.microsoft.com/office/drawing/2010/main" xmlns="" w="9525">
                     <a:solidFill>
                       <a:srgbClr val="000000"/>
                     </a:solidFill>
@@ -10976,7 +10981,7 @@
               </a:ln>
               <a:extLst>
                 <a:ext uri="{91240B29-F687-4f45-9708-019B960494DF}">
-                  <a14:hiddenLine xmlns="" xmlns:a14="http://schemas.microsoft.com/office/drawing/2010/main" w="9525">
+                  <a14:hiddenLine xmlns:a14="http://schemas.microsoft.com/office/drawing/2010/main" xmlns="" w="9525">
                     <a:solidFill>
                       <a:srgbClr val="000000"/>
                     </a:solidFill>
@@ -11096,7 +11101,7 @@
               </a:ln>
               <a:extLst>
                 <a:ext uri="{91240B29-F687-4f45-9708-019B960494DF}">
-                  <a14:hiddenLine xmlns="" xmlns:a14="http://schemas.microsoft.com/office/drawing/2010/main" w="9525">
+                  <a14:hiddenLine xmlns:a14="http://schemas.microsoft.com/office/drawing/2010/main" xmlns="" w="9525">
                     <a:solidFill>
                       <a:srgbClr val="000000"/>
                     </a:solidFill>
@@ -11177,7 +11182,7 @@
               </a:ln>
               <a:extLst>
                 <a:ext uri="{91240B29-F687-4f45-9708-019B960494DF}">
-                  <a14:hiddenLine xmlns="" xmlns:a14="http://schemas.microsoft.com/office/drawing/2010/main" w="9525">
+                  <a14:hiddenLine xmlns:a14="http://schemas.microsoft.com/office/drawing/2010/main" xmlns="" w="9525">
                     <a:solidFill>
                       <a:srgbClr val="000000"/>
                     </a:solidFill>
@@ -11292,7 +11297,7 @@
               </a:ln>
               <a:extLst>
                 <a:ext uri="{91240B29-F687-4f45-9708-019B960494DF}">
-                  <a14:hiddenLine xmlns="" xmlns:a14="http://schemas.microsoft.com/office/drawing/2010/main" w="9525">
+                  <a14:hiddenLine xmlns:a14="http://schemas.microsoft.com/office/drawing/2010/main" xmlns="" w="9525">
                     <a:solidFill>
                       <a:srgbClr val="000000"/>
                     </a:solidFill>
@@ -11382,7 +11387,7 @@
               </a:ln>
               <a:extLst>
                 <a:ext uri="{91240B29-F687-4f45-9708-019B960494DF}">
-                  <a14:hiddenLine xmlns="" xmlns:a14="http://schemas.microsoft.com/office/drawing/2010/main" w="9525">
+                  <a14:hiddenLine xmlns:a14="http://schemas.microsoft.com/office/drawing/2010/main" xmlns="" w="9525">
                     <a:solidFill>
                       <a:srgbClr val="000000"/>
                     </a:solidFill>
@@ -11447,7 +11452,7 @@
               </a:ln>
               <a:extLst>
                 <a:ext uri="{91240B29-F687-4f45-9708-019B960494DF}">
-                  <a14:hiddenLine xmlns="" xmlns:a14="http://schemas.microsoft.com/office/drawing/2010/main" w="9525">
+                  <a14:hiddenLine xmlns:a14="http://schemas.microsoft.com/office/drawing/2010/main" xmlns="" w="9525">
                     <a:solidFill>
                       <a:srgbClr val="000000"/>
                     </a:solidFill>
@@ -11537,7 +11542,7 @@
               </a:ln>
               <a:extLst>
                 <a:ext uri="{91240B29-F687-4f45-9708-019B960494DF}">
-                  <a14:hiddenLine xmlns="" xmlns:a14="http://schemas.microsoft.com/office/drawing/2010/main" w="9525">
+                  <a14:hiddenLine xmlns:a14="http://schemas.microsoft.com/office/drawing/2010/main" xmlns="" w="9525">
                     <a:solidFill>
                       <a:srgbClr val="000000"/>
                     </a:solidFill>
@@ -11605,7 +11610,7 @@
               </a:ln>
               <a:extLst>
                 <a:ext uri="{91240B29-F687-4f45-9708-019B960494DF}">
-                  <a14:hiddenLine xmlns="" xmlns:a14="http://schemas.microsoft.com/office/drawing/2010/main" w="9525">
+                  <a14:hiddenLine xmlns:a14="http://schemas.microsoft.com/office/drawing/2010/main" xmlns="" w="9525">
                     <a:solidFill>
                       <a:srgbClr val="000000"/>
                     </a:solidFill>
@@ -11695,7 +11700,7 @@
               </a:ln>
               <a:extLst>
                 <a:ext uri="{91240B29-F687-4f45-9708-019B960494DF}">
-                  <a14:hiddenLine xmlns="" xmlns:a14="http://schemas.microsoft.com/office/drawing/2010/main" w="9525">
+                  <a14:hiddenLine xmlns:a14="http://schemas.microsoft.com/office/drawing/2010/main" xmlns="" w="9525">
                     <a:solidFill>
                       <a:srgbClr val="000000"/>
                     </a:solidFill>
@@ -11763,7 +11768,7 @@
               </a:ln>
               <a:extLst>
                 <a:ext uri="{91240B29-F687-4f45-9708-019B960494DF}">
-                  <a14:hiddenLine xmlns="" xmlns:a14="http://schemas.microsoft.com/office/drawing/2010/main" w="9525">
+                  <a14:hiddenLine xmlns:a14="http://schemas.microsoft.com/office/drawing/2010/main" xmlns="" w="9525">
                     <a:solidFill>
                       <a:srgbClr val="000000"/>
                     </a:solidFill>
@@ -11853,7 +11858,7 @@
               </a:ln>
               <a:extLst>
                 <a:ext uri="{91240B29-F687-4f45-9708-019B960494DF}">
-                  <a14:hiddenLine xmlns="" xmlns:a14="http://schemas.microsoft.com/office/drawing/2010/main" w="9525">
+                  <a14:hiddenLine xmlns:a14="http://schemas.microsoft.com/office/drawing/2010/main" xmlns="" w="9525">
                     <a:solidFill>
                       <a:srgbClr val="000000"/>
                     </a:solidFill>
@@ -11887,7 +11892,7 @@
               </a:ln>
               <a:extLst>
                 <a:ext uri="{91240B29-F687-4f45-9708-019B960494DF}">
-                  <a14:hiddenLine xmlns="" xmlns:a14="http://schemas.microsoft.com/office/drawing/2010/main" w="9525">
+                  <a14:hiddenLine xmlns:a14="http://schemas.microsoft.com/office/drawing/2010/main" xmlns="" w="9525">
                     <a:solidFill>
                       <a:srgbClr val="000000"/>
                     </a:solidFill>
@@ -12027,7 +12032,7 @@
           <a:p>
             <a:fld id="{7D5207A7-6A00-4516-866C-43D057526ED9}" type="datetimeFigureOut">
               <a:rPr lang="ru-RU" smtClean="0"/>
-              <a:t>30.08.2026</a:t>
+              <a:t>02.09.2026</a:t>
             </a:fld>
             <a:endParaRPr lang="ru-RU"/>
           </a:p>
@@ -12476,25 +12481,6 @@
           </a:p>
         </p:txBody>
       </p:sp>
-      <p:sp>
-        <p:nvSpPr>
-          <p:cNvPr id="3" name="Подзаголовок 2"/>
-          <p:cNvSpPr>
-            <a:spLocks noGrp="1"/>
-          </p:cNvSpPr>
-          <p:nvPr>
-            <p:ph type="subTitle" idx="1"/>
-          </p:nvPr>
-        </p:nvSpPr>
-        <p:spPr/>
-        <p:txBody>
-          <a:bodyPr/>
-          <a:lstStyle/>
-          <a:p>
-            <a:endParaRPr lang="ru-RU" dirty="0"/>
-          </a:p>
-        </p:txBody>
-      </p:sp>
     </p:spTree>
     <p:extLst>
       <p:ext uri="{BB962C8B-B14F-4D97-AF65-F5344CB8AC3E}">
@@ -12548,6 +12534,806 @@
           <a:lstStyle/>
           <a:p>
             <a:r>
+              <a:rPr lang="af-ZA" b="1" dirty="0"/>
+              <a:t>Ethernet </a:t>
+            </a:r>
+            <a:r>
+              <a:rPr lang="af-ZA" b="1" dirty="0" smtClean="0"/>
+              <a:t>XEROX</a:t>
+            </a:r>
+            <a:endParaRPr lang="ru-RU" b="1" dirty="0"/>
+          </a:p>
+        </p:txBody>
+      </p:sp>
+      <p:pic>
+        <p:nvPicPr>
+          <p:cNvPr id="3074" name="Picture 2" descr="The Ethernet Diagram"/>
+          <p:cNvPicPr>
+            <a:picLocks noGrp="1" noChangeAspect="1" noChangeArrowheads="1"/>
+          </p:cNvPicPr>
+          <p:nvPr>
+            <p:ph idx="1"/>
+          </p:nvPr>
+        </p:nvPicPr>
+        <p:blipFill>
+          <a:blip r:embed="rId2">
+            <a:extLst>
+              <a:ext uri="{28A0092B-C50C-407E-A947-70E740481C1C}">
+                <a14:useLocalDpi xmlns:a14="http://schemas.microsoft.com/office/drawing/2010/main" val="0"/>
+              </a:ext>
+            </a:extLst>
+          </a:blip>
+          <a:srcRect/>
+          <a:stretch>
+            <a:fillRect/>
+          </a:stretch>
+        </p:blipFill>
+        <p:spPr bwMode="auto">
+          <a:xfrm>
+            <a:off x="2460624" y="2447131"/>
+            <a:ext cx="7267575" cy="3722416"/>
+          </a:xfrm>
+          <a:prstGeom prst="rect">
+            <a:avLst/>
+          </a:prstGeom>
+          <a:noFill/>
+          <a:extLst>
+            <a:ext uri="{909E8E84-426E-40DD-AFC4-6F175D3DCCD1}">
+              <a14:hiddenFill xmlns:a14="http://schemas.microsoft.com/office/drawing/2010/main">
+                <a:solidFill>
+                  <a:srgbClr val="FFFFFF"/>
+                </a:solidFill>
+              </a14:hiddenFill>
+            </a:ext>
+          </a:extLst>
+        </p:spPr>
+      </p:pic>
+    </p:spTree>
+    <p:extLst>
+      <p:ext uri="{BB962C8B-B14F-4D97-AF65-F5344CB8AC3E}">
+        <p14:creationId xmlns:p14="http://schemas.microsoft.com/office/powerpoint/2010/main" val="3021588095"/>
+      </p:ext>
+    </p:extLst>
+  </p:cSld>
+  <p:clrMapOvr>
+    <a:masterClrMapping/>
+  </p:clrMapOvr>
+</p:sld>
+</file>
+
+<file path=ppt/slides/slide11.xml><?xml version="1.0" encoding="utf-8"?>
+<p:sld xmlns:a="http://schemas.openxmlformats.org/drawingml/2006/main" xmlns:r="http://schemas.openxmlformats.org/officeDocument/2006/relationships" xmlns:p="http://schemas.openxmlformats.org/presentationml/2006/main">
+  <p:cSld>
+    <p:spTree>
+      <p:nvGrpSpPr>
+        <p:cNvPr id="1" name=""/>
+        <p:cNvGrpSpPr/>
+        <p:nvPr/>
+      </p:nvGrpSpPr>
+      <p:grpSpPr>
+        <a:xfrm>
+          <a:off x="0" y="0"/>
+          <a:ext cx="0" cy="0"/>
+          <a:chOff x="0" y="0"/>
+          <a:chExt cx="0" cy="0"/>
+        </a:xfrm>
+      </p:grpSpPr>
+      <p:sp>
+        <p:nvSpPr>
+          <p:cNvPr id="5" name="Заголовок 4"/>
+          <p:cNvSpPr>
+            <a:spLocks noGrp="1"/>
+          </p:cNvSpPr>
+          <p:nvPr>
+            <p:ph type="title"/>
+          </p:nvPr>
+        </p:nvSpPr>
+        <p:spPr/>
+        <p:txBody>
+          <a:bodyPr/>
+          <a:lstStyle/>
+          <a:p>
+            <a:r>
+              <a:rPr lang="af-ZA" b="1" dirty="0"/>
+              <a:t>10BASE5 (Thicknet)</a:t>
+            </a:r>
+            <a:endParaRPr lang="ru-RU" dirty="0"/>
+          </a:p>
+        </p:txBody>
+      </p:sp>
+      <p:pic>
+        <p:nvPicPr>
+          <p:cNvPr id="2052" name="Picture 4" descr="https://upload.wikimedia.org/wikipedia/commons/thumb/4/4a/ThicknetTransceiver.jpg/250px-ThicknetTransceiver.jpg?utm_source=en.wikipedia.org&amp;utm_campaign=parser&amp;utm_content=thumbnail"/>
+          <p:cNvPicPr>
+            <a:picLocks noGrp="1" noChangeAspect="1" noChangeArrowheads="1"/>
+          </p:cNvPicPr>
+          <p:nvPr>
+            <p:ph sz="half" idx="1"/>
+          </p:nvPr>
+        </p:nvPicPr>
+        <p:blipFill>
+          <a:blip r:embed="rId2">
+            <a:extLst>
+              <a:ext uri="{28A0092B-C50C-407E-A947-70E740481C1C}">
+                <a14:useLocalDpi xmlns:a14="http://schemas.microsoft.com/office/drawing/2010/main" val="0"/>
+              </a:ext>
+            </a:extLst>
+          </a:blip>
+          <a:stretch>
+            <a:fillRect/>
+          </a:stretch>
+        </p:blipFill>
+        <p:spPr bwMode="auto">
+          <a:xfrm>
+            <a:off x="1141413" y="2097088"/>
+            <a:ext cx="4631531" cy="4427744"/>
+          </a:xfrm>
+          <a:prstGeom prst="rect">
+            <a:avLst/>
+          </a:prstGeom>
+          <a:noFill/>
+          <a:extLst>
+            <a:ext uri="{909E8E84-426E-40DD-AFC4-6F175D3DCCD1}">
+              <a14:hiddenFill xmlns:a14="http://schemas.microsoft.com/office/drawing/2010/main">
+                <a:solidFill>
+                  <a:srgbClr val="FFFFFF"/>
+                </a:solidFill>
+              </a14:hiddenFill>
+            </a:ext>
+          </a:extLst>
+        </p:spPr>
+      </p:pic>
+      <p:sp>
+        <p:nvSpPr>
+          <p:cNvPr id="6" name="Объект 5"/>
+          <p:cNvSpPr>
+            <a:spLocks noGrp="1"/>
+          </p:cNvSpPr>
+          <p:nvPr>
+            <p:ph sz="half" idx="2"/>
+          </p:nvPr>
+        </p:nvSpPr>
+        <p:spPr>
+          <a:xfrm>
+            <a:off x="6388100" y="2983118"/>
+            <a:ext cx="4875211" cy="3541714"/>
+          </a:xfrm>
+        </p:spPr>
+        <p:txBody>
+          <a:bodyPr/>
+          <a:lstStyle/>
+          <a:p>
+            <a:r>
+              <a:rPr lang="ru-RU" dirty="0"/>
+              <a:t>толстый коаксиал 500 </a:t>
+            </a:r>
+            <a:r>
+              <a:rPr lang="ru-RU" dirty="0" smtClean="0"/>
+              <a:t>м</a:t>
+            </a:r>
+            <a:endParaRPr lang="en-US" dirty="0" smtClean="0"/>
+          </a:p>
+          <a:p>
+            <a:r>
+              <a:rPr lang="ru-RU" dirty="0" smtClean="0"/>
+              <a:t>Шина</a:t>
+            </a:r>
+            <a:endParaRPr lang="en-US" dirty="0" smtClean="0"/>
+          </a:p>
+          <a:p>
+            <a:r>
+              <a:rPr lang="ru-RU" dirty="0" smtClean="0"/>
+              <a:t>«</a:t>
+            </a:r>
+            <a:r>
+              <a:rPr lang="ru-RU" dirty="0" err="1" smtClean="0"/>
+              <a:t>вампирчики</a:t>
+            </a:r>
+            <a:r>
+              <a:rPr lang="ru-RU" dirty="0" smtClean="0"/>
+              <a:t>»</a:t>
+            </a:r>
+            <a:endParaRPr lang="en-US" dirty="0" smtClean="0"/>
+          </a:p>
+          <a:p>
+            <a:r>
+              <a:rPr lang="ru-RU" dirty="0" smtClean="0"/>
+              <a:t>10 </a:t>
+            </a:r>
+            <a:r>
+              <a:rPr lang="ru-RU" dirty="0"/>
+              <a:t>Мбит/с.</a:t>
+            </a:r>
+          </a:p>
+          <a:p>
+            <a:endParaRPr lang="ru-RU" dirty="0"/>
+          </a:p>
+        </p:txBody>
+      </p:sp>
+    </p:spTree>
+    <p:extLst>
+      <p:ext uri="{BB962C8B-B14F-4D97-AF65-F5344CB8AC3E}">
+        <p14:creationId xmlns:p14="http://schemas.microsoft.com/office/powerpoint/2010/main" val="1978715995"/>
+      </p:ext>
+    </p:extLst>
+  </p:cSld>
+  <p:clrMapOvr>
+    <a:masterClrMapping/>
+  </p:clrMapOvr>
+</p:sld>
+</file>
+
+<file path=ppt/slides/slide12.xml><?xml version="1.0" encoding="utf-8"?>
+<p:sld xmlns:a="http://schemas.openxmlformats.org/drawingml/2006/main" xmlns:r="http://schemas.openxmlformats.org/officeDocument/2006/relationships" xmlns:p="http://schemas.openxmlformats.org/presentationml/2006/main">
+  <p:cSld>
+    <p:spTree>
+      <p:nvGrpSpPr>
+        <p:cNvPr id="1" name=""/>
+        <p:cNvGrpSpPr/>
+        <p:nvPr/>
+      </p:nvGrpSpPr>
+      <p:grpSpPr>
+        <a:xfrm>
+          <a:off x="0" y="0"/>
+          <a:ext cx="0" cy="0"/>
+          <a:chOff x="0" y="0"/>
+          <a:chExt cx="0" cy="0"/>
+        </a:xfrm>
+      </p:grpSpPr>
+      <p:sp>
+        <p:nvSpPr>
+          <p:cNvPr id="2" name="Заголовок 1"/>
+          <p:cNvSpPr>
+            <a:spLocks noGrp="1"/>
+          </p:cNvSpPr>
+          <p:nvPr>
+            <p:ph type="title"/>
+          </p:nvPr>
+        </p:nvSpPr>
+        <p:spPr/>
+        <p:txBody>
+          <a:bodyPr/>
+          <a:lstStyle/>
+          <a:p>
+            <a:r>
+              <a:rPr lang="ru-RU" b="1" dirty="0"/>
+              <a:t>10</a:t>
+            </a:r>
+            <a:r>
+              <a:rPr lang="af-ZA" b="1" dirty="0"/>
+              <a:t>BASE2 (Thinnet</a:t>
+            </a:r>
+            <a:r>
+              <a:rPr lang="af-ZA" b="1" dirty="0" smtClean="0"/>
+              <a:t>)</a:t>
+            </a:r>
+            <a:endParaRPr lang="ru-RU" dirty="0"/>
+          </a:p>
+        </p:txBody>
+      </p:sp>
+      <p:sp>
+        <p:nvSpPr>
+          <p:cNvPr id="4" name="Объект 3"/>
+          <p:cNvSpPr>
+            <a:spLocks noGrp="1"/>
+          </p:cNvSpPr>
+          <p:nvPr>
+            <p:ph sz="half" idx="2"/>
+          </p:nvPr>
+        </p:nvSpPr>
+        <p:spPr>
+          <a:xfrm>
+            <a:off x="6172200" y="2730500"/>
+            <a:ext cx="4875211" cy="2563814"/>
+          </a:xfrm>
+        </p:spPr>
+        <p:txBody>
+          <a:bodyPr>
+            <a:normAutofit fontScale="92500" lnSpcReduction="10000"/>
+          </a:bodyPr>
+          <a:lstStyle/>
+          <a:p>
+            <a:r>
+              <a:rPr lang="ru-RU" dirty="0"/>
+              <a:t>тонкий коаксиал </a:t>
+            </a:r>
+            <a:endParaRPr lang="en-US" dirty="0" smtClean="0"/>
+          </a:p>
+          <a:p>
+            <a:r>
+              <a:rPr lang="ru-RU" dirty="0" smtClean="0"/>
+              <a:t>185 м</a:t>
+            </a:r>
+            <a:endParaRPr lang="en-US" dirty="0" smtClean="0"/>
+          </a:p>
+          <a:p>
+            <a:r>
+              <a:rPr lang="af-ZA" dirty="0" smtClean="0"/>
+              <a:t>BNC-</a:t>
+            </a:r>
+            <a:r>
+              <a:rPr lang="ru-RU" dirty="0" smtClean="0"/>
+              <a:t>тройники</a:t>
+            </a:r>
+            <a:endParaRPr lang="en-US" dirty="0" smtClean="0"/>
+          </a:p>
+          <a:p>
+            <a:r>
+              <a:rPr lang="ru-RU" dirty="0" smtClean="0"/>
+              <a:t>10 Мбит/с</a:t>
+            </a:r>
+            <a:endParaRPr lang="en-US" dirty="0" smtClean="0"/>
+          </a:p>
+          <a:p>
+            <a:r>
+              <a:rPr lang="ru-RU" dirty="0" smtClean="0"/>
+              <a:t>Репитеры в </a:t>
+            </a:r>
+            <a:r>
+              <a:rPr lang="en-US" dirty="0" smtClean="0"/>
+              <a:t>IEEE 802.3c</a:t>
+            </a:r>
+            <a:endParaRPr lang="ru-RU" dirty="0"/>
+          </a:p>
+          <a:p>
+            <a:endParaRPr lang="ru-RU" dirty="0"/>
+          </a:p>
+        </p:txBody>
+      </p:sp>
+      <p:pic>
+        <p:nvPicPr>
+          <p:cNvPr id="4098" name="Picture 2" descr="10Base2 - NETWORK ENCYCLOPEDIA"/>
+          <p:cNvPicPr>
+            <a:picLocks noGrp="1" noChangeAspect="1" noChangeArrowheads="1"/>
+          </p:cNvPicPr>
+          <p:nvPr>
+            <p:ph sz="half" idx="1"/>
+          </p:nvPr>
+        </p:nvPicPr>
+        <p:blipFill>
+          <a:blip r:embed="rId2">
+            <a:extLst>
+              <a:ext uri="{28A0092B-C50C-407E-A947-70E740481C1C}">
+                <a14:useLocalDpi xmlns:a14="http://schemas.microsoft.com/office/drawing/2010/main" val="0"/>
+              </a:ext>
+            </a:extLst>
+          </a:blip>
+          <a:srcRect/>
+          <a:stretch>
+            <a:fillRect/>
+          </a:stretch>
+        </p:blipFill>
+        <p:spPr bwMode="auto">
+          <a:xfrm>
+            <a:off x="1141413" y="2730500"/>
+            <a:ext cx="4683799" cy="3060700"/>
+          </a:xfrm>
+          <a:prstGeom prst="rect">
+            <a:avLst/>
+          </a:prstGeom>
+          <a:noFill/>
+          <a:extLst>
+            <a:ext uri="{909E8E84-426E-40DD-AFC4-6F175D3DCCD1}">
+              <a14:hiddenFill xmlns:a14="http://schemas.microsoft.com/office/drawing/2010/main">
+                <a:solidFill>
+                  <a:srgbClr val="FFFFFF"/>
+                </a:solidFill>
+              </a14:hiddenFill>
+            </a:ext>
+          </a:extLst>
+        </p:spPr>
+      </p:pic>
+    </p:spTree>
+    <p:extLst>
+      <p:ext uri="{BB962C8B-B14F-4D97-AF65-F5344CB8AC3E}">
+        <p14:creationId xmlns:p14="http://schemas.microsoft.com/office/powerpoint/2010/main" val="1808712667"/>
+      </p:ext>
+    </p:extLst>
+  </p:cSld>
+  <p:clrMapOvr>
+    <a:masterClrMapping/>
+  </p:clrMapOvr>
+</p:sld>
+</file>
+
+<file path=ppt/slides/slide13.xml><?xml version="1.0" encoding="utf-8"?>
+<p:sld xmlns:a="http://schemas.openxmlformats.org/drawingml/2006/main" xmlns:r="http://schemas.openxmlformats.org/officeDocument/2006/relationships" xmlns:p="http://schemas.openxmlformats.org/presentationml/2006/main">
+  <p:cSld>
+    <p:spTree>
+      <p:nvGrpSpPr>
+        <p:cNvPr id="1" name=""/>
+        <p:cNvGrpSpPr/>
+        <p:nvPr/>
+      </p:nvGrpSpPr>
+      <p:grpSpPr>
+        <a:xfrm>
+          <a:off x="0" y="0"/>
+          <a:ext cx="0" cy="0"/>
+          <a:chOff x="0" y="0"/>
+          <a:chExt cx="0" cy="0"/>
+        </a:xfrm>
+      </p:grpSpPr>
+      <p:sp>
+        <p:nvSpPr>
+          <p:cNvPr id="2" name="Заголовок 1"/>
+          <p:cNvSpPr>
+            <a:spLocks noGrp="1"/>
+          </p:cNvSpPr>
+          <p:nvPr>
+            <p:ph type="title"/>
+          </p:nvPr>
+        </p:nvSpPr>
+        <p:spPr/>
+        <p:txBody>
+          <a:bodyPr/>
+          <a:lstStyle/>
+          <a:p>
+            <a:r>
+              <a:rPr lang="en-US" b="1" dirty="0" smtClean="0"/>
+              <a:t>10base-t</a:t>
+            </a:r>
+            <a:endParaRPr lang="ru-RU" b="1" dirty="0"/>
+          </a:p>
+        </p:txBody>
+      </p:sp>
+      <p:sp>
+        <p:nvSpPr>
+          <p:cNvPr id="4" name="Объект 3"/>
+          <p:cNvSpPr>
+            <a:spLocks noGrp="1"/>
+          </p:cNvSpPr>
+          <p:nvPr>
+            <p:ph sz="half" idx="2"/>
+          </p:nvPr>
+        </p:nvSpPr>
+        <p:spPr>
+          <a:xfrm>
+            <a:off x="8089900" y="2840036"/>
+            <a:ext cx="3694111" cy="2360614"/>
+          </a:xfrm>
+        </p:spPr>
+        <p:txBody>
+          <a:bodyPr/>
+          <a:lstStyle/>
+          <a:p>
+            <a:r>
+              <a:rPr lang="ru-RU" dirty="0" smtClean="0"/>
+              <a:t>Витая пара</a:t>
+            </a:r>
+          </a:p>
+          <a:p>
+            <a:r>
+              <a:rPr lang="ru-RU" dirty="0" err="1" smtClean="0"/>
+              <a:t>Хабы</a:t>
+            </a:r>
+            <a:endParaRPr lang="ru-RU" dirty="0" smtClean="0"/>
+          </a:p>
+          <a:p>
+            <a:r>
+              <a:rPr lang="ru-RU" dirty="0" smtClean="0"/>
+              <a:t>Один сегмент – до 100м</a:t>
+            </a:r>
+          </a:p>
+          <a:p>
+            <a:r>
+              <a:rPr lang="ru-RU" dirty="0" smtClean="0"/>
+              <a:t>До 1024 узлов</a:t>
+            </a:r>
+            <a:endParaRPr lang="ru-RU" dirty="0"/>
+          </a:p>
+        </p:txBody>
+      </p:sp>
+      <p:pic>
+        <p:nvPicPr>
+          <p:cNvPr id="5122" name="Picture 2" descr="4.6. Стандарт 10Base-T"/>
+          <p:cNvPicPr>
+            <a:picLocks noGrp="1" noChangeAspect="1" noChangeArrowheads="1"/>
+          </p:cNvPicPr>
+          <p:nvPr>
+            <p:ph sz="half" idx="1"/>
+          </p:nvPr>
+        </p:nvPicPr>
+        <p:blipFill>
+          <a:blip r:embed="rId2">
+            <a:extLst>
+              <a:ext uri="{28A0092B-C50C-407E-A947-70E740481C1C}">
+                <a14:useLocalDpi xmlns:a14="http://schemas.microsoft.com/office/drawing/2010/main" val="0"/>
+              </a:ext>
+            </a:extLst>
+          </a:blip>
+          <a:srcRect/>
+          <a:stretch>
+            <a:fillRect/>
+          </a:stretch>
+        </p:blipFill>
+        <p:spPr bwMode="auto">
+          <a:xfrm>
+            <a:off x="1729580" y="1796415"/>
+            <a:ext cx="5776119" cy="4447855"/>
+          </a:xfrm>
+          <a:prstGeom prst="rect">
+            <a:avLst/>
+          </a:prstGeom>
+          <a:noFill/>
+          <a:extLst>
+            <a:ext uri="{909E8E84-426E-40DD-AFC4-6F175D3DCCD1}">
+              <a14:hiddenFill xmlns:a14="http://schemas.microsoft.com/office/drawing/2010/main">
+                <a:solidFill>
+                  <a:srgbClr val="FFFFFF"/>
+                </a:solidFill>
+              </a14:hiddenFill>
+            </a:ext>
+          </a:extLst>
+        </p:spPr>
+      </p:pic>
+    </p:spTree>
+    <p:extLst>
+      <p:ext uri="{BB962C8B-B14F-4D97-AF65-F5344CB8AC3E}">
+        <p14:creationId xmlns:p14="http://schemas.microsoft.com/office/powerpoint/2010/main" val="1742691377"/>
+      </p:ext>
+    </p:extLst>
+  </p:cSld>
+  <p:clrMapOvr>
+    <a:masterClrMapping/>
+  </p:clrMapOvr>
+</p:sld>
+</file>
+
+<file path=ppt/slides/slide14.xml><?xml version="1.0" encoding="utf-8"?>
+<p:sld xmlns:a="http://schemas.openxmlformats.org/drawingml/2006/main" xmlns:r="http://schemas.openxmlformats.org/officeDocument/2006/relationships" xmlns:p="http://schemas.openxmlformats.org/presentationml/2006/main">
+  <p:cSld>
+    <p:spTree>
+      <p:nvGrpSpPr>
+        <p:cNvPr id="1" name=""/>
+        <p:cNvGrpSpPr/>
+        <p:nvPr/>
+      </p:nvGrpSpPr>
+      <p:grpSpPr>
+        <a:xfrm>
+          <a:off x="0" y="0"/>
+          <a:ext cx="0" cy="0"/>
+          <a:chOff x="0" y="0"/>
+          <a:chExt cx="0" cy="0"/>
+        </a:xfrm>
+      </p:grpSpPr>
+      <p:sp>
+        <p:nvSpPr>
+          <p:cNvPr id="2" name="Заголовок 1"/>
+          <p:cNvSpPr>
+            <a:spLocks noGrp="1"/>
+          </p:cNvSpPr>
+          <p:nvPr>
+            <p:ph type="title"/>
+          </p:nvPr>
+        </p:nvSpPr>
+        <p:spPr/>
+        <p:txBody>
+          <a:bodyPr/>
+          <a:lstStyle/>
+          <a:p>
+            <a:r>
+              <a:rPr lang="ru-RU" b="1" dirty="0"/>
+              <a:t>Формат кадра </a:t>
+            </a:r>
+            <a:r>
+              <a:rPr lang="af-ZA" b="1" dirty="0"/>
+              <a:t>Ethernet </a:t>
+            </a:r>
+            <a:r>
+              <a:rPr lang="af-ZA" b="1" dirty="0" smtClean="0"/>
+              <a:t>II</a:t>
+            </a:r>
+            <a:endParaRPr lang="ru-RU" dirty="0"/>
+          </a:p>
+        </p:txBody>
+      </p:sp>
+      <p:sp>
+        <p:nvSpPr>
+          <p:cNvPr id="3" name="Объект 2"/>
+          <p:cNvSpPr>
+            <a:spLocks noGrp="1"/>
+          </p:cNvSpPr>
+          <p:nvPr>
+            <p:ph idx="1"/>
+          </p:nvPr>
+        </p:nvSpPr>
+        <p:spPr>
+          <a:xfrm>
+            <a:off x="1141413" y="1738312"/>
+            <a:ext cx="9926638" cy="3541714"/>
+          </a:xfrm>
+        </p:spPr>
+        <p:txBody>
+          <a:bodyPr/>
+          <a:lstStyle/>
+          <a:p>
+            <a:r>
+              <a:rPr lang="ru-RU" dirty="0" smtClean="0"/>
+              <a:t>Преамбула + </a:t>
+            </a:r>
+            <a:r>
+              <a:rPr lang="en-US" dirty="0" smtClean="0"/>
+              <a:t>SFD: 7 + 1 </a:t>
+            </a:r>
+            <a:r>
+              <a:rPr lang="ru-RU" dirty="0" smtClean="0"/>
+              <a:t>байт.</a:t>
+            </a:r>
+          </a:p>
+          <a:p>
+            <a:r>
+              <a:rPr lang="en-US" dirty="0" smtClean="0"/>
+              <a:t>MAC </a:t>
+            </a:r>
+            <a:r>
+              <a:rPr lang="en-US" dirty="0" err="1" smtClean="0"/>
+              <a:t>Dest</a:t>
+            </a:r>
+            <a:r>
+              <a:rPr lang="en-US" dirty="0" smtClean="0"/>
+              <a:t> / MAC </a:t>
+            </a:r>
+            <a:r>
+              <a:rPr lang="en-US" dirty="0" err="1" smtClean="0"/>
+              <a:t>Src</a:t>
+            </a:r>
+            <a:r>
+              <a:rPr lang="en-US" dirty="0" smtClean="0"/>
+              <a:t>: </a:t>
+            </a:r>
+            <a:r>
+              <a:rPr lang="ru-RU" dirty="0" smtClean="0"/>
+              <a:t>по 6 байт.</a:t>
+            </a:r>
+          </a:p>
+          <a:p>
+            <a:r>
+              <a:rPr lang="en-US" dirty="0" smtClean="0"/>
+              <a:t>Type (</a:t>
+            </a:r>
+            <a:r>
+              <a:rPr lang="en-US" dirty="0" err="1" smtClean="0"/>
+              <a:t>EtherType</a:t>
+            </a:r>
+            <a:r>
+              <a:rPr lang="en-US" dirty="0" smtClean="0"/>
+              <a:t>): 2 </a:t>
+            </a:r>
+            <a:r>
+              <a:rPr lang="ru-RU" dirty="0" smtClean="0"/>
+              <a:t>байта (</a:t>
+            </a:r>
+            <a:r>
+              <a:rPr lang="ru-RU" dirty="0"/>
+              <a:t>демультиплексирование</a:t>
+            </a:r>
+            <a:r>
+              <a:rPr lang="ru-RU" dirty="0" smtClean="0"/>
+              <a:t>, 0</a:t>
+            </a:r>
+            <a:r>
+              <a:rPr lang="en-US" dirty="0" smtClean="0"/>
+              <a:t>x0800 </a:t>
+            </a:r>
+            <a:r>
+              <a:rPr lang="ru-RU" dirty="0" smtClean="0"/>
+              <a:t>для </a:t>
+            </a:r>
+            <a:r>
+              <a:rPr lang="en-US" dirty="0" smtClean="0"/>
+              <a:t>IPv4)</a:t>
+            </a:r>
+            <a:r>
+              <a:rPr lang="ru-RU" dirty="0" smtClean="0"/>
+              <a:t>.</a:t>
+            </a:r>
+            <a:endParaRPr lang="en-US" dirty="0" smtClean="0"/>
+          </a:p>
+          <a:p>
+            <a:r>
+              <a:rPr lang="en-US" dirty="0" smtClean="0"/>
+              <a:t>Payload: 45-1500 </a:t>
+            </a:r>
+            <a:r>
+              <a:rPr lang="ru-RU" dirty="0" smtClean="0"/>
+              <a:t>байт.</a:t>
+            </a:r>
+          </a:p>
+          <a:p>
+            <a:r>
+              <a:rPr lang="en-US" dirty="0" smtClean="0"/>
+              <a:t>FCS (CRC-32): 4 </a:t>
+            </a:r>
+            <a:r>
+              <a:rPr lang="ru-RU" dirty="0" smtClean="0"/>
+              <a:t>байта.</a:t>
+            </a:r>
+          </a:p>
+          <a:p>
+            <a:r>
+              <a:rPr lang="ru-RU" dirty="0" smtClean="0"/>
+              <a:t>Минимальная длина кадра: 64 байта.</a:t>
+            </a:r>
+          </a:p>
+        </p:txBody>
+      </p:sp>
+      <p:pic>
+        <p:nvPicPr>
+          <p:cNvPr id="5" name="Рисунок 4"/>
+          <p:cNvPicPr>
+            <a:picLocks noChangeAspect="1"/>
+          </p:cNvPicPr>
+          <p:nvPr/>
+        </p:nvPicPr>
+        <p:blipFill>
+          <a:blip r:embed="rId2"/>
+          <a:stretch>
+            <a:fillRect/>
+          </a:stretch>
+        </p:blipFill>
+        <p:spPr>
+          <a:xfrm>
+            <a:off x="2083593" y="5121336"/>
+            <a:ext cx="8021637" cy="1278484"/>
+          </a:xfrm>
+          <a:prstGeom prst="rect">
+            <a:avLst/>
+          </a:prstGeom>
+        </p:spPr>
+      </p:pic>
+    </p:spTree>
+    <p:extLst>
+      <p:ext uri="{BB962C8B-B14F-4D97-AF65-F5344CB8AC3E}">
+        <p14:creationId xmlns:p14="http://schemas.microsoft.com/office/powerpoint/2010/main" val="1222660744"/>
+      </p:ext>
+    </p:extLst>
+  </p:cSld>
+  <p:clrMapOvr>
+    <a:masterClrMapping/>
+  </p:clrMapOvr>
+  <p:timing>
+    <p:tnLst>
+      <p:par>
+        <p:cTn id="1" dur="indefinite" restart="never" nodeType="tmRoot"/>
+      </p:par>
+    </p:tnLst>
+  </p:timing>
+</p:sld>
+</file>
+
+<file path=ppt/slides/slide15.xml><?xml version="1.0" encoding="utf-8"?>
+<p:sld xmlns:a="http://schemas.openxmlformats.org/drawingml/2006/main" xmlns:r="http://schemas.openxmlformats.org/officeDocument/2006/relationships" xmlns:p="http://schemas.openxmlformats.org/presentationml/2006/main">
+  <p:cSld>
+    <p:spTree>
+      <p:nvGrpSpPr>
+        <p:cNvPr id="1" name=""/>
+        <p:cNvGrpSpPr/>
+        <p:nvPr/>
+      </p:nvGrpSpPr>
+      <p:grpSpPr>
+        <a:xfrm>
+          <a:off x="0" y="0"/>
+          <a:ext cx="0" cy="0"/>
+          <a:chOff x="0" y="0"/>
+          <a:chExt cx="0" cy="0"/>
+        </a:xfrm>
+      </p:grpSpPr>
+      <p:sp>
+        <p:nvSpPr>
+          <p:cNvPr id="2" name="Заголовок 1"/>
+          <p:cNvSpPr>
+            <a:spLocks noGrp="1"/>
+          </p:cNvSpPr>
+          <p:nvPr>
+            <p:ph type="title"/>
+          </p:nvPr>
+        </p:nvSpPr>
+        <p:spPr/>
+        <p:txBody>
+          <a:bodyPr/>
+          <a:lstStyle/>
+          <a:p>
+            <a:r>
               <a:rPr lang="ru-RU" dirty="0"/>
               <a:t>Адресация на канальном уровне (MAC-адрес)</a:t>
             </a:r>
@@ -12600,7 +13386,7 @@
 </p:sld>
 </file>
 
-<file path=ppt/slides/slide11.xml><?xml version="1.0" encoding="utf-8"?>
+<file path=ppt/slides/slide16.xml><?xml version="1.0" encoding="utf-8"?>
 <p:sld xmlns:a="http://schemas.openxmlformats.org/drawingml/2006/main" xmlns:r="http://schemas.openxmlformats.org/officeDocument/2006/relationships" xmlns:p="http://schemas.openxmlformats.org/presentationml/2006/main">
   <p:cSld>
     <p:spTree>
@@ -12762,7 +13548,7 @@
 </p:sld>
 </file>
 
-<file path=ppt/slides/slide12.xml><?xml version="1.0" encoding="utf-8"?>
+<file path=ppt/slides/slide17.xml><?xml version="1.0" encoding="utf-8"?>
 <p:sld xmlns:a="http://schemas.openxmlformats.org/drawingml/2006/main" xmlns:r="http://schemas.openxmlformats.org/officeDocument/2006/relationships" xmlns:p="http://schemas.openxmlformats.org/presentationml/2006/main">
   <p:cSld>
     <p:spTree>
@@ -12980,7 +13766,7 @@
 </p:sld>
 </file>
 
-<file path=ppt/slides/slide13.xml><?xml version="1.0" encoding="utf-8"?>
+<file path=ppt/slides/slide18.xml><?xml version="1.0" encoding="utf-8"?>
 <p:sld xmlns:a="http://schemas.openxmlformats.org/drawingml/2006/main" xmlns:r="http://schemas.openxmlformats.org/officeDocument/2006/relationships" xmlns:p="http://schemas.openxmlformats.org/presentationml/2006/main">
   <p:cSld>
     <p:spTree>
@@ -13693,7 +14479,7 @@
 </p:sld>
 </file>
 
-<file path=ppt/slides/slide14.xml><?xml version="1.0" encoding="utf-8"?>
+<file path=ppt/slides/slide19.xml><?xml version="1.0" encoding="utf-8"?>
 <p:sld xmlns:a="http://schemas.openxmlformats.org/drawingml/2006/main" xmlns:r="http://schemas.openxmlformats.org/officeDocument/2006/relationships" xmlns:p="http://schemas.openxmlformats.org/presentationml/2006/main">
   <p:cSld>
     <p:spTree>
@@ -13808,264 +14594,6 @@
     <p:extLst>
       <p:ext uri="{BB962C8B-B14F-4D97-AF65-F5344CB8AC3E}">
         <p14:creationId xmlns:p14="http://schemas.microsoft.com/office/powerpoint/2010/main" val="3624493369"/>
-      </p:ext>
-    </p:extLst>
-  </p:cSld>
-  <p:clrMapOvr>
-    <a:masterClrMapping/>
-  </p:clrMapOvr>
-</p:sld>
-</file>
-
-<file path=ppt/slides/slide15.xml><?xml version="1.0" encoding="utf-8"?>
-<p:sld xmlns:a="http://schemas.openxmlformats.org/drawingml/2006/main" xmlns:r="http://schemas.openxmlformats.org/officeDocument/2006/relationships" xmlns:p="http://schemas.openxmlformats.org/presentationml/2006/main">
-  <p:cSld>
-    <p:spTree>
-      <p:nvGrpSpPr>
-        <p:cNvPr id="1" name=""/>
-        <p:cNvGrpSpPr/>
-        <p:nvPr/>
-      </p:nvGrpSpPr>
-      <p:grpSpPr>
-        <a:xfrm>
-          <a:off x="0" y="0"/>
-          <a:ext cx="0" cy="0"/>
-          <a:chOff x="0" y="0"/>
-          <a:chExt cx="0" cy="0"/>
-        </a:xfrm>
-      </p:grpSpPr>
-      <p:sp>
-        <p:nvSpPr>
-          <p:cNvPr id="2" name="Заголовок 1"/>
-          <p:cNvSpPr>
-            <a:spLocks noGrp="1"/>
-          </p:cNvSpPr>
-          <p:nvPr>
-            <p:ph type="title"/>
-          </p:nvPr>
-        </p:nvSpPr>
-        <p:spPr/>
-        <p:txBody>
-          <a:bodyPr/>
-          <a:lstStyle/>
-          <a:p>
-            <a:r>
-              <a:rPr lang="ru-RU" b="1" dirty="0"/>
-              <a:t>Заполни пропуски: «Анатомия </a:t>
-            </a:r>
-            <a:r>
-              <a:rPr lang="af-ZA" b="1" dirty="0"/>
-              <a:t>CSMA/CD</a:t>
-            </a:r>
-            <a:r>
-              <a:rPr lang="af-ZA" b="1" dirty="0" smtClean="0"/>
-              <a:t>»</a:t>
-            </a:r>
-            <a:endParaRPr lang="ru-RU" dirty="0"/>
-          </a:p>
-        </p:txBody>
-      </p:sp>
-      <p:sp>
-        <p:nvSpPr>
-          <p:cNvPr id="3" name="Объект 2"/>
-          <p:cNvSpPr>
-            <a:spLocks noGrp="1"/>
-          </p:cNvSpPr>
-          <p:nvPr>
-            <p:ph idx="1"/>
-          </p:nvPr>
-        </p:nvSpPr>
-        <p:spPr>
-          <a:xfrm>
-            <a:off x="1141412" y="2249487"/>
-            <a:ext cx="10086365" cy="2867636"/>
-          </a:xfrm>
-        </p:spPr>
-        <p:txBody>
-          <a:bodyPr/>
-          <a:lstStyle/>
-          <a:p>
-            <a:pPr marL="0" indent="0">
-              <a:buNone/>
-            </a:pPr>
-            <a:r>
-              <a:rPr lang="ru-RU" dirty="0"/>
-              <a:t>«Когда адаптер фиксирует коллизию в среде, он немедленно останавливает передачу и отправляет в сеть специальный </a:t>
-            </a:r>
-            <a:r>
-              <a:rPr lang="ru-RU" b="1" dirty="0"/>
-              <a:t>[ 1 ]</a:t>
-            </a:r>
-            <a:r>
-              <a:rPr lang="ru-RU" dirty="0"/>
-              <a:t>-сигнал. Затем он выдерживает случайную паузу. Если коллизии повторяются, максимальный интервал паузы увеличивается. Предельное число попыток отправить кадр перед его окончательным сбросом составляет </a:t>
-            </a:r>
-            <a:r>
-              <a:rPr lang="ru-RU" b="1" dirty="0"/>
-              <a:t>[ 2 ]</a:t>
-            </a:r>
-            <a:r>
-              <a:rPr lang="ru-RU" dirty="0"/>
-              <a:t> раз.»</a:t>
-            </a:r>
-            <a:endParaRPr lang="ru-RU" dirty="0"/>
-          </a:p>
-        </p:txBody>
-      </p:sp>
-    </p:spTree>
-    <p:extLst>
-      <p:ext uri="{BB962C8B-B14F-4D97-AF65-F5344CB8AC3E}">
-        <p14:creationId xmlns:p14="http://schemas.microsoft.com/office/powerpoint/2010/main" val="862017051"/>
-      </p:ext>
-    </p:extLst>
-  </p:cSld>
-  <p:clrMapOvr>
-    <a:masterClrMapping/>
-  </p:clrMapOvr>
-</p:sld>
-</file>
-
-<file path=ppt/slides/slide16.xml><?xml version="1.0" encoding="utf-8"?>
-<p:sld xmlns:a="http://schemas.openxmlformats.org/drawingml/2006/main" xmlns:r="http://schemas.openxmlformats.org/officeDocument/2006/relationships" xmlns:p="http://schemas.openxmlformats.org/presentationml/2006/main">
-  <p:cSld>
-    <p:spTree>
-      <p:nvGrpSpPr>
-        <p:cNvPr id="1" name=""/>
-        <p:cNvGrpSpPr/>
-        <p:nvPr/>
-      </p:nvGrpSpPr>
-      <p:grpSpPr>
-        <a:xfrm>
-          <a:off x="0" y="0"/>
-          <a:ext cx="0" cy="0"/>
-          <a:chOff x="0" y="0"/>
-          <a:chExt cx="0" cy="0"/>
-        </a:xfrm>
-      </p:grpSpPr>
-      <p:sp>
-        <p:nvSpPr>
-          <p:cNvPr id="2" name="Заголовок 1"/>
-          <p:cNvSpPr>
-            <a:spLocks noGrp="1"/>
-          </p:cNvSpPr>
-          <p:nvPr>
-            <p:ph type="title"/>
-          </p:nvPr>
-        </p:nvSpPr>
-        <p:spPr>
-          <a:xfrm>
-            <a:off x="1141413" y="618517"/>
-            <a:ext cx="9905998" cy="2441205"/>
-          </a:xfrm>
-        </p:spPr>
-        <p:txBody>
-          <a:bodyPr>
-            <a:normAutofit fontScale="90000"/>
-          </a:bodyPr>
-          <a:lstStyle/>
-          <a:p>
-            <a:r>
-              <a:rPr lang="ru-RU" dirty="0"/>
-              <a:t>Какой из следующих MAC-адресов является </a:t>
-            </a:r>
-            <a:r>
-              <a:rPr lang="ru-RU" b="1" dirty="0"/>
-              <a:t>широковещательным (</a:t>
-            </a:r>
-            <a:r>
-              <a:rPr lang="ru-RU" b="1" dirty="0" err="1"/>
-              <a:t>Broadcast</a:t>
-            </a:r>
-            <a:r>
-              <a:rPr lang="ru-RU" b="1" dirty="0"/>
-              <a:t>)</a:t>
-            </a:r>
-            <a:r>
-              <a:rPr lang="ru-RU" dirty="0"/>
-              <a:t>, то есть будет принят абсолютно всеми устройствами в сегменте?</a:t>
-            </a:r>
-            <a:endParaRPr lang="ru-RU" dirty="0"/>
-          </a:p>
-        </p:txBody>
-      </p:sp>
-      <p:sp>
-        <p:nvSpPr>
-          <p:cNvPr id="3" name="Объект 2"/>
-          <p:cNvSpPr>
-            <a:spLocks noGrp="1"/>
-          </p:cNvSpPr>
-          <p:nvPr>
-            <p:ph idx="1"/>
-          </p:nvPr>
-        </p:nvSpPr>
-        <p:spPr>
-          <a:xfrm>
-            <a:off x="1141412" y="3330941"/>
-            <a:ext cx="9905999" cy="2401644"/>
-          </a:xfrm>
-        </p:spPr>
-        <p:txBody>
-          <a:bodyPr/>
-          <a:lstStyle/>
-          <a:p>
-            <a:pPr marL="0" indent="0">
-              <a:buNone/>
-            </a:pPr>
-            <a:r>
-              <a:rPr lang="ru-RU" dirty="0"/>
-              <a:t>А) 00:1</a:t>
-            </a:r>
-            <a:r>
-              <a:rPr lang="af-ZA" dirty="0"/>
-              <a:t>A:2B:3C:4D:5E</a:t>
-            </a:r>
-          </a:p>
-          <a:p>
-            <a:pPr marL="0" indent="0">
-              <a:buNone/>
-            </a:pPr>
-            <a:r>
-              <a:rPr lang="ru-RU" dirty="0"/>
-              <a:t>Б) </a:t>
-            </a:r>
-            <a:r>
-              <a:rPr lang="af-ZA" dirty="0"/>
-              <a:t>FF:FF:FF:FF:FF:FF</a:t>
-            </a:r>
-          </a:p>
-          <a:p>
-            <a:pPr marL="0" indent="0">
-              <a:buNone/>
-            </a:pPr>
-            <a:r>
-              <a:rPr lang="ru-RU" dirty="0"/>
-              <a:t>В) 01:00:5</a:t>
-            </a:r>
-            <a:r>
-              <a:rPr lang="af-ZA" dirty="0"/>
-              <a:t>E:00:00:01</a:t>
-            </a:r>
-          </a:p>
-          <a:p>
-            <a:pPr marL="0" indent="0">
-              <a:buNone/>
-            </a:pPr>
-            <a:r>
-              <a:rPr lang="ru-RU" dirty="0"/>
-              <a:t>Г) </a:t>
-            </a:r>
-            <a:r>
-              <a:rPr lang="af-ZA" dirty="0"/>
-              <a:t>AA:BB:CC:DD:EE:FF</a:t>
-            </a:r>
-            <a:endParaRPr lang="ru-RU" dirty="0"/>
-          </a:p>
-        </p:txBody>
-      </p:sp>
-    </p:spTree>
-    <p:extLst>
-      <p:ext uri="{BB962C8B-B14F-4D97-AF65-F5344CB8AC3E}">
-        <p14:creationId xmlns:p14="http://schemas.microsoft.com/office/powerpoint/2010/main" val="811213990"/>
       </p:ext>
     </p:extLst>
   </p:cSld>
@@ -14245,6 +14773,262 @@
       </p:par>
     </p:tnLst>
   </p:timing>
+</p:sld>
+</file>
+
+<file path=ppt/slides/slide20.xml><?xml version="1.0" encoding="utf-8"?>
+<p:sld xmlns:a="http://schemas.openxmlformats.org/drawingml/2006/main" xmlns:r="http://schemas.openxmlformats.org/officeDocument/2006/relationships" xmlns:p="http://schemas.openxmlformats.org/presentationml/2006/main">
+  <p:cSld>
+    <p:spTree>
+      <p:nvGrpSpPr>
+        <p:cNvPr id="1" name=""/>
+        <p:cNvGrpSpPr/>
+        <p:nvPr/>
+      </p:nvGrpSpPr>
+      <p:grpSpPr>
+        <a:xfrm>
+          <a:off x="0" y="0"/>
+          <a:ext cx="0" cy="0"/>
+          <a:chOff x="0" y="0"/>
+          <a:chExt cx="0" cy="0"/>
+        </a:xfrm>
+      </p:grpSpPr>
+      <p:sp>
+        <p:nvSpPr>
+          <p:cNvPr id="2" name="Заголовок 1"/>
+          <p:cNvSpPr>
+            <a:spLocks noGrp="1"/>
+          </p:cNvSpPr>
+          <p:nvPr>
+            <p:ph type="title"/>
+          </p:nvPr>
+        </p:nvSpPr>
+        <p:spPr/>
+        <p:txBody>
+          <a:bodyPr/>
+          <a:lstStyle/>
+          <a:p>
+            <a:r>
+              <a:rPr lang="ru-RU" b="1" dirty="0"/>
+              <a:t>Заполни пропуски: «Анатомия </a:t>
+            </a:r>
+            <a:r>
+              <a:rPr lang="af-ZA" b="1" dirty="0"/>
+              <a:t>CSMA/CD</a:t>
+            </a:r>
+            <a:r>
+              <a:rPr lang="af-ZA" b="1" dirty="0" smtClean="0"/>
+              <a:t>»</a:t>
+            </a:r>
+            <a:endParaRPr lang="ru-RU" dirty="0"/>
+          </a:p>
+        </p:txBody>
+      </p:sp>
+      <p:sp>
+        <p:nvSpPr>
+          <p:cNvPr id="3" name="Объект 2"/>
+          <p:cNvSpPr>
+            <a:spLocks noGrp="1"/>
+          </p:cNvSpPr>
+          <p:nvPr>
+            <p:ph idx="1"/>
+          </p:nvPr>
+        </p:nvSpPr>
+        <p:spPr>
+          <a:xfrm>
+            <a:off x="1141412" y="2249487"/>
+            <a:ext cx="10086365" cy="2867636"/>
+          </a:xfrm>
+        </p:spPr>
+        <p:txBody>
+          <a:bodyPr/>
+          <a:lstStyle/>
+          <a:p>
+            <a:pPr marL="0" indent="0">
+              <a:buNone/>
+            </a:pPr>
+            <a:r>
+              <a:rPr lang="ru-RU" dirty="0"/>
+              <a:t>«Когда адаптер фиксирует коллизию в среде, он немедленно останавливает передачу и отправляет в сеть специальный </a:t>
+            </a:r>
+            <a:r>
+              <a:rPr lang="ru-RU" b="1" dirty="0"/>
+              <a:t>[ 1 ]</a:t>
+            </a:r>
+            <a:r>
+              <a:rPr lang="ru-RU" dirty="0"/>
+              <a:t>-сигнал. Затем он выдерживает случайную паузу. Если коллизии повторяются, максимальный интервал паузы увеличивается. Предельное число попыток отправить кадр перед его окончательным сбросом составляет </a:t>
+            </a:r>
+            <a:r>
+              <a:rPr lang="ru-RU" b="1" dirty="0"/>
+              <a:t>[ 2 ]</a:t>
+            </a:r>
+            <a:r>
+              <a:rPr lang="ru-RU" dirty="0"/>
+              <a:t> раз.»</a:t>
+            </a:r>
+          </a:p>
+        </p:txBody>
+      </p:sp>
+    </p:spTree>
+    <p:extLst>
+      <p:ext uri="{BB962C8B-B14F-4D97-AF65-F5344CB8AC3E}">
+        <p14:creationId xmlns:p14="http://schemas.microsoft.com/office/powerpoint/2010/main" val="862017051"/>
+      </p:ext>
+    </p:extLst>
+  </p:cSld>
+  <p:clrMapOvr>
+    <a:masterClrMapping/>
+  </p:clrMapOvr>
+</p:sld>
+</file>
+
+<file path=ppt/slides/slide21.xml><?xml version="1.0" encoding="utf-8"?>
+<p:sld xmlns:a="http://schemas.openxmlformats.org/drawingml/2006/main" xmlns:r="http://schemas.openxmlformats.org/officeDocument/2006/relationships" xmlns:p="http://schemas.openxmlformats.org/presentationml/2006/main">
+  <p:cSld>
+    <p:spTree>
+      <p:nvGrpSpPr>
+        <p:cNvPr id="1" name=""/>
+        <p:cNvGrpSpPr/>
+        <p:nvPr/>
+      </p:nvGrpSpPr>
+      <p:grpSpPr>
+        <a:xfrm>
+          <a:off x="0" y="0"/>
+          <a:ext cx="0" cy="0"/>
+          <a:chOff x="0" y="0"/>
+          <a:chExt cx="0" cy="0"/>
+        </a:xfrm>
+      </p:grpSpPr>
+      <p:sp>
+        <p:nvSpPr>
+          <p:cNvPr id="2" name="Заголовок 1"/>
+          <p:cNvSpPr>
+            <a:spLocks noGrp="1"/>
+          </p:cNvSpPr>
+          <p:nvPr>
+            <p:ph type="title"/>
+          </p:nvPr>
+        </p:nvSpPr>
+        <p:spPr>
+          <a:xfrm>
+            <a:off x="1141413" y="618517"/>
+            <a:ext cx="9905998" cy="2441205"/>
+          </a:xfrm>
+        </p:spPr>
+        <p:txBody>
+          <a:bodyPr>
+            <a:normAutofit fontScale="90000"/>
+          </a:bodyPr>
+          <a:lstStyle/>
+          <a:p>
+            <a:r>
+              <a:rPr lang="ru-RU" dirty="0"/>
+              <a:t>Какой из следующих MAC-адресов является </a:t>
+            </a:r>
+            <a:r>
+              <a:rPr lang="ru-RU" b="1" dirty="0"/>
+              <a:t>широковещательным (</a:t>
+            </a:r>
+            <a:r>
+              <a:rPr lang="ru-RU" b="1" dirty="0" err="1"/>
+              <a:t>Broadcast</a:t>
+            </a:r>
+            <a:r>
+              <a:rPr lang="ru-RU" b="1" dirty="0"/>
+              <a:t>)</a:t>
+            </a:r>
+            <a:r>
+              <a:rPr lang="ru-RU" dirty="0"/>
+              <a:t>, то есть будет принят абсолютно всеми устройствами в сегменте?</a:t>
+            </a:r>
+          </a:p>
+        </p:txBody>
+      </p:sp>
+      <p:sp>
+        <p:nvSpPr>
+          <p:cNvPr id="3" name="Объект 2"/>
+          <p:cNvSpPr>
+            <a:spLocks noGrp="1"/>
+          </p:cNvSpPr>
+          <p:nvPr>
+            <p:ph idx="1"/>
+          </p:nvPr>
+        </p:nvSpPr>
+        <p:spPr>
+          <a:xfrm>
+            <a:off x="1141412" y="3330941"/>
+            <a:ext cx="9905999" cy="2401644"/>
+          </a:xfrm>
+        </p:spPr>
+        <p:txBody>
+          <a:bodyPr/>
+          <a:lstStyle/>
+          <a:p>
+            <a:pPr marL="0" indent="0">
+              <a:buNone/>
+            </a:pPr>
+            <a:r>
+              <a:rPr lang="ru-RU" dirty="0"/>
+              <a:t>А) 00:1</a:t>
+            </a:r>
+            <a:r>
+              <a:rPr lang="af-ZA" dirty="0"/>
+              <a:t>A:2B:3C:4D:5E</a:t>
+            </a:r>
+          </a:p>
+          <a:p>
+            <a:pPr marL="0" indent="0">
+              <a:buNone/>
+            </a:pPr>
+            <a:r>
+              <a:rPr lang="ru-RU" dirty="0"/>
+              <a:t>Б) </a:t>
+            </a:r>
+            <a:r>
+              <a:rPr lang="af-ZA" dirty="0"/>
+              <a:t>FF:FF:FF:FF:FF:FF</a:t>
+            </a:r>
+          </a:p>
+          <a:p>
+            <a:pPr marL="0" indent="0">
+              <a:buNone/>
+            </a:pPr>
+            <a:r>
+              <a:rPr lang="ru-RU" dirty="0"/>
+              <a:t>В) 01:00:5</a:t>
+            </a:r>
+            <a:r>
+              <a:rPr lang="af-ZA" dirty="0"/>
+              <a:t>E:00:00:01</a:t>
+            </a:r>
+          </a:p>
+          <a:p>
+            <a:pPr marL="0" indent="0">
+              <a:buNone/>
+            </a:pPr>
+            <a:r>
+              <a:rPr lang="ru-RU" dirty="0"/>
+              <a:t>Г) </a:t>
+            </a:r>
+            <a:r>
+              <a:rPr lang="af-ZA" dirty="0"/>
+              <a:t>AA:BB:CC:DD:EE:FF</a:t>
+            </a:r>
+            <a:endParaRPr lang="ru-RU" dirty="0"/>
+          </a:p>
+        </p:txBody>
+      </p:sp>
+    </p:spTree>
+    <p:extLst>
+      <p:ext uri="{BB962C8B-B14F-4D97-AF65-F5344CB8AC3E}">
+        <p14:creationId xmlns:p14="http://schemas.microsoft.com/office/powerpoint/2010/main" val="811213990"/>
+      </p:ext>
+    </p:extLst>
+  </p:cSld>
+  <p:clrMapOvr>
+    <a:masterClrMapping/>
+  </p:clrMapOvr>
 </p:sld>
 </file>
 
@@ -14535,9 +15319,7 @@
         </p:nvSpPr>
         <p:spPr/>
         <p:txBody>
-          <a:bodyPr>
-            <a:normAutofit/>
-          </a:bodyPr>
+          <a:bodyPr/>
           <a:lstStyle/>
           <a:p>
             <a:r>
@@ -14545,91 +15327,18 @@
               <a:t>Кадрирование</a:t>
             </a:r>
             <a:endParaRPr lang="ru-RU" dirty="0"/>
-          </a:p>
-        </p:txBody>
-      </p:sp>
-      <p:sp>
-        <p:nvSpPr>
-          <p:cNvPr id="3" name="Объект 2"/>
-          <p:cNvSpPr>
-            <a:spLocks noGrp="1"/>
-          </p:cNvSpPr>
-          <p:nvPr>
-            <p:ph idx="1"/>
-          </p:nvPr>
-        </p:nvSpPr>
-        <p:spPr>
-          <a:xfrm>
-            <a:off x="1141412" y="2097088"/>
-            <a:ext cx="9905999" cy="3541714"/>
-          </a:xfrm>
-        </p:spPr>
-        <p:txBody>
-          <a:bodyPr/>
-          <a:lstStyle/>
-          <a:p>
-            <a:r>
-              <a:rPr lang="ru-RU" dirty="0" smtClean="0"/>
-              <a:t>Байт-ориентированные (</a:t>
-            </a:r>
-            <a:r>
-              <a:rPr lang="en-US" dirty="0" smtClean="0"/>
-              <a:t>PPP):</a:t>
-            </a:r>
-          </a:p>
-          <a:p>
-            <a:pPr lvl="1"/>
-            <a:r>
-              <a:rPr lang="ru-RU" dirty="0"/>
-              <a:t>Данные рассматриваются как цепочка байтов (октетов).</a:t>
-            </a:r>
-          </a:p>
-          <a:p>
-            <a:pPr lvl="1"/>
-            <a:r>
-              <a:rPr lang="ru-RU" dirty="0"/>
-              <a:t>Границы выделяются служебными символами (флагами начала и конца).</a:t>
-            </a:r>
-          </a:p>
-          <a:p>
-            <a:pPr lvl="1"/>
-            <a:r>
-              <a:rPr lang="ru-RU" dirty="0"/>
-              <a:t>Для предотвращения ложного распознавания флагов используется </a:t>
-            </a:r>
-            <a:r>
-              <a:rPr lang="en-US" b="1" dirty="0"/>
-              <a:t>Byte-Staffing</a:t>
-            </a:r>
-            <a:r>
-              <a:rPr lang="en-US" dirty="0"/>
-              <a:t>.</a:t>
-            </a:r>
-          </a:p>
-          <a:p>
-            <a:pPr marL="0" indent="0">
-              <a:buNone/>
-            </a:pPr>
-            <a:endParaRPr lang="en-US" dirty="0"/>
-          </a:p>
-          <a:p>
-            <a:endParaRPr lang="en-US" dirty="0" smtClean="0"/>
-          </a:p>
-          <a:p>
-            <a:pPr marL="457200" lvl="1" indent="0">
-              <a:buNone/>
-            </a:pPr>
-            <a:endParaRPr lang="en-US" dirty="0" smtClean="0"/>
           </a:p>
         </p:txBody>
       </p:sp>
       <p:pic>
         <p:nvPicPr>
-          <p:cNvPr id="12" name="Рисунок 11"/>
+          <p:cNvPr id="4" name="Объект 3"/>
           <p:cNvPicPr>
-            <a:picLocks noChangeAspect="1"/>
+            <a:picLocks noGrp="1" noChangeAspect="1"/>
           </p:cNvPicPr>
-          <p:nvPr/>
+          <p:nvPr>
+            <p:ph idx="1"/>
+          </p:nvPr>
         </p:nvPicPr>
         <p:blipFill>
           <a:blip r:embed="rId2"/>
@@ -14639,32 +15348,8 @@
         </p:blipFill>
         <p:spPr>
           <a:xfrm>
-            <a:off x="2371725" y="4553747"/>
-            <a:ext cx="8134350" cy="1143000"/>
-          </a:xfrm>
-          <a:prstGeom prst="rect">
-            <a:avLst/>
-          </a:prstGeom>
-        </p:spPr>
-      </p:pic>
-      <p:pic>
-        <p:nvPicPr>
-          <p:cNvPr id="13" name="Рисунок 12"/>
-          <p:cNvPicPr>
-            <a:picLocks noChangeAspect="1"/>
-          </p:cNvPicPr>
-          <p:nvPr/>
-        </p:nvPicPr>
-        <p:blipFill>
-          <a:blip r:embed="rId2"/>
-          <a:stretch>
-            <a:fillRect/>
-          </a:stretch>
-        </p:blipFill>
-        <p:spPr>
-          <a:xfrm>
-            <a:off x="2524125" y="4706147"/>
-            <a:ext cx="8134350" cy="1143000"/>
+            <a:off x="1600170" y="2891631"/>
+            <a:ext cx="8988483" cy="3069554"/>
           </a:xfrm>
           <a:prstGeom prst="rect">
             <a:avLst/>
@@ -14674,20 +15359,13 @@
     </p:spTree>
     <p:extLst>
       <p:ext uri="{BB962C8B-B14F-4D97-AF65-F5344CB8AC3E}">
-        <p14:creationId xmlns:p14="http://schemas.microsoft.com/office/powerpoint/2010/main" val="420852218"/>
+        <p14:creationId xmlns:p14="http://schemas.microsoft.com/office/powerpoint/2010/main" val="3295539419"/>
       </p:ext>
     </p:extLst>
   </p:cSld>
   <p:clrMapOvr>
     <a:masterClrMapping/>
   </p:clrMapOvr>
-  <p:timing>
-    <p:tnLst>
-      <p:par>
-        <p:cTn id="1" dur="indefinite" restart="never" nodeType="tmRoot"/>
-      </p:par>
-    </p:tnLst>
-  </p:timing>
 </p:sld>
 </file>
 
@@ -14726,10 +15404,9 @@
           <a:lstStyle/>
           <a:p>
             <a:r>
-              <a:rPr lang="ru-RU" b="1" dirty="0" smtClean="0"/>
-              <a:t>Кадрирование</a:t>
-            </a:r>
-            <a:endParaRPr lang="ru-RU" dirty="0"/>
+              <a:rPr lang="ru-RU" b="1" dirty="0"/>
+              <a:t>Байт-ориентированные протоколы</a:t>
+            </a:r>
           </a:p>
         </p:txBody>
       </p:sp>
@@ -14755,50 +15432,46 @@
           <a:p>
             <a:r>
               <a:rPr lang="ru-RU" dirty="0" smtClean="0"/>
-              <a:t>Бит-ориентированные (</a:t>
+              <a:t>Байт-ориентированные (</a:t>
             </a:r>
             <a:r>
               <a:rPr lang="en-US" dirty="0" smtClean="0"/>
-              <a:t>HDLC):</a:t>
+              <a:t>PPP):</a:t>
             </a:r>
           </a:p>
           <a:p>
             <a:pPr lvl="1"/>
             <a:r>
               <a:rPr lang="ru-RU" dirty="0"/>
-              <a:t>Данные рассматриваются как непрерывный поток бит</a:t>
-            </a:r>
-            <a:r>
-              <a:rPr lang="ru-RU" dirty="0" smtClean="0"/>
+              <a:t>Данные рассматриваются как цепочка байтов (октетов).</a:t>
+            </a:r>
+          </a:p>
+          <a:p>
+            <a:pPr lvl="1"/>
+            <a:r>
+              <a:rPr lang="ru-RU" dirty="0"/>
+              <a:t>Границы выделяются служебными символами (флагами начала и конца).</a:t>
+            </a:r>
+          </a:p>
+          <a:p>
+            <a:pPr lvl="1"/>
+            <a:r>
+              <a:rPr lang="ru-RU" dirty="0"/>
+              <a:t>Для предотвращения ложного распознавания флагов используется </a:t>
+            </a:r>
+            <a:r>
+              <a:rPr lang="en-US" b="1" dirty="0"/>
+              <a:t>Byte-Staffing</a:t>
+            </a:r>
+            <a:r>
+              <a:rPr lang="en-US" dirty="0"/>
               <a:t>.</a:t>
             </a:r>
-            <a:endParaRPr lang="en-US" dirty="0" smtClean="0"/>
-          </a:p>
-          <a:p>
-            <a:pPr lvl="1"/>
-            <a:r>
-              <a:rPr lang="ru-RU" dirty="0" smtClean="0"/>
-              <a:t>Флаг границы: последовательность 01111110.</a:t>
-            </a:r>
-          </a:p>
-          <a:p>
-            <a:pPr lvl="1"/>
-            <a:r>
-              <a:rPr lang="en-US" b="1" dirty="0" smtClean="0"/>
-              <a:t>Bit-staffing (</a:t>
-            </a:r>
-            <a:r>
-              <a:rPr lang="ru-RU" b="1" dirty="0"/>
-              <a:t>вставка битов): </a:t>
-            </a:r>
-            <a:r>
-              <a:rPr lang="ru-RU" dirty="0"/>
-              <a:t>передатчик после любых 5 единиц подряд всегда вставляет 0. Приемник видит 5 </a:t>
-            </a:r>
-            <a:r>
-              <a:rPr lang="ru-RU" dirty="0" smtClean="0"/>
-              <a:t>единиц:</a:t>
-            </a:r>
+          </a:p>
+          <a:p>
+            <a:pPr marL="0" indent="0">
+              <a:buNone/>
+            </a:pPr>
             <a:endParaRPr lang="en-US" dirty="0"/>
           </a:p>
           <a:p>
@@ -14814,7 +15487,7 @@
       </p:sp>
       <p:pic>
         <p:nvPicPr>
-          <p:cNvPr id="6" name="Рисунок 5"/>
+          <p:cNvPr id="12" name="Рисунок 11"/>
           <p:cNvPicPr>
             <a:picLocks noChangeAspect="1"/>
           </p:cNvPicPr>
@@ -14828,8 +15501,8 @@
         </p:blipFill>
         <p:spPr>
           <a:xfrm>
-            <a:off x="1681162" y="4567237"/>
-            <a:ext cx="9531635" cy="1538288"/>
+            <a:off x="2371725" y="4553747"/>
+            <a:ext cx="8134350" cy="1143000"/>
           </a:xfrm>
           <a:prstGeom prst="rect">
             <a:avLst/>
@@ -14839,7 +15512,7 @@
     </p:spTree>
     <p:extLst>
       <p:ext uri="{BB962C8B-B14F-4D97-AF65-F5344CB8AC3E}">
-        <p14:creationId xmlns:p14="http://schemas.microsoft.com/office/powerpoint/2010/main" val="2211441674"/>
+        <p14:creationId xmlns:p14="http://schemas.microsoft.com/office/powerpoint/2010/main" val="420852218"/>
       </p:ext>
     </p:extLst>
   </p:cSld>
@@ -14885,12 +15558,14 @@
         </p:nvSpPr>
         <p:spPr/>
         <p:txBody>
-          <a:bodyPr/>
+          <a:bodyPr>
+            <a:normAutofit/>
+          </a:bodyPr>
           <a:lstStyle/>
           <a:p>
             <a:r>
               <a:rPr lang="ru-RU" b="1" dirty="0"/>
-              <a:t>Обнаружение ошибок: Контрольные суммы и CRC</a:t>
+              <a:t>Бит-ориентированные протоколы</a:t>
             </a:r>
           </a:p>
         </p:txBody>
@@ -14905,99 +15580,103 @@
             <p:ph idx="1"/>
           </p:nvPr>
         </p:nvSpPr>
-        <p:spPr/>
+        <p:spPr>
+          <a:xfrm>
+            <a:off x="1141412" y="2097088"/>
+            <a:ext cx="9905999" cy="3541714"/>
+          </a:xfrm>
+        </p:spPr>
         <p:txBody>
-          <a:bodyPr>
-            <a:normAutofit lnSpcReduction="10000"/>
-          </a:bodyPr>
+          <a:bodyPr/>
           <a:lstStyle/>
           <a:p>
             <a:r>
+              <a:rPr lang="ru-RU" dirty="0" smtClean="0"/>
+              <a:t>Бит-ориентированные (</a:t>
+            </a:r>
+            <a:r>
+              <a:rPr lang="en-US" dirty="0" smtClean="0"/>
+              <a:t>HDLC):</a:t>
+            </a:r>
+          </a:p>
+          <a:p>
+            <a:pPr lvl="1"/>
+            <a:r>
+              <a:rPr lang="ru-RU" dirty="0"/>
+              <a:t>Данные рассматриваются как непрерывный поток бит</a:t>
+            </a:r>
+            <a:r>
+              <a:rPr lang="ru-RU" dirty="0" smtClean="0"/>
+              <a:t>.</a:t>
+            </a:r>
+            <a:endParaRPr lang="en-US" dirty="0" smtClean="0"/>
+          </a:p>
+          <a:p>
+            <a:pPr lvl="1"/>
+            <a:r>
+              <a:rPr lang="ru-RU" dirty="0" smtClean="0"/>
+              <a:t>Флаг границы: последовательность 01111110.</a:t>
+            </a:r>
+          </a:p>
+          <a:p>
+            <a:pPr lvl="1"/>
+            <a:r>
+              <a:rPr lang="en-US" b="1" dirty="0" smtClean="0"/>
+              <a:t>Bit-staffing (</a:t>
+            </a:r>
+            <a:r>
               <a:rPr lang="ru-RU" b="1" dirty="0"/>
-              <a:t>CRC-32 (</a:t>
-            </a:r>
-            <a:r>
-              <a:rPr lang="ru-RU" b="1" dirty="0" err="1"/>
-              <a:t>Cyclic</a:t>
-            </a:r>
-            <a:r>
-              <a:rPr lang="ru-RU" b="1" dirty="0"/>
-              <a:t> </a:t>
-            </a:r>
-            <a:r>
-              <a:rPr lang="ru-RU" b="1" dirty="0" err="1"/>
-              <a:t>Redundancy</a:t>
-            </a:r>
-            <a:r>
-              <a:rPr lang="ru-RU" b="1" dirty="0"/>
-              <a:t> </a:t>
-            </a:r>
-            <a:r>
-              <a:rPr lang="ru-RU" b="1" dirty="0" err="1"/>
-              <a:t>Check</a:t>
-            </a:r>
-            <a:r>
-              <a:rPr lang="ru-RU" b="1" dirty="0"/>
-              <a:t>):</a:t>
+              <a:t>вставка битов): </a:t>
             </a:r>
             <a:r>
               <a:rPr lang="ru-RU" dirty="0"/>
-              <a:t> циклический избыточный код, полиномиальный алгоритм. Добавляет 32 бита (4 байта) к кадру, гарантирует обнаружение практически любых случайных пакетов ошибок.</a:t>
-            </a:r>
-          </a:p>
-          <a:p>
-            <a:r>
-              <a:rPr lang="ru-RU" b="1" dirty="0"/>
-              <a:t>Механизм надежной доставки (ARQ):</a:t>
-            </a:r>
-            <a:endParaRPr lang="ru-RU" dirty="0"/>
-          </a:p>
-          <a:p>
-            <a:pPr lvl="1"/>
-            <a:r>
-              <a:rPr lang="ru-RU" b="1" dirty="0"/>
-              <a:t>ACK (Подтверждение)</a:t>
-            </a:r>
-            <a:r>
-              <a:rPr lang="ru-RU" dirty="0"/>
-              <a:t> — уведомление о корректном приеме.</a:t>
-            </a:r>
-          </a:p>
-          <a:p>
-            <a:pPr lvl="1"/>
-            <a:r>
-              <a:rPr lang="ru-RU" b="1" dirty="0" err="1"/>
-              <a:t>Timeout</a:t>
-            </a:r>
-            <a:r>
-              <a:rPr lang="ru-RU" b="1" dirty="0"/>
-              <a:t> (Тайм-аут)</a:t>
-            </a:r>
-            <a:r>
-              <a:rPr lang="ru-RU" dirty="0"/>
-              <a:t> — время ожидания ACK, по истечении которого узел выполняет повторную отправку (</a:t>
-            </a:r>
-            <a:r>
-              <a:rPr lang="ru-RU" dirty="0" err="1"/>
-              <a:t>Retransmission</a:t>
-            </a:r>
-            <a:r>
-              <a:rPr lang="ru-RU" dirty="0"/>
-              <a:t>).</a:t>
-            </a:r>
-          </a:p>
-          <a:p>
-            <a:pPr marL="0" indent="0">
+              <a:t>передатчик после любых 5 единиц подряд всегда вставляет 0. Приемник видит 5 </a:t>
+            </a:r>
+            <a:r>
+              <a:rPr lang="ru-RU" dirty="0" smtClean="0"/>
+              <a:t>единиц:</a:t>
+            </a:r>
+            <a:endParaRPr lang="en-US" dirty="0"/>
+          </a:p>
+          <a:p>
+            <a:endParaRPr lang="en-US" dirty="0" smtClean="0"/>
+          </a:p>
+          <a:p>
+            <a:pPr marL="457200" lvl="1" indent="0">
               <a:buNone/>
             </a:pPr>
-            <a:endParaRPr lang="ru-RU" dirty="0"/>
+            <a:endParaRPr lang="en-US" dirty="0" smtClean="0"/>
           </a:p>
         </p:txBody>
       </p:sp>
+      <p:pic>
+        <p:nvPicPr>
+          <p:cNvPr id="6" name="Рисунок 5"/>
+          <p:cNvPicPr>
+            <a:picLocks noChangeAspect="1"/>
+          </p:cNvPicPr>
+          <p:nvPr/>
+        </p:nvPicPr>
+        <p:blipFill>
+          <a:blip r:embed="rId2"/>
+          <a:stretch>
+            <a:fillRect/>
+          </a:stretch>
+        </p:blipFill>
+        <p:spPr>
+          <a:xfrm>
+            <a:off x="1681162" y="4567237"/>
+            <a:ext cx="9531635" cy="1538288"/>
+          </a:xfrm>
+          <a:prstGeom prst="rect">
+            <a:avLst/>
+          </a:prstGeom>
+        </p:spPr>
+      </p:pic>
     </p:spTree>
     <p:extLst>
       <p:ext uri="{BB962C8B-B14F-4D97-AF65-F5344CB8AC3E}">
-        <p14:creationId xmlns:p14="http://schemas.microsoft.com/office/powerpoint/2010/main" val="2190335558"/>
+        <p14:creationId xmlns:p14="http://schemas.microsoft.com/office/powerpoint/2010/main" val="2211441674"/>
       </p:ext>
     </p:extLst>
   </p:cSld>
@@ -15048,13 +15727,8 @@
           <a:p>
             <a:r>
               <a:rPr lang="ru-RU" b="1" dirty="0"/>
-              <a:t>Сети с множественным доступом, </a:t>
-            </a:r>
-            <a:r>
-              <a:rPr lang="ru-RU" b="1" dirty="0" err="1"/>
-              <a:t>Ethernet</a:t>
-            </a:r>
-            <a:endParaRPr lang="ru-RU" b="1" dirty="0"/>
+              <a:t>Обнаружение ошибок: Контрольные суммы и CRC</a:t>
+            </a:r>
           </a:p>
         </p:txBody>
       </p:sp>
@@ -15070,106 +15744,83 @@
         </p:nvSpPr>
         <p:spPr/>
         <p:txBody>
-          <a:bodyPr/>
+          <a:bodyPr>
+            <a:normAutofit lnSpcReduction="10000"/>
+          </a:bodyPr>
           <a:lstStyle/>
           <a:p>
-            <a:pPr marL="0" indent="0">
-              <a:buNone/>
-            </a:pPr>
             <a:r>
               <a:rPr lang="ru-RU" b="1" dirty="0"/>
-              <a:t>Эволюция физического уровня </a:t>
-            </a:r>
-            <a:r>
-              <a:rPr lang="af-ZA" b="1" dirty="0" smtClean="0"/>
-              <a:t>Ethernet</a:t>
-            </a:r>
-            <a:r>
-              <a:rPr lang="ru-RU" b="1" dirty="0" smtClean="0"/>
-              <a:t>:</a:t>
-            </a:r>
-            <a:endParaRPr lang="af-ZA" b="1" dirty="0"/>
-          </a:p>
-          <a:p>
-            <a:r>
-              <a:rPr lang="af-ZA" b="1" dirty="0"/>
-              <a:t>10BASE5 (Thicknet):</a:t>
-            </a:r>
-            <a:r>
-              <a:rPr lang="af-ZA" dirty="0"/>
-              <a:t> </a:t>
+              <a:t>CRC-32 (</a:t>
+            </a:r>
+            <a:r>
+              <a:rPr lang="ru-RU" b="1" dirty="0" err="1"/>
+              <a:t>Cyclic</a:t>
+            </a:r>
+            <a:r>
+              <a:rPr lang="ru-RU" b="1" dirty="0"/>
+              <a:t> </a:t>
+            </a:r>
+            <a:r>
+              <a:rPr lang="ru-RU" b="1" dirty="0" err="1"/>
+              <a:t>Redundancy</a:t>
+            </a:r>
+            <a:r>
+              <a:rPr lang="ru-RU" b="1" dirty="0"/>
+              <a:t> </a:t>
+            </a:r>
+            <a:r>
+              <a:rPr lang="ru-RU" b="1" dirty="0" err="1"/>
+              <a:t>Check</a:t>
+            </a:r>
+            <a:r>
+              <a:rPr lang="ru-RU" b="1" dirty="0"/>
+              <a:t>):</a:t>
             </a:r>
             <a:r>
               <a:rPr lang="ru-RU" dirty="0"/>
-              <a:t>толстый коаксиал 500 м, шина, «</a:t>
+              <a:t> циклический избыточный код, полиномиальный алгоритм. Добавляет 32 бита (4 байта) к кадру, гарантирует обнаружение практически любых случайных пакетов ошибок.</a:t>
+            </a:r>
+          </a:p>
+          <a:p>
+            <a:r>
+              <a:rPr lang="ru-RU" b="1" dirty="0"/>
+              <a:t>Механизм надежной доставки (ARQ):</a:t>
+            </a:r>
+            <a:endParaRPr lang="ru-RU" dirty="0"/>
+          </a:p>
+          <a:p>
+            <a:pPr lvl="1"/>
+            <a:r>
+              <a:rPr lang="ru-RU" b="1" dirty="0"/>
+              <a:t>ACK (Подтверждение)</a:t>
+            </a:r>
+            <a:r>
+              <a:rPr lang="ru-RU" dirty="0"/>
+              <a:t> — уведомление о корректном приеме.</a:t>
+            </a:r>
+          </a:p>
+          <a:p>
+            <a:pPr lvl="1"/>
+            <a:r>
+              <a:rPr lang="ru-RU" b="1" dirty="0" err="1"/>
+              <a:t>Timeout</a:t>
+            </a:r>
+            <a:r>
+              <a:rPr lang="ru-RU" b="1" dirty="0"/>
+              <a:t> (Тайм-аут)</a:t>
+            </a:r>
+            <a:r>
+              <a:rPr lang="ru-RU" dirty="0"/>
+              <a:t> — время ожидания ACK, по истечении которого узел выполняет повторную отправку (</a:t>
             </a:r>
             <a:r>
               <a:rPr lang="ru-RU" dirty="0" err="1"/>
-              <a:t>вампирчики</a:t>
+              <a:t>Retransmission</a:t>
             </a:r>
             <a:r>
               <a:rPr lang="ru-RU" dirty="0"/>
-              <a:t>», 10 Мбит/с.</a:t>
-            </a:r>
-          </a:p>
-          <a:p>
-            <a:r>
-              <a:rPr lang="ru-RU" b="1" dirty="0"/>
-              <a:t>10</a:t>
-            </a:r>
-            <a:r>
-              <a:rPr lang="af-ZA" b="1" dirty="0"/>
-              <a:t>BASE2 (Thinnet):</a:t>
-            </a:r>
-            <a:r>
-              <a:rPr lang="af-ZA" dirty="0"/>
-              <a:t> </a:t>
-            </a:r>
-            <a:r>
-              <a:rPr lang="ru-RU" dirty="0"/>
-              <a:t>тонкий коаксиал 185 м, </a:t>
-            </a:r>
-            <a:r>
-              <a:rPr lang="af-ZA" dirty="0"/>
-              <a:t>BNC-</a:t>
-            </a:r>
-            <a:r>
-              <a:rPr lang="ru-RU" dirty="0"/>
-              <a:t>тройники, 10 Мбит/с.</a:t>
-            </a:r>
-          </a:p>
-          <a:p>
-            <a:r>
-              <a:rPr lang="ru-RU" b="1" dirty="0"/>
-              <a:t>10</a:t>
-            </a:r>
-            <a:r>
-              <a:rPr lang="af-ZA" b="1" dirty="0"/>
-              <a:t>BASE-T:</a:t>
-            </a:r>
-            <a:r>
-              <a:rPr lang="af-ZA" dirty="0"/>
-              <a:t> </a:t>
-            </a:r>
-            <a:r>
-              <a:rPr lang="ru-RU" dirty="0"/>
-              <a:t>витая пара </a:t>
-            </a:r>
-            <a:r>
-              <a:rPr lang="af-ZA" dirty="0"/>
-              <a:t>Cat.3, </a:t>
-            </a:r>
-            <a:r>
-              <a:rPr lang="ru-RU" dirty="0"/>
-              <a:t>топология «звезда» через </a:t>
-            </a:r>
-            <a:r>
-              <a:rPr lang="ru-RU" dirty="0" err="1"/>
-              <a:t>хабы</a:t>
-            </a:r>
-            <a:r>
-              <a:rPr lang="ru-RU" dirty="0"/>
-              <a:t> (логически — общая шина), сегмент до 100 м.</a:t>
+              <a:t>).</a:t>
             </a:r>
           </a:p>
           <a:p>
@@ -15183,7 +15834,7 @@
     </p:spTree>
     <p:extLst>
       <p:ext uri="{BB962C8B-B14F-4D97-AF65-F5344CB8AC3E}">
-        <p14:creationId xmlns:p14="http://schemas.microsoft.com/office/powerpoint/2010/main" val="1199678716"/>
+        <p14:creationId xmlns:p14="http://schemas.microsoft.com/office/powerpoint/2010/main" val="2190335558"/>
       </p:ext>
     </p:extLst>
   </p:cSld>
@@ -15234,17 +15885,13 @@
           <a:p>
             <a:r>
               <a:rPr lang="ru-RU" b="1" dirty="0"/>
-              <a:t>Формат кадра </a:t>
-            </a:r>
-            <a:r>
-              <a:rPr lang="af-ZA" b="1" dirty="0"/>
-              <a:t>Ethernet </a:t>
-            </a:r>
-            <a:r>
-              <a:rPr lang="af-ZA" b="1" dirty="0" smtClean="0"/>
-              <a:t>II</a:t>
-            </a:r>
-            <a:endParaRPr lang="ru-RU" dirty="0"/>
+              <a:t>Сети с множественным доступом, </a:t>
+            </a:r>
+            <a:r>
+              <a:rPr lang="ru-RU" b="1" dirty="0" err="1"/>
+              <a:t>Ethernet</a:t>
+            </a:r>
+            <a:endParaRPr lang="ru-RU" b="1" dirty="0"/>
           </a:p>
         </p:txBody>
       </p:sp>
@@ -15260,152 +15907,168 @@
         </p:nvSpPr>
         <p:spPr>
           <a:xfrm>
-            <a:off x="1141413" y="1878012"/>
-            <a:ext cx="9926638" cy="3541714"/>
+            <a:off x="569912" y="2097088"/>
+            <a:ext cx="5995987" cy="4354512"/>
           </a:xfrm>
         </p:spPr>
         <p:txBody>
-          <a:bodyPr/>
+          <a:bodyPr>
+            <a:normAutofit/>
+          </a:bodyPr>
           <a:lstStyle/>
           <a:p>
-            <a:r>
-              <a:rPr lang="ru-RU" dirty="0" smtClean="0"/>
-              <a:t>Преамбула + </a:t>
-            </a:r>
-            <a:r>
-              <a:rPr lang="en-US" dirty="0" smtClean="0"/>
-              <a:t>SFD: 7 + 1 </a:t>
-            </a:r>
-            <a:r>
-              <a:rPr lang="ru-RU" dirty="0" smtClean="0"/>
-              <a:t>байт.</a:t>
-            </a:r>
-          </a:p>
-          <a:p>
-            <a:r>
-              <a:rPr lang="en-US" dirty="0" smtClean="0"/>
-              <a:t>MAC </a:t>
-            </a:r>
-            <a:r>
-              <a:rPr lang="en-US" dirty="0" err="1" smtClean="0"/>
-              <a:t>Dest</a:t>
-            </a:r>
-            <a:r>
-              <a:rPr lang="en-US" dirty="0" smtClean="0"/>
-              <a:t> / MAC </a:t>
-            </a:r>
-            <a:r>
-              <a:rPr lang="en-US" dirty="0" err="1" smtClean="0"/>
-              <a:t>Src</a:t>
-            </a:r>
-            <a:r>
-              <a:rPr lang="en-US" dirty="0" smtClean="0"/>
-              <a:t>: </a:t>
-            </a:r>
-            <a:r>
-              <a:rPr lang="ru-RU" dirty="0" smtClean="0"/>
-              <a:t>по 6 байт.</a:t>
-            </a:r>
-          </a:p>
-          <a:p>
-            <a:r>
-              <a:rPr lang="en-US" dirty="0" smtClean="0"/>
-              <a:t>Type (</a:t>
-            </a:r>
-            <a:r>
-              <a:rPr lang="en-US" dirty="0" err="1" smtClean="0"/>
-              <a:t>EtherType</a:t>
-            </a:r>
-            <a:r>
-              <a:rPr lang="en-US" dirty="0" smtClean="0"/>
-              <a:t>): 2 </a:t>
-            </a:r>
-            <a:r>
-              <a:rPr lang="ru-RU" dirty="0" smtClean="0"/>
-              <a:t>байта (</a:t>
+            <a:pPr marL="0" indent="0">
+              <a:buNone/>
+            </a:pPr>
+            <a:r>
+              <a:rPr lang="ru-RU" b="1" dirty="0"/>
+              <a:t>Эволюция физического уровня </a:t>
+            </a:r>
+            <a:r>
+              <a:rPr lang="af-ZA" b="1" dirty="0" smtClean="0"/>
+              <a:t>Ethernet</a:t>
+            </a:r>
+            <a:r>
+              <a:rPr lang="ru-RU" b="1" dirty="0" smtClean="0"/>
+              <a:t>:</a:t>
+            </a:r>
+            <a:endParaRPr lang="af-ZA" b="1" dirty="0"/>
+          </a:p>
+          <a:p>
+            <a:r>
+              <a:rPr lang="af-ZA" b="1" dirty="0"/>
+              <a:t>10BASE5 (Thicknet):</a:t>
+            </a:r>
+            <a:r>
+              <a:rPr lang="af-ZA" dirty="0"/>
+              <a:t> </a:t>
             </a:r>
             <a:r>
               <a:rPr lang="ru-RU" dirty="0"/>
-              <a:t>демультиплексирование</a:t>
-            </a:r>
-            <a:r>
-              <a:rPr lang="ru-RU" dirty="0" smtClean="0"/>
-              <a:t>, 0</a:t>
-            </a:r>
-            <a:r>
-              <a:rPr lang="en-US" dirty="0" smtClean="0"/>
-              <a:t>x0800 </a:t>
-            </a:r>
-            <a:r>
-              <a:rPr lang="ru-RU" dirty="0" smtClean="0"/>
-              <a:t>для </a:t>
-            </a:r>
-            <a:r>
-              <a:rPr lang="en-US" dirty="0" smtClean="0"/>
-              <a:t>IPv4)</a:t>
-            </a:r>
-            <a:r>
-              <a:rPr lang="ru-RU" dirty="0" smtClean="0"/>
-              <a:t>.</a:t>
-            </a:r>
-            <a:endParaRPr lang="en-US" dirty="0" smtClean="0"/>
-          </a:p>
-          <a:p>
-            <a:r>
-              <a:rPr lang="en-US" dirty="0" smtClean="0"/>
-              <a:t>Payload: 45-1500 </a:t>
-            </a:r>
-            <a:r>
-              <a:rPr lang="ru-RU" dirty="0" smtClean="0"/>
-              <a:t>байт.</a:t>
-            </a:r>
-          </a:p>
-          <a:p>
-            <a:r>
-              <a:rPr lang="en-US" dirty="0" smtClean="0"/>
-              <a:t>FCS (CRC-32): 4 </a:t>
-            </a:r>
-            <a:r>
-              <a:rPr lang="ru-RU" dirty="0" smtClean="0"/>
-              <a:t>байта.</a:t>
-            </a:r>
-          </a:p>
-          <a:p>
-            <a:r>
-              <a:rPr lang="ru-RU" dirty="0" smtClean="0"/>
-              <a:t>Минимальная длина кадра: 64 байта.</a:t>
-            </a:r>
+              <a:t>толстый коаксиал 500 м, шина, «</a:t>
+            </a:r>
+            <a:r>
+              <a:rPr lang="ru-RU" dirty="0" err="1"/>
+              <a:t>вампирчики</a:t>
+            </a:r>
+            <a:r>
+              <a:rPr lang="ru-RU" dirty="0"/>
+              <a:t>», 10 Мбит/с.</a:t>
+            </a:r>
+          </a:p>
+          <a:p>
+            <a:r>
+              <a:rPr lang="ru-RU" b="1" dirty="0"/>
+              <a:t>10</a:t>
+            </a:r>
+            <a:r>
+              <a:rPr lang="af-ZA" b="1" dirty="0"/>
+              <a:t>BASE2 (Thinnet):</a:t>
+            </a:r>
+            <a:r>
+              <a:rPr lang="af-ZA" dirty="0"/>
+              <a:t> </a:t>
+            </a:r>
+            <a:r>
+              <a:rPr lang="ru-RU" dirty="0"/>
+              <a:t>тонкий коаксиал 185 м, </a:t>
+            </a:r>
+            <a:r>
+              <a:rPr lang="af-ZA" dirty="0"/>
+              <a:t>BNC-</a:t>
+            </a:r>
+            <a:r>
+              <a:rPr lang="ru-RU" dirty="0"/>
+              <a:t>тройники, 10 Мбит/с.</a:t>
+            </a:r>
+          </a:p>
+          <a:p>
+            <a:r>
+              <a:rPr lang="ru-RU" b="1" dirty="0"/>
+              <a:t>10</a:t>
+            </a:r>
+            <a:r>
+              <a:rPr lang="af-ZA" b="1" dirty="0"/>
+              <a:t>BASE-T:</a:t>
+            </a:r>
+            <a:r>
+              <a:rPr lang="af-ZA" dirty="0"/>
+              <a:t> </a:t>
+            </a:r>
+            <a:r>
+              <a:rPr lang="ru-RU" dirty="0"/>
+              <a:t>витая пара </a:t>
+            </a:r>
+            <a:r>
+              <a:rPr lang="af-ZA" dirty="0"/>
+              <a:t>Cat.3, </a:t>
+            </a:r>
+            <a:r>
+              <a:rPr lang="ru-RU" dirty="0"/>
+              <a:t>топология «звезда» через </a:t>
+            </a:r>
+            <a:r>
+              <a:rPr lang="ru-RU" dirty="0" err="1"/>
+              <a:t>хабы</a:t>
+            </a:r>
+            <a:r>
+              <a:rPr lang="ru-RU" dirty="0"/>
+              <a:t> (логически — общая шина), сегмент до 100 м.</a:t>
+            </a:r>
+          </a:p>
+          <a:p>
+            <a:pPr marL="0" indent="0">
+              <a:buNone/>
+            </a:pPr>
+            <a:endParaRPr lang="ru-RU" dirty="0"/>
           </a:p>
         </p:txBody>
       </p:sp>
       <p:pic>
         <p:nvPicPr>
-          <p:cNvPr id="5" name="Рисунок 4"/>
+          <p:cNvPr id="1026" name="Picture 2" descr="CSMA CD vs CSMA CA - What's the difference? - PyNet Labs"/>
           <p:cNvPicPr>
-            <a:picLocks noChangeAspect="1"/>
+            <a:picLocks noChangeAspect="1" noChangeArrowheads="1"/>
           </p:cNvPicPr>
           <p:nvPr/>
         </p:nvPicPr>
         <p:blipFill>
-          <a:blip r:embed="rId2"/>
+          <a:blip r:embed="rId2">
+            <a:extLst>
+              <a:ext uri="{28A0092B-C50C-407E-A947-70E740481C1C}">
+                <a14:useLocalDpi xmlns:a14="http://schemas.microsoft.com/office/drawing/2010/main" val="0"/>
+              </a:ext>
+            </a:extLst>
+          </a:blip>
+          <a:srcRect/>
           <a:stretch>
             <a:fillRect/>
           </a:stretch>
         </p:blipFill>
-        <p:spPr>
+        <p:spPr bwMode="auto">
           <a:xfrm>
-            <a:off x="2083593" y="5419726"/>
-            <a:ext cx="8021637" cy="1278484"/>
+            <a:off x="6896073" y="2750832"/>
+            <a:ext cx="4875238" cy="3047024"/>
           </a:xfrm>
           <a:prstGeom prst="rect">
             <a:avLst/>
           </a:prstGeom>
+          <a:noFill/>
+          <a:extLst>
+            <a:ext uri="{909E8E84-426E-40DD-AFC4-6F175D3DCCD1}">
+              <a14:hiddenFill xmlns:a14="http://schemas.microsoft.com/office/drawing/2010/main">
+                <a:solidFill>
+                  <a:srgbClr val="FFFFFF"/>
+                </a:solidFill>
+              </a14:hiddenFill>
+            </a:ext>
+          </a:extLst>
         </p:spPr>
       </p:pic>
     </p:spTree>
     <p:extLst>
       <p:ext uri="{BB962C8B-B14F-4D97-AF65-F5344CB8AC3E}">
-        <p14:creationId xmlns:p14="http://schemas.microsoft.com/office/powerpoint/2010/main" val="1222660744"/>
+        <p14:creationId xmlns:p14="http://schemas.microsoft.com/office/powerpoint/2010/main" val="1199678716"/>
       </p:ext>
     </p:extLst>
   </p:cSld>
